--- a/docs/Retail-Family-Investor.pptx
+++ b/docs/Retail-Family-Investor.pptx
@@ -115,1557 +115,6 @@
     </a:lvl9pPr>
   </p:defaultTextStyle>
 </p:presentation>
-</file>
-
-<file path=ppt/charts/chart1.xml><?xml version="1.0" encoding="utf-8"?>
-<c:chartSpace xmlns:c="http://schemas.openxmlformats.org/drawingml/2006/chart" xmlns:a="http://schemas.openxmlformats.org/drawingml/2006/main" xmlns:r="http://schemas.openxmlformats.org/officeDocument/2006/relationships">
-  <c:date1904 val="0"/>
-  <c:roundedCorners val="1"/>
-  <c:chart>
-    <c:title>
-      <c:tx>
-        <c:rich>
-          <a:bodyPr/>
-          <a:lstStyle/>
-          <a:p>
-            <a:pPr>
-              <a:defRPr sz="1300" b="0" i="0" u="none" strike="noStrike">
-                <a:solidFill>
-                  <a:srgbClr val="16243B"/>
-                </a:solidFill>
-                <a:latin typeface="Calibri"/>
-              </a:defRPr>
-            </a:pPr>
-            <a:r>
-              <a:rPr sz="1300" b="0" i="0" u="none" strike="noStrike">
-                <a:solidFill>
-                  <a:srgbClr val="16243B"/>
-                </a:solidFill>
-                <a:latin typeface="Calibri"/>
-              </a:rPr>
-              <a:t>Логистика на выкупленную куртку, % выручки</a:t>
-            </a:r>
-          </a:p>
-        </c:rich>
-      </c:tx>
-      <c:layout/>
-      <c:overlay val="0"/>
-    </c:title>
-    <c:autoTitleDeleted val="0"/>
-    <c:plotArea>
-      <c:layout/>
-      <c:barChart>
-        <c:barDir val="col"/>
-        <c:grouping val="clustered"/>
-        <c:varyColors val="0"/>
-        <c:ser>
-          <c:idx val="0"/>
-          <c:order val="0"/>
-          <c:tx>
-            <c:strRef>
-              <c:f>Sheet1!$B$1</c:f>
-              <c:strCache>
-                <c:ptCount val="1"/>
-                <c:pt idx="0">
-                  <c:v>Логистика, % выручки</c:v>
-                </c:pt>
-              </c:strCache>
-            </c:strRef>
-          </c:tx>
-          <c:spPr>
-            <a:solidFill>
-              <a:srgbClr val="8FA0B2"/>
-            </a:solidFill>
-            <a:effectLst/>
-          </c:spPr>
-          <c:invertIfNegative val="0"/>
-          <c:dLbls>
-            <c:numFmt formatCode="#,##0" sourceLinked="0"/>
-            <c:txPr>
-              <a:bodyPr/>
-              <a:lstStyle/>
-              <a:p>
-                <a:pPr>
-                  <a:defRPr b="1" i="0" strike="noStrike" sz="1600" u="none">
-                    <a:solidFill>
-                      <a:srgbClr val="16243B"/>
-                    </a:solidFill>
-                    <a:latin typeface="Arial"/>
-                  </a:defRPr>
-                </a:pPr>
-              </a:p>
-            </c:txPr>
-            <c:showLegendKey val="0"/>
-            <c:showVal val="1"/>
-            <c:showCatName val="0"/>
-            <c:showSerName val="0"/>
-            <c:showPercent val="0"/>
-            <c:showBubbleSize val="0"/>
-            <c:showLeaderLines val="0"/>
-          </c:dLbls>
-          <c:dPt>
-            <c:idx val="0"/>
-            <c:invertIfNegative val="0"/>
-            <c:bubble3D val="0"/>
-            <c:spPr>
-              <a:solidFill>
-                <a:srgbClr val="8FA0B2"/>
-              </a:solidFill>
-              <a:effectLst/>
-            </c:spPr>
-          </c:dPt>
-          <c:dPt>
-            <c:idx val="1"/>
-            <c:invertIfNegative val="0"/>
-            <c:bubble3D val="0"/>
-            <c:spPr>
-              <a:solidFill>
-                <a:srgbClr val="C0392B"/>
-              </a:solidFill>
-              <a:effectLst/>
-            </c:spPr>
-          </c:dPt>
-          <c:cat>
-            <c:multiLvlStrRef>
-              <c:f>Sheet1!$A$2:$A$3</c:f>
-              <c:multiLvlStrCache>
-                <c:ptCount val="2"/>
-                <c:lvl>
-                  <c:pt idx="0">
-                    <c:v>до 23.03</c:v>
-                  </c:pt>
-                  <c:pt idx="1">
-                    <c:v>после ИРП</c:v>
-                  </c:pt>
-                </c:lvl>
-              </c:multiLvlStrCache>
-            </c:multiLvlStrRef>
-          </c:cat>
-          <c:val>
-            <c:numRef>
-              <c:f>Sheet1!$B$2:$B$3</c:f>
-              <c:numCache>
-                <c:formatCode>General</c:formatCode>
-                <c:ptCount val="2"/>
-                <c:pt idx="0">
-                  <c:v>28</c:v>
-                </c:pt>
-                <c:pt idx="1">
-                  <c:v>52</c:v>
-                </c:pt>
-              </c:numCache>
-            </c:numRef>
-          </c:val>
-        </c:ser>
-        <c:dLbls>
-          <c:numFmt formatCode="#,##0" sourceLinked="0"/>
-          <c:txPr>
-            <a:bodyPr/>
-            <a:lstStyle/>
-            <a:p>
-              <a:pPr>
-                <a:defRPr b="1" i="0" strike="noStrike" sz="1600" u="none">
-                  <a:solidFill>
-                    <a:srgbClr val="16243B"/>
-                  </a:solidFill>
-                  <a:latin typeface="Arial"/>
-                </a:defRPr>
-              </a:pPr>
-            </a:p>
-          </c:txPr>
-          <c:showLegendKey val="0"/>
-          <c:showVal val="1"/>
-          <c:showCatName val="0"/>
-          <c:showSerName val="0"/>
-          <c:showPercent val="0"/>
-          <c:showBubbleSize val="0"/>
-          <c:showLeaderLines val="0"/>
-        </c:dLbls>
-        <c:gapWidth val="150"/>
-        <c:overlap val="0"/>
-        <c:axId val="2094734554"/>
-        <c:axId val="2094734552"/>
-        <c:axId val="2094734556"/>
-      </c:barChart>
-      <c:catAx>
-        <c:axId val="2094734554"/>
-        <c:scaling>
-          <c:orientation val="minMax"/>
-        </c:scaling>
-        <c:delete val="0"/>
-        <c:axPos val="b"/>
-        <c:numFmt formatCode="General" sourceLinked="1"/>
-        <c:majorTickMark val="out"/>
-        <c:minorTickMark val="none"/>
-        <c:tickLblPos val="low"/>
-        <c:spPr>
-          <a:ln w="12700" cap="flat">
-            <a:solidFill>
-              <a:srgbClr val="888888"/>
-            </a:solidFill>
-            <a:prstDash val="solid"/>
-            <a:round/>
-          </a:ln>
-        </c:spPr>
-        <c:txPr>
-          <a:bodyPr/>
-          <a:lstStyle/>
-          <a:p>
-            <a:pPr>
-              <a:defRPr sz="1300" b="0" i="0" u="none" strike="noStrike">
-                <a:solidFill>
-                  <a:srgbClr val="6B7787"/>
-                </a:solidFill>
-                <a:latin typeface="Arial"/>
-              </a:defRPr>
-            </a:pPr>
-            <a:endParaRPr lang="en-US"/>
-          </a:p>
-        </c:txPr>
-        <c:crossAx val="2094734552"/>
-        <c:crosses val="autoZero"/>
-        <c:auto val="1"/>
-        <c:lblAlgn val="ctr"/>
-        <c:noMultiLvlLbl val="1"/>
-      </c:catAx>
-      <c:valAx>
-        <c:axId val="2094734552"/>
-        <c:scaling>
-          <c:orientation val="minMax"/>
-          <c:max val="60"/>
-          <c:min val="0"/>
-        </c:scaling>
-        <c:delete val="0"/>
-        <c:axPos val="l"/>
-        <c:majorGridlines>
-          <c:spPr>
-            <a:ln w="6350" cap="flat">
-              <a:solidFill>
-                <a:srgbClr val="EEF2F8"/>
-              </a:solidFill>
-              <a:prstDash val="solid"/>
-              <a:round/>
-            </a:ln>
-          </c:spPr>
-        </c:majorGridlines>
-        <c:numFmt formatCode="General" sourceLinked="0"/>
-        <c:majorTickMark val="out"/>
-        <c:minorTickMark val="none"/>
-        <c:tickLblPos val="nextTo"/>
-        <c:spPr>
-          <a:ln w="12700" cap="flat">
-            <a:solidFill>
-              <a:srgbClr val="888888"/>
-            </a:solidFill>
-            <a:prstDash val="solid"/>
-            <a:round/>
-          </a:ln>
-        </c:spPr>
-        <c:txPr>
-          <a:bodyPr/>
-          <a:lstStyle/>
-          <a:p>
-            <a:pPr>
-              <a:defRPr sz="1200" b="0" i="0" u="none" strike="noStrike">
-                <a:solidFill>
-                  <a:srgbClr val="6B7787"/>
-                </a:solidFill>
-                <a:latin typeface="Arial"/>
-              </a:defRPr>
-            </a:pPr>
-            <a:endParaRPr lang="en-US"/>
-          </a:p>
-        </c:txPr>
-        <c:crossAx val="2094734554"/>
-        <c:crosses val="autoZero"/>
-        <c:crossBetween val="between"/>
-      </c:valAx>
-      <c:spPr>
-        <a:noFill/>
-        <a:ln>
-          <a:noFill/>
-        </a:ln>
-        <a:effectLst/>
-      </c:spPr>
-    </c:plotArea>
-    <c:plotVisOnly val="1"/>
-    <c:dispBlanksAs val="span"/>
-  </c:chart>
-  <c:spPr>
-    <a:noFill/>
-    <a:ln>
-      <a:noFill/>
-    </a:ln>
-    <a:effectLst/>
-  </c:spPr>
-  <c:externalData r:id="rId1">
-    <c:autoUpdate val="0"/>
-  </c:externalData>
-</c:chartSpace>
-</file>
-
-<file path=ppt/charts/chart2.xml><?xml version="1.0" encoding="utf-8"?>
-<c:chartSpace xmlns:c="http://schemas.openxmlformats.org/drawingml/2006/chart" xmlns:a="http://schemas.openxmlformats.org/drawingml/2006/main" xmlns:r="http://schemas.openxmlformats.org/officeDocument/2006/relationships">
-  <c:date1904 val="0"/>
-  <c:roundedCorners val="1"/>
-  <c:chart>
-    <c:title>
-      <c:tx>
-        <c:rich>
-          <a:bodyPr/>
-          <a:lstStyle/>
-          <a:p>
-            <a:pPr>
-              <a:defRPr sz="1300" b="0" i="0" u="none" strike="noStrike">
-                <a:solidFill>
-                  <a:srgbClr val="16243B"/>
-                </a:solidFill>
-                <a:latin typeface="Calibri"/>
-              </a:defRPr>
-            </a:pPr>
-            <a:r>
-              <a:rPr sz="1300" b="0" i="0" u="none" strike="noStrike">
-                <a:solidFill>
-                  <a:srgbClr val="16243B"/>
-                </a:solidFill>
-                <a:latin typeface="Calibri"/>
-              </a:rPr>
-              <a:t>Размер ниш (WB, год, топ-500 SKU), млрд ₽</a:t>
-            </a:r>
-          </a:p>
-        </c:rich>
-      </c:tx>
-      <c:layout/>
-      <c:overlay val="0"/>
-    </c:title>
-    <c:autoTitleDeleted val="0"/>
-    <c:plotArea>
-      <c:layout/>
-      <c:barChart>
-        <c:barDir val="col"/>
-        <c:grouping val="clustered"/>
-        <c:varyColors val="0"/>
-        <c:ser>
-          <c:idx val="0"/>
-          <c:order val="0"/>
-          <c:tx>
-            <c:strRef>
-              <c:f>Sheet1!$B$1</c:f>
-              <c:strCache>
-                <c:ptCount val="1"/>
-                <c:pt idx="0">
-                  <c:v>Выручка топ-500 SKU, млрд ₽/год</c:v>
-                </c:pt>
-              </c:strCache>
-            </c:strRef>
-          </c:tx>
-          <c:spPr>
-            <a:solidFill>
-              <a:srgbClr val="D4A24E"/>
-            </a:solidFill>
-            <a:effectLst/>
-          </c:spPr>
-          <c:invertIfNegative val="0"/>
-          <c:dLbls>
-            <c:numFmt formatCode="#,##0" sourceLinked="0"/>
-            <c:txPr>
-              <a:bodyPr/>
-              <a:lstStyle/>
-              <a:p>
-                <a:pPr>
-                  <a:defRPr b="1" i="0" strike="noStrike" sz="1400" u="none">
-                    <a:solidFill>
-                      <a:srgbClr val="16243B"/>
-                    </a:solidFill>
-                    <a:latin typeface="Arial"/>
-                  </a:defRPr>
-                </a:pPr>
-              </a:p>
-            </c:txPr>
-            <c:showLegendKey val="0"/>
-            <c:showVal val="1"/>
-            <c:showCatName val="0"/>
-            <c:showSerName val="0"/>
-            <c:showPercent val="0"/>
-            <c:showBubbleSize val="0"/>
-            <c:showLeaderLines val="0"/>
-          </c:dLbls>
-          <c:cat>
-            <c:multiLvlStrRef>
-              <c:f>Sheet1!$A$2:$A$5</c:f>
-              <c:multiLvlStrCache>
-                <c:ptCount val="4"/>
-                <c:lvl>
-                  <c:pt idx="0">
-                    <c:v>Куртка</c:v>
-                  </c:pt>
-                  <c:pt idx="1">
-                    <c:v>Пуховик жен</c:v>
-                  </c:pt>
-                  <c:pt idx="2">
-                    <c:v>Ветровка</c:v>
-                  </c:pt>
-                  <c:pt idx="3">
-                    <c:v>Пуховик муж</c:v>
-                  </c:pt>
-                </c:lvl>
-              </c:multiLvlStrCache>
-            </c:multiLvlStrRef>
-          </c:cat>
-          <c:val>
-            <c:numRef>
-              <c:f>Sheet1!$B$2:$B$5</c:f>
-              <c:numCache>
-                <c:formatCode>General</c:formatCode>
-                <c:ptCount val="4"/>
-                <c:pt idx="0">
-                  <c:v>32.4</c:v>
-                </c:pt>
-                <c:pt idx="1">
-                  <c:v>22.2</c:v>
-                </c:pt>
-                <c:pt idx="2">
-                  <c:v>17.8</c:v>
-                </c:pt>
-                <c:pt idx="3">
-                  <c:v>11.7</c:v>
-                </c:pt>
-              </c:numCache>
-            </c:numRef>
-          </c:val>
-        </c:ser>
-        <c:dLbls>
-          <c:numFmt formatCode="#,##0" sourceLinked="0"/>
-          <c:txPr>
-            <a:bodyPr/>
-            <a:lstStyle/>
-            <a:p>
-              <a:pPr>
-                <a:defRPr b="1" i="0" strike="noStrike" sz="1400" u="none">
-                  <a:solidFill>
-                    <a:srgbClr val="16243B"/>
-                  </a:solidFill>
-                  <a:latin typeface="Arial"/>
-                </a:defRPr>
-              </a:pPr>
-            </a:p>
-          </c:txPr>
-          <c:showLegendKey val="0"/>
-          <c:showVal val="1"/>
-          <c:showCatName val="0"/>
-          <c:showSerName val="0"/>
-          <c:showPercent val="0"/>
-          <c:showBubbleSize val="0"/>
-          <c:showLeaderLines val="0"/>
-        </c:dLbls>
-        <c:gapWidth val="150"/>
-        <c:overlap val="0"/>
-        <c:axId val="2094734554"/>
-        <c:axId val="2094734552"/>
-        <c:axId val="2094734556"/>
-      </c:barChart>
-      <c:catAx>
-        <c:axId val="2094734554"/>
-        <c:scaling>
-          <c:orientation val="minMax"/>
-        </c:scaling>
-        <c:delete val="0"/>
-        <c:axPos val="b"/>
-        <c:numFmt formatCode="General" sourceLinked="1"/>
-        <c:majorTickMark val="out"/>
-        <c:minorTickMark val="none"/>
-        <c:tickLblPos val="low"/>
-        <c:spPr>
-          <a:ln w="12700" cap="flat">
-            <a:solidFill>
-              <a:srgbClr val="888888"/>
-            </a:solidFill>
-            <a:prstDash val="solid"/>
-            <a:round/>
-          </a:ln>
-        </c:spPr>
-        <c:txPr>
-          <a:bodyPr/>
-          <a:lstStyle/>
-          <a:p>
-            <a:pPr>
-              <a:defRPr sz="1300" b="0" i="0" u="none" strike="noStrike">
-                <a:solidFill>
-                  <a:srgbClr val="6B7787"/>
-                </a:solidFill>
-                <a:latin typeface="Arial"/>
-              </a:defRPr>
-            </a:pPr>
-            <a:endParaRPr lang="en-US"/>
-          </a:p>
-        </c:txPr>
-        <c:crossAx val="2094734552"/>
-        <c:crosses val="autoZero"/>
-        <c:auto val="1"/>
-        <c:lblAlgn val="ctr"/>
-        <c:noMultiLvlLbl val="1"/>
-      </c:catAx>
-      <c:valAx>
-        <c:axId val="2094734552"/>
-        <c:scaling>
-          <c:orientation val="minMax"/>
-        </c:scaling>
-        <c:delete val="0"/>
-        <c:axPos val="l"/>
-        <c:majorGridlines>
-          <c:spPr>
-            <a:ln w="6350" cap="flat">
-              <a:solidFill>
-                <a:srgbClr val="EEF2F8"/>
-              </a:solidFill>
-              <a:prstDash val="solid"/>
-              <a:round/>
-            </a:ln>
-          </c:spPr>
-        </c:majorGridlines>
-        <c:numFmt formatCode="General" sourceLinked="0"/>
-        <c:majorTickMark val="out"/>
-        <c:minorTickMark val="none"/>
-        <c:tickLblPos val="nextTo"/>
-        <c:spPr>
-          <a:ln w="12700" cap="flat">
-            <a:solidFill>
-              <a:srgbClr val="888888"/>
-            </a:solidFill>
-            <a:prstDash val="solid"/>
-            <a:round/>
-          </a:ln>
-        </c:spPr>
-        <c:txPr>
-          <a:bodyPr/>
-          <a:lstStyle/>
-          <a:p>
-            <a:pPr>
-              <a:defRPr sz="1200" b="0" i="0" u="none" strike="noStrike">
-                <a:solidFill>
-                  <a:srgbClr val="6B7787"/>
-                </a:solidFill>
-                <a:latin typeface="Arial"/>
-              </a:defRPr>
-            </a:pPr>
-            <a:endParaRPr lang="en-US"/>
-          </a:p>
-        </c:txPr>
-        <c:crossAx val="2094734554"/>
-        <c:crosses val="autoZero"/>
-        <c:crossBetween val="between"/>
-      </c:valAx>
-      <c:spPr>
-        <a:noFill/>
-        <a:ln>
-          <a:noFill/>
-        </a:ln>
-        <a:effectLst/>
-      </c:spPr>
-    </c:plotArea>
-    <c:plotVisOnly val="1"/>
-    <c:dispBlanksAs val="span"/>
-  </c:chart>
-  <c:spPr>
-    <a:noFill/>
-    <a:ln>
-      <a:noFill/>
-    </a:ln>
-    <a:effectLst/>
-  </c:spPr>
-  <c:externalData r:id="rId1">
-    <c:autoUpdate val="0"/>
-  </c:externalData>
-</c:chartSpace>
-</file>
-
-<file path=ppt/charts/chart3.xml><?xml version="1.0" encoding="utf-8"?>
-<c:chartSpace xmlns:c="http://schemas.openxmlformats.org/drawingml/2006/chart" xmlns:a="http://schemas.openxmlformats.org/drawingml/2006/main" xmlns:r="http://schemas.openxmlformats.org/officeDocument/2006/relationships">
-  <c:date1904 val="0"/>
-  <c:roundedCorners val="1"/>
-  <c:chart>
-    <c:title>
-      <c:tx>
-        <c:rich>
-          <a:bodyPr/>
-          <a:lstStyle/>
-          <a:p>
-            <a:pPr>
-              <a:defRPr sz="1300" b="0" i="0" u="none" strike="noStrike">
-                <a:solidFill>
-                  <a:srgbClr val="16243B"/>
-                </a:solidFill>
-                <a:latin typeface="Calibri"/>
-              </a:defRPr>
-            </a:pPr>
-            <a:r>
-              <a:rPr sz="1300" b="0" i="0" u="none" strike="noStrike">
-                <a:solidFill>
-                  <a:srgbClr val="16243B"/>
-                </a:solidFill>
-                <a:latin typeface="Calibri"/>
-              </a:rPr>
-              <a:t>Сезонный индекс выручки, % к среднему</a:t>
-            </a:r>
-          </a:p>
-        </c:rich>
-      </c:tx>
-      <c:layout/>
-      <c:overlay val="0"/>
-    </c:title>
-    <c:autoTitleDeleted val="0"/>
-    <c:plotArea>
-      <c:layout/>
-      <c:lineChart>
-        <c:varyColors val="0"/>
-        <c:ser>
-          <c:idx val="0"/>
-          <c:order val="0"/>
-          <c:tx>
-            <c:strRef>
-              <c:f>Sheet1!$B$1</c:f>
-              <c:strCache>
-                <c:ptCount val="1"/>
-                <c:pt idx="0">
-                  <c:v>Пуховик</c:v>
-                </c:pt>
-              </c:strCache>
-            </c:strRef>
-          </c:tx>
-          <c:spPr>
-            <a:solidFill>
-              <a:srgbClr val="0F1E33"/>
-            </a:solidFill>
-            <a:ln w="38100" cap="flat">
-              <a:solidFill>
-                <a:srgbClr val="0F1E33"/>
-              </a:solidFill>
-              <a:prstDash val="solid"/>
-              <a:round/>
-            </a:ln>
-            <a:effectLst/>
-          </c:spPr>
-          <c:invertIfNegative val="0"/>
-          <c:dLbls>
-            <c:numFmt formatCode="#,##0" sourceLinked="0"/>
-            <c:txPr>
-              <a:bodyPr/>
-              <a:lstStyle/>
-              <a:p>
-                <a:pPr>
-                  <a:defRPr b="0" i="0" strike="noStrike" sz="1200" u="none">
-                    <a:solidFill>
-                      <a:srgbClr val="000000"/>
-                    </a:solidFill>
-                    <a:latin typeface="Arial"/>
-                  </a:defRPr>
-                </a:pPr>
-              </a:p>
-            </c:txPr>
-            <c:showLegendKey val="0"/>
-            <c:showVal val="0"/>
-            <c:showCatName val="0"/>
-            <c:showSerName val="0"/>
-            <c:showPercent val="0"/>
-            <c:showBubbleSize val="0"/>
-            <c:showLeaderLines val="0"/>
-          </c:dLbls>
-          <c:marker>
-            <c:symbol val="circle"/>
-            <c:size val="6"/>
-            <c:spPr>
-              <a:solidFill>
-                <a:srgbClr val="0F1E33"/>
-              </a:solidFill>
-              <a:ln w="9525" cap="flat">
-                <a:solidFill>
-                  <a:srgbClr val="0F1E33"/>
-                </a:solidFill>
-                <a:prstDash val="solid"/>
-                <a:round/>
-              </a:ln>
-              <a:effectLst/>
-            </c:spPr>
-          </c:marker>
-          <c:cat>
-            <c:multiLvlStrRef>
-              <c:f>Sheet1!$A$2:$A$13</c:f>
-              <c:multiLvlStrCache>
-                <c:ptCount val="12"/>
-                <c:lvl>
-                  <c:pt idx="0">
-                    <c:v>янв</c:v>
-                  </c:pt>
-                  <c:pt idx="1">
-                    <c:v>фев</c:v>
-                  </c:pt>
-                  <c:pt idx="2">
-                    <c:v>мар</c:v>
-                  </c:pt>
-                  <c:pt idx="3">
-                    <c:v>апр</c:v>
-                  </c:pt>
-                  <c:pt idx="4">
-                    <c:v>май</c:v>
-                  </c:pt>
-                  <c:pt idx="5">
-                    <c:v>июн</c:v>
-                  </c:pt>
-                  <c:pt idx="6">
-                    <c:v>июл</c:v>
-                  </c:pt>
-                  <c:pt idx="7">
-                    <c:v>авг</c:v>
-                  </c:pt>
-                  <c:pt idx="8">
-                    <c:v>сен</c:v>
-                  </c:pt>
-                  <c:pt idx="9">
-                    <c:v>окт</c:v>
-                  </c:pt>
-                  <c:pt idx="10">
-                    <c:v>ноя</c:v>
-                  </c:pt>
-                  <c:pt idx="11">
-                    <c:v>дек</c:v>
-                  </c:pt>
-                </c:lvl>
-              </c:multiLvlStrCache>
-            </c:multiLvlStrRef>
-          </c:cat>
-          <c:val>
-            <c:numRef>
-              <c:f>Sheet1!$B$2:$B$13</c:f>
-              <c:numCache>
-                <c:formatCode>General</c:formatCode>
-                <c:ptCount val="12"/>
-                <c:pt idx="0">
-                  <c:v>5</c:v>
-                </c:pt>
-                <c:pt idx="1">
-                  <c:v>-21</c:v>
-                </c:pt>
-                <c:pt idx="2">
-                  <c:v>-21</c:v>
-                </c:pt>
-                <c:pt idx="3">
-                  <c:v>-61</c:v>
-                </c:pt>
-                <c:pt idx="4">
-                  <c:v>-70</c:v>
-                </c:pt>
-                <c:pt idx="5">
-                  <c:v>-79</c:v>
-                </c:pt>
-                <c:pt idx="6">
-                  <c:v>-76</c:v>
-                </c:pt>
-                <c:pt idx="7">
-                  <c:v>-40</c:v>
-                </c:pt>
-                <c:pt idx="8">
-                  <c:v>23</c:v>
-                </c:pt>
-                <c:pt idx="9">
-                  <c:v>120</c:v>
-                </c:pt>
-                <c:pt idx="10">
-                  <c:v>143</c:v>
-                </c:pt>
-                <c:pt idx="11">
-                  <c:v>76</c:v>
-                </c:pt>
-              </c:numCache>
-            </c:numRef>
-          </c:val>
-          <c:smooth val="1"/>
-        </c:ser>
-        <c:ser>
-          <c:idx val="1"/>
-          <c:order val="1"/>
-          <c:tx>
-            <c:strRef>
-              <c:f>Sheet1!$C$1</c:f>
-              <c:strCache>
-                <c:ptCount val="1"/>
-                <c:pt idx="0">
-                  <c:v>Куртка</c:v>
-                </c:pt>
-              </c:strCache>
-            </c:strRef>
-          </c:tx>
-          <c:spPr>
-            <a:solidFill>
-              <a:srgbClr val="D4A24E"/>
-            </a:solidFill>
-            <a:ln w="38100" cap="flat">
-              <a:solidFill>
-                <a:srgbClr val="D4A24E"/>
-              </a:solidFill>
-              <a:prstDash val="solid"/>
-              <a:round/>
-            </a:ln>
-            <a:effectLst/>
-          </c:spPr>
-          <c:invertIfNegative val="0"/>
-          <c:dLbls>
-            <c:numFmt formatCode="#,##0" sourceLinked="0"/>
-            <c:txPr>
-              <a:bodyPr/>
-              <a:lstStyle/>
-              <a:p>
-                <a:pPr>
-                  <a:defRPr b="0" i="0" strike="noStrike" sz="1200" u="none">
-                    <a:solidFill>
-                      <a:srgbClr val="000000"/>
-                    </a:solidFill>
-                    <a:latin typeface="Arial"/>
-                  </a:defRPr>
-                </a:pPr>
-              </a:p>
-            </c:txPr>
-            <c:showLegendKey val="0"/>
-            <c:showVal val="0"/>
-            <c:showCatName val="0"/>
-            <c:showSerName val="0"/>
-            <c:showPercent val="0"/>
-            <c:showBubbleSize val="0"/>
-            <c:showLeaderLines val="0"/>
-          </c:dLbls>
-          <c:marker>
-            <c:symbol val="circle"/>
-            <c:size val="6"/>
-            <c:spPr>
-              <a:solidFill>
-                <a:srgbClr val="D4A24E"/>
-              </a:solidFill>
-              <a:ln w="9525" cap="flat">
-                <a:solidFill>
-                  <a:srgbClr val="D4A24E"/>
-                </a:solidFill>
-                <a:prstDash val="solid"/>
-                <a:round/>
-              </a:ln>
-              <a:effectLst/>
-            </c:spPr>
-          </c:marker>
-          <c:cat>
-            <c:multiLvlStrRef>
-              <c:f>Sheet1!$A$2:$A$13</c:f>
-              <c:multiLvlStrCache>
-                <c:ptCount val="12"/>
-                <c:lvl>
-                  <c:pt idx="0">
-                    <c:v>янв</c:v>
-                  </c:pt>
-                  <c:pt idx="1">
-                    <c:v>фев</c:v>
-                  </c:pt>
-                  <c:pt idx="2">
-                    <c:v>мар</c:v>
-                  </c:pt>
-                  <c:pt idx="3">
-                    <c:v>апр</c:v>
-                  </c:pt>
-                  <c:pt idx="4">
-                    <c:v>май</c:v>
-                  </c:pt>
-                  <c:pt idx="5">
-                    <c:v>июн</c:v>
-                  </c:pt>
-                  <c:pt idx="6">
-                    <c:v>июл</c:v>
-                  </c:pt>
-                  <c:pt idx="7">
-                    <c:v>авг</c:v>
-                  </c:pt>
-                  <c:pt idx="8">
-                    <c:v>сен</c:v>
-                  </c:pt>
-                  <c:pt idx="9">
-                    <c:v>окт</c:v>
-                  </c:pt>
-                  <c:pt idx="10">
-                    <c:v>ноя</c:v>
-                  </c:pt>
-                  <c:pt idx="11">
-                    <c:v>дек</c:v>
-                  </c:pt>
-                </c:lvl>
-              </c:multiLvlStrCache>
-            </c:multiLvlStrRef>
-          </c:cat>
-          <c:val>
-            <c:numRef>
-              <c:f>Sheet1!$C$2:$C$13</c:f>
-              <c:numCache>
-                <c:formatCode>General</c:formatCode>
-                <c:ptCount val="12"/>
-                <c:pt idx="0">
-                  <c:v>-25</c:v>
-                </c:pt>
-                <c:pt idx="1">
-                  <c:v>-4</c:v>
-                </c:pt>
-                <c:pt idx="2">
-                  <c:v>57</c:v>
-                </c:pt>
-                <c:pt idx="3">
-                  <c:v>-32</c:v>
-                </c:pt>
-                <c:pt idx="4">
-                  <c:v>-57</c:v>
-                </c:pt>
-                <c:pt idx="5">
-                  <c:v>-73</c:v>
-                </c:pt>
-                <c:pt idx="6">
-                  <c:v>-73</c:v>
-                </c:pt>
-                <c:pt idx="7">
-                  <c:v>-29</c:v>
-                </c:pt>
-                <c:pt idx="8">
-                  <c:v>45</c:v>
-                </c:pt>
-                <c:pt idx="9">
-                  <c:v>101</c:v>
-                </c:pt>
-                <c:pt idx="10">
-                  <c:v>76</c:v>
-                </c:pt>
-                <c:pt idx="11">
-                  <c:v>15</c:v>
-                </c:pt>
-              </c:numCache>
-            </c:numRef>
-          </c:val>
-          <c:smooth val="1"/>
-        </c:ser>
-        <c:ser>
-          <c:idx val="2"/>
-          <c:order val="2"/>
-          <c:tx>
-            <c:strRef>
-              <c:f>Sheet1!$D$1</c:f>
-              <c:strCache>
-                <c:ptCount val="1"/>
-                <c:pt idx="0">
-                  <c:v>Ветровка</c:v>
-                </c:pt>
-              </c:strCache>
-            </c:strRef>
-          </c:tx>
-          <c:spPr>
-            <a:solidFill>
-              <a:srgbClr val="8FB0CF"/>
-            </a:solidFill>
-            <a:ln w="38100" cap="flat">
-              <a:solidFill>
-                <a:srgbClr val="8FB0CF"/>
-              </a:solidFill>
-              <a:prstDash val="solid"/>
-              <a:round/>
-            </a:ln>
-            <a:effectLst/>
-          </c:spPr>
-          <c:invertIfNegative val="0"/>
-          <c:dLbls>
-            <c:numFmt formatCode="#,##0" sourceLinked="0"/>
-            <c:txPr>
-              <a:bodyPr/>
-              <a:lstStyle/>
-              <a:p>
-                <a:pPr>
-                  <a:defRPr b="0" i="0" strike="noStrike" sz="1200" u="none">
-                    <a:solidFill>
-                      <a:srgbClr val="000000"/>
-                    </a:solidFill>
-                    <a:latin typeface="Arial"/>
-                  </a:defRPr>
-                </a:pPr>
-              </a:p>
-            </c:txPr>
-            <c:showLegendKey val="0"/>
-            <c:showVal val="0"/>
-            <c:showCatName val="0"/>
-            <c:showSerName val="0"/>
-            <c:showPercent val="0"/>
-            <c:showBubbleSize val="0"/>
-            <c:showLeaderLines val="0"/>
-          </c:dLbls>
-          <c:marker>
-            <c:symbol val="circle"/>
-            <c:size val="6"/>
-            <c:spPr>
-              <a:solidFill>
-                <a:srgbClr val="8FB0CF"/>
-              </a:solidFill>
-              <a:ln w="9525" cap="flat">
-                <a:solidFill>
-                  <a:srgbClr val="8FB0CF"/>
-                </a:solidFill>
-                <a:prstDash val="solid"/>
-                <a:round/>
-              </a:ln>
-              <a:effectLst/>
-            </c:spPr>
-          </c:marker>
-          <c:cat>
-            <c:multiLvlStrRef>
-              <c:f>Sheet1!$A$2:$A$13</c:f>
-              <c:multiLvlStrCache>
-                <c:ptCount val="12"/>
-                <c:lvl>
-                  <c:pt idx="0">
-                    <c:v>янв</c:v>
-                  </c:pt>
-                  <c:pt idx="1">
-                    <c:v>фев</c:v>
-                  </c:pt>
-                  <c:pt idx="2">
-                    <c:v>мар</c:v>
-                  </c:pt>
-                  <c:pt idx="3">
-                    <c:v>апр</c:v>
-                  </c:pt>
-                  <c:pt idx="4">
-                    <c:v>май</c:v>
-                  </c:pt>
-                  <c:pt idx="5">
-                    <c:v>июн</c:v>
-                  </c:pt>
-                  <c:pt idx="6">
-                    <c:v>июл</c:v>
-                  </c:pt>
-                  <c:pt idx="7">
-                    <c:v>авг</c:v>
-                  </c:pt>
-                  <c:pt idx="8">
-                    <c:v>сен</c:v>
-                  </c:pt>
-                  <c:pt idx="9">
-                    <c:v>окт</c:v>
-                  </c:pt>
-                  <c:pt idx="10">
-                    <c:v>ноя</c:v>
-                  </c:pt>
-                  <c:pt idx="11">
-                    <c:v>дек</c:v>
-                  </c:pt>
-                </c:lvl>
-              </c:multiLvlStrCache>
-            </c:multiLvlStrRef>
-          </c:cat>
-          <c:val>
-            <c:numRef>
-              <c:f>Sheet1!$D$2:$D$13</c:f>
-              <c:numCache>
-                <c:formatCode>General</c:formatCode>
-                <c:ptCount val="12"/>
-                <c:pt idx="0">
-                  <c:v>-58</c:v>
-                </c:pt>
-                <c:pt idx="1">
-                  <c:v>-30</c:v>
-                </c:pt>
-                <c:pt idx="2">
-                  <c:v>86</c:v>
-                </c:pt>
-                <c:pt idx="3">
-                  <c:v>53</c:v>
-                </c:pt>
-                <c:pt idx="4">
-                  <c:v>3</c:v>
-                </c:pt>
-                <c:pt idx="5">
-                  <c:v>-44</c:v>
-                </c:pt>
-                <c:pt idx="6">
-                  <c:v>-55</c:v>
-                </c:pt>
-                <c:pt idx="7">
-                  <c:v>24</c:v>
-                </c:pt>
-                <c:pt idx="8">
-                  <c:v>60</c:v>
-                </c:pt>
-                <c:pt idx="9">
-                  <c:v>21</c:v>
-                </c:pt>
-                <c:pt idx="10">
-                  <c:v>-18</c:v>
-                </c:pt>
-                <c:pt idx="11">
-                  <c:v>-43</c:v>
-                </c:pt>
-              </c:numCache>
-            </c:numRef>
-          </c:val>
-          <c:smooth val="1"/>
-        </c:ser>
-        <c:dLbls>
-          <c:numFmt formatCode="#,##0" sourceLinked="0"/>
-          <c:txPr>
-            <a:bodyPr/>
-            <a:lstStyle/>
-            <a:p>
-              <a:pPr>
-                <a:defRPr b="0" i="0" strike="noStrike" sz="1200" u="none">
-                  <a:solidFill>
-                    <a:srgbClr val="000000"/>
-                  </a:solidFill>
-                  <a:latin typeface="Arial"/>
-                </a:defRPr>
-              </a:pPr>
-            </a:p>
-          </c:txPr>
-          <c:showLegendKey val="0"/>
-          <c:showVal val="0"/>
-          <c:showCatName val="0"/>
-          <c:showSerName val="0"/>
-          <c:showPercent val="0"/>
-          <c:showBubbleSize val="0"/>
-          <c:showLeaderLines val="0"/>
-        </c:dLbls>
-        <c:marker val="1"/>
-        <c:axId val="2094734554"/>
-        <c:axId val="2094734552"/>
-        <c:axId val="2094734556"/>
-      </c:lineChart>
-      <c:catAx>
-        <c:axId val="2094734554"/>
-        <c:scaling>
-          <c:orientation val="minMax"/>
-        </c:scaling>
-        <c:delete val="0"/>
-        <c:axPos val="b"/>
-        <c:numFmt formatCode="General" sourceLinked="1"/>
-        <c:majorTickMark val="out"/>
-        <c:minorTickMark val="none"/>
-        <c:tickLblPos val="low"/>
-        <c:spPr>
-          <a:ln w="12700" cap="flat">
-            <a:solidFill>
-              <a:srgbClr val="888888"/>
-            </a:solidFill>
-            <a:prstDash val="solid"/>
-            <a:round/>
-          </a:ln>
-        </c:spPr>
-        <c:txPr>
-          <a:bodyPr/>
-          <a:lstStyle/>
-          <a:p>
-            <a:pPr>
-              <a:defRPr sz="1100" b="0" i="0" u="none" strike="noStrike">
-                <a:solidFill>
-                  <a:srgbClr val="6B7787"/>
-                </a:solidFill>
-                <a:latin typeface="Arial"/>
-              </a:defRPr>
-            </a:pPr>
-            <a:endParaRPr lang="en-US"/>
-          </a:p>
-        </c:txPr>
-        <c:crossAx val="2094734552"/>
-        <c:crosses val="autoZero"/>
-        <c:auto val="1"/>
-        <c:lblAlgn val="ctr"/>
-        <c:noMultiLvlLbl val="1"/>
-      </c:catAx>
-      <c:valAx>
-        <c:axId val="2094734552"/>
-        <c:scaling>
-          <c:orientation val="minMax"/>
-        </c:scaling>
-        <c:delete val="0"/>
-        <c:axPos val="l"/>
-        <c:majorGridlines>
-          <c:spPr>
-            <a:ln w="6350" cap="flat">
-              <a:solidFill>
-                <a:srgbClr val="EEF2F8"/>
-              </a:solidFill>
-              <a:prstDash val="solid"/>
-              <a:round/>
-            </a:ln>
-          </c:spPr>
-        </c:majorGridlines>
-        <c:numFmt formatCode="General" sourceLinked="0"/>
-        <c:majorTickMark val="out"/>
-        <c:minorTickMark val="none"/>
-        <c:tickLblPos val="nextTo"/>
-        <c:spPr>
-          <a:ln w="12700" cap="flat">
-            <a:solidFill>
-              <a:srgbClr val="888888"/>
-            </a:solidFill>
-            <a:prstDash val="solid"/>
-            <a:round/>
-          </a:ln>
-        </c:spPr>
-        <c:txPr>
-          <a:bodyPr/>
-          <a:lstStyle/>
-          <a:p>
-            <a:pPr>
-              <a:defRPr sz="1200" b="0" i="0" u="none" strike="noStrike">
-                <a:solidFill>
-                  <a:srgbClr val="6B7787"/>
-                </a:solidFill>
-                <a:latin typeface="Arial"/>
-              </a:defRPr>
-            </a:pPr>
-            <a:endParaRPr lang="en-US"/>
-          </a:p>
-        </c:txPr>
-        <c:crossAx val="2094734554"/>
-        <c:crosses val="autoZero"/>
-        <c:crossBetween val="between"/>
-      </c:valAx>
-      <c:spPr>
-        <a:noFill/>
-        <a:ln>
-          <a:noFill/>
-        </a:ln>
-        <a:effectLst/>
-      </c:spPr>
-    </c:plotArea>
-    <c:legend>
-      <c:legendPos val="t"/>
-      <c:overlay val="0"/>
-      <c:txPr>
-        <a:bodyPr/>
-        <a:lstStyle/>
-        <a:p>
-          <a:pPr>
-            <a:defRPr>
-              <a:solidFill>
-                <a:srgbClr val="16243B"/>
-              </a:solidFill>
-            </a:defRPr>
-          </a:pPr>
-          <a:endParaRPr lang="en-US"/>
-        </a:p>
-      </c:txPr>
-    </c:legend>
-    <c:plotVisOnly val="1"/>
-    <c:dispBlanksAs val="span"/>
-  </c:chart>
-  <c:spPr>
-    <a:noFill/>
-    <a:ln>
-      <a:noFill/>
-    </a:ln>
-    <a:effectLst/>
-  </c:spPr>
-  <c:externalData r:id="rId1">
-    <c:autoUpdate val="0"/>
-  </c:externalData>
-</c:chartSpace>
-</file>
-
-<file path=ppt/charts/chart4.xml><?xml version="1.0" encoding="utf-8"?>
-<c:chartSpace xmlns:c="http://schemas.openxmlformats.org/drawingml/2006/chart" xmlns:a="http://schemas.openxmlformats.org/drawingml/2006/main" xmlns:r="http://schemas.openxmlformats.org/officeDocument/2006/relationships">
-  <c:date1904 val="0"/>
-  <c:roundedCorners val="1"/>
-  <c:chart>
-    <c:title>
-      <c:tx>
-        <c:rich>
-          <a:bodyPr/>
-          <a:lstStyle/>
-          <a:p>
-            <a:pPr>
-              <a:defRPr sz="1300" b="0" i="0" u="none" strike="noStrike">
-                <a:solidFill>
-                  <a:srgbClr val="16243B"/>
-                </a:solidFill>
-                <a:latin typeface="Calibri"/>
-              </a:defRPr>
-            </a:pPr>
-            <a:r>
-              <a:rPr sz="1300" b="0" i="0" u="none" strike="noStrike">
-                <a:solidFill>
-                  <a:srgbClr val="16243B"/>
-                </a:solidFill>
-                <a:latin typeface="Calibri"/>
-              </a:rPr>
-              <a:t>Прибыль за зимний сезон с закупа 37 млн ₽, млн ₽</a:t>
-            </a:r>
-          </a:p>
-        </c:rich>
-      </c:tx>
-      <c:layout/>
-      <c:overlay val="0"/>
-    </c:title>
-    <c:autoTitleDeleted val="0"/>
-    <c:plotArea>
-      <c:layout/>
-      <c:barChart>
-        <c:barDir val="col"/>
-        <c:grouping val="clustered"/>
-        <c:varyColors val="0"/>
-        <c:ser>
-          <c:idx val="0"/>
-          <c:order val="0"/>
-          <c:tx>
-            <c:strRef>
-              <c:f>Sheet1!$B$1</c:f>
-              <c:strCache>
-                <c:ptCount val="1"/>
-                <c:pt idx="0">
-                  <c:v>Прибыль после ДРР, млн ₽</c:v>
-                </c:pt>
-              </c:strCache>
-            </c:strRef>
-          </c:tx>
-          <c:spPr>
-            <a:solidFill>
-              <a:srgbClr val="8FB0CF"/>
-            </a:solidFill>
-            <a:effectLst/>
-          </c:spPr>
-          <c:invertIfNegative val="0"/>
-          <c:dLbls>
-            <c:numFmt formatCode="#,##0" sourceLinked="0"/>
-            <c:txPr>
-              <a:bodyPr/>
-              <a:lstStyle/>
-              <a:p>
-                <a:pPr>
-                  <a:defRPr b="1" i="0" strike="noStrike" sz="1500" u="none">
-                    <a:solidFill>
-                      <a:srgbClr val="16243B"/>
-                    </a:solidFill>
-                    <a:latin typeface="Arial"/>
-                  </a:defRPr>
-                </a:pPr>
-              </a:p>
-            </c:txPr>
-            <c:showLegendKey val="0"/>
-            <c:showVal val="1"/>
-            <c:showCatName val="0"/>
-            <c:showSerName val="0"/>
-            <c:showPercent val="0"/>
-            <c:showBubbleSize val="0"/>
-            <c:showLeaderLines val="0"/>
-          </c:dLbls>
-          <c:dPt>
-            <c:idx val="0"/>
-            <c:invertIfNegative val="0"/>
-            <c:bubble3D val="0"/>
-            <c:spPr>
-              <a:solidFill>
-                <a:srgbClr val="8FB0CF"/>
-              </a:solidFill>
-              <a:effectLst/>
-            </c:spPr>
-          </c:dPt>
-          <c:dPt>
-            <c:idx val="1"/>
-            <c:invertIfNegative val="0"/>
-            <c:bubble3D val="0"/>
-            <c:spPr>
-              <a:solidFill>
-                <a:srgbClr val="D4A24E"/>
-              </a:solidFill>
-              <a:effectLst/>
-            </c:spPr>
-          </c:dPt>
-          <c:dPt>
-            <c:idx val="2"/>
-            <c:invertIfNegative val="0"/>
-            <c:bubble3D val="0"/>
-            <c:spPr>
-              <a:solidFill>
-                <a:srgbClr val="1E8449"/>
-              </a:solidFill>
-              <a:effectLst/>
-            </c:spPr>
-          </c:dPt>
-          <c:cat>
-            <c:multiLvlStrRef>
-              <c:f>Sheet1!$A$2:$A$4</c:f>
-              <c:multiLvlStrCache>
-                <c:ptCount val="3"/>
-                <c:lvl>
-                  <c:pt idx="0">
-                    <c:v>Консерв. 60%</c:v>
-                  </c:pt>
-                  <c:pt idx="1">
-                    <c:v>База 80%</c:v>
-                  </c:pt>
-                  <c:pt idx="2">
-                    <c:v>Оптимизм 95%</c:v>
-                  </c:pt>
-                </c:lvl>
-              </c:multiLvlStrCache>
-            </c:multiLvlStrRef>
-          </c:cat>
-          <c:val>
-            <c:numRef>
-              <c:f>Sheet1!$B$2:$B$4</c:f>
-              <c:numCache>
-                <c:formatCode>General</c:formatCode>
-                <c:ptCount val="3"/>
-                <c:pt idx="0">
-                  <c:v>57</c:v>
-                </c:pt>
-                <c:pt idx="1">
-                  <c:v>76</c:v>
-                </c:pt>
-                <c:pt idx="2">
-                  <c:v>90</c:v>
-                </c:pt>
-              </c:numCache>
-            </c:numRef>
-          </c:val>
-        </c:ser>
-        <c:dLbls>
-          <c:numFmt formatCode="#,##0" sourceLinked="0"/>
-          <c:txPr>
-            <a:bodyPr/>
-            <a:lstStyle/>
-            <a:p>
-              <a:pPr>
-                <a:defRPr b="1" i="0" strike="noStrike" sz="1500" u="none">
-                  <a:solidFill>
-                    <a:srgbClr val="16243B"/>
-                  </a:solidFill>
-                  <a:latin typeface="Arial"/>
-                </a:defRPr>
-              </a:pPr>
-            </a:p>
-          </c:txPr>
-          <c:showLegendKey val="0"/>
-          <c:showVal val="1"/>
-          <c:showCatName val="0"/>
-          <c:showSerName val="0"/>
-          <c:showPercent val="0"/>
-          <c:showBubbleSize val="0"/>
-          <c:showLeaderLines val="0"/>
-        </c:dLbls>
-        <c:gapWidth val="150"/>
-        <c:overlap val="0"/>
-        <c:axId val="2094734554"/>
-        <c:axId val="2094734552"/>
-        <c:axId val="2094734556"/>
-      </c:barChart>
-      <c:catAx>
-        <c:axId val="2094734554"/>
-        <c:scaling>
-          <c:orientation val="minMax"/>
-        </c:scaling>
-        <c:delete val="0"/>
-        <c:axPos val="b"/>
-        <c:numFmt formatCode="General" sourceLinked="1"/>
-        <c:majorTickMark val="out"/>
-        <c:minorTickMark val="none"/>
-        <c:tickLblPos val="low"/>
-        <c:spPr>
-          <a:ln w="12700" cap="flat">
-            <a:solidFill>
-              <a:srgbClr val="888888"/>
-            </a:solidFill>
-            <a:prstDash val="solid"/>
-            <a:round/>
-          </a:ln>
-        </c:spPr>
-        <c:txPr>
-          <a:bodyPr/>
-          <a:lstStyle/>
-          <a:p>
-            <a:pPr>
-              <a:defRPr sz="1200" b="0" i="0" u="none" strike="noStrike">
-                <a:solidFill>
-                  <a:srgbClr val="6B7787"/>
-                </a:solidFill>
-                <a:latin typeface="Arial"/>
-              </a:defRPr>
-            </a:pPr>
-            <a:endParaRPr lang="en-US"/>
-          </a:p>
-        </c:txPr>
-        <c:crossAx val="2094734552"/>
-        <c:crosses val="autoZero"/>
-        <c:auto val="1"/>
-        <c:lblAlgn val="ctr"/>
-        <c:noMultiLvlLbl val="1"/>
-      </c:catAx>
-      <c:valAx>
-        <c:axId val="2094734552"/>
-        <c:scaling>
-          <c:orientation val="minMax"/>
-        </c:scaling>
-        <c:delete val="0"/>
-        <c:axPos val="l"/>
-        <c:majorGridlines>
-          <c:spPr>
-            <a:ln w="6350" cap="flat">
-              <a:solidFill>
-                <a:srgbClr val="EEF2F8"/>
-              </a:solidFill>
-              <a:prstDash val="solid"/>
-              <a:round/>
-            </a:ln>
-          </c:spPr>
-        </c:majorGridlines>
-        <c:numFmt formatCode="General" sourceLinked="0"/>
-        <c:majorTickMark val="out"/>
-        <c:minorTickMark val="none"/>
-        <c:tickLblPos val="nextTo"/>
-        <c:spPr>
-          <a:ln w="12700" cap="flat">
-            <a:solidFill>
-              <a:srgbClr val="888888"/>
-            </a:solidFill>
-            <a:prstDash val="solid"/>
-            <a:round/>
-          </a:ln>
-        </c:spPr>
-        <c:txPr>
-          <a:bodyPr/>
-          <a:lstStyle/>
-          <a:p>
-            <a:pPr>
-              <a:defRPr sz="1200" b="0" i="0" u="none" strike="noStrike">
-                <a:solidFill>
-                  <a:srgbClr val="6B7787"/>
-                </a:solidFill>
-                <a:latin typeface="Arial"/>
-              </a:defRPr>
-            </a:pPr>
-            <a:endParaRPr lang="en-US"/>
-          </a:p>
-        </c:txPr>
-        <c:crossAx val="2094734554"/>
-        <c:crosses val="autoZero"/>
-        <c:crossBetween val="between"/>
-      </c:valAx>
-      <c:spPr>
-        <a:noFill/>
-        <a:ln>
-          <a:noFill/>
-        </a:ln>
-        <a:effectLst/>
-      </c:spPr>
-    </c:plotArea>
-    <c:plotVisOnly val="1"/>
-    <c:dispBlanksAs val="span"/>
-  </c:chart>
-  <c:spPr>
-    <a:noFill/>
-    <a:ln>
-      <a:noFill/>
-    </a:ln>
-    <a:effectLst/>
-  </c:spPr>
-  <c:externalData r:id="rId1">
-    <c:autoUpdate val="0"/>
-  </c:externalData>
-</c:chartSpace>
 </file>
 
 <file path=ppt/notesMasters/notesMaster1.xml><?xml version="1.0" encoding="utf-8"?>
@@ -6085,22 +4534,30 @@
           </a:p>
         </p:txBody>
       </p:sp>
-      <p:graphicFrame>
-        <p:nvGraphicFramePr>
-          <p:cNvPr id="4" name="Chart 0" descr=""/>
-          <p:cNvGraphicFramePr/>
-          <p:nvPr/>
-        </p:nvGraphicFramePr>
-        <p:xfrm>
-          <a:off x="640080" y="1920240"/>
-          <a:ext cx="5029200" cy="3657600"/>
-        </p:xfrm>
-        <a:graphic xmlns:a="http://schemas.openxmlformats.org/drawingml/2006/main">
-          <a:graphicData uri="http://schemas.openxmlformats.org/drawingml/2006/chart">
-            <c:chart xmlns:c="http://schemas.openxmlformats.org/drawingml/2006/chart" r:id="rId1"/>
-          </a:graphicData>
-        </a:graphic>
-      </p:graphicFrame>
+      <p:pic>
+        <p:nvPicPr>
+          <p:cNvPr id="4" name="Image 0" descr="/tmp/rf-deck/img/problem.png">    </p:cNvPr>
+          <p:cNvPicPr>
+            <a:picLocks noChangeAspect="1"/>
+          </p:cNvPicPr>
+          <p:nvPr/>
+        </p:nvPicPr>
+        <p:blipFill>
+          <a:blip r:embed="rId1"/>
+          <a:stretch>
+            <a:fillRect/>
+          </a:stretch>
+        </p:blipFill>
+        <p:spPr>
+          <a:xfrm>
+            <a:off x="640080" y="1828800"/>
+            <a:ext cx="5029200" cy="3657600"/>
+          </a:xfrm>
+          <a:prstGeom prst="rect">
+            <a:avLst/>
+          </a:prstGeom>
+        </p:spPr>
+      </p:pic>
       <p:sp>
         <p:nvSpPr>
           <p:cNvPr id="5" name="Shape 2"/>
@@ -7167,22 +5624,30 @@
           </a:p>
         </p:txBody>
       </p:sp>
-      <p:graphicFrame>
-        <p:nvGraphicFramePr>
-          <p:cNvPr id="4" name="Chart 0" descr=""/>
-          <p:cNvGraphicFramePr/>
-          <p:nvPr/>
-        </p:nvGraphicFramePr>
-        <p:xfrm>
-          <a:off x="640080" y="1920240"/>
-          <a:ext cx="6583680" cy="3749040"/>
-        </p:xfrm>
-        <a:graphic xmlns:a="http://schemas.openxmlformats.org/drawingml/2006/main">
-          <a:graphicData uri="http://schemas.openxmlformats.org/drawingml/2006/chart">
-            <c:chart xmlns:c="http://schemas.openxmlformats.org/drawingml/2006/chart" r:id="rId1"/>
-          </a:graphicData>
-        </a:graphic>
-      </p:graphicFrame>
+      <p:pic>
+        <p:nvPicPr>
+          <p:cNvPr id="4" name="Image 0" descr="/tmp/rf-deck/img/market.png">    </p:cNvPr>
+          <p:cNvPicPr>
+            <a:picLocks noChangeAspect="1"/>
+          </p:cNvPicPr>
+          <p:nvPr/>
+        </p:nvPicPr>
+        <p:blipFill>
+          <a:blip r:embed="rId1"/>
+          <a:stretch>
+            <a:fillRect/>
+          </a:stretch>
+        </p:blipFill>
+        <p:spPr>
+          <a:xfrm>
+            <a:off x="640080" y="1874520"/>
+            <a:ext cx="6583680" cy="3749040"/>
+          </a:xfrm>
+          <a:prstGeom prst="rect">
+            <a:avLst/>
+          </a:prstGeom>
+        </p:spPr>
+      </p:pic>
       <p:sp>
         <p:nvSpPr>
           <p:cNvPr id="5" name="Shape 2"/>
@@ -7767,22 +6232,30 @@
           </a:p>
         </p:txBody>
       </p:sp>
-      <p:graphicFrame>
-        <p:nvGraphicFramePr>
-          <p:cNvPr id="4" name="Chart 0" descr=""/>
-          <p:cNvGraphicFramePr/>
-          <p:nvPr/>
-        </p:nvGraphicFramePr>
-        <p:xfrm>
-          <a:off x="640080" y="1874520"/>
-          <a:ext cx="7406640" cy="3977640"/>
-        </p:xfrm>
-        <a:graphic xmlns:a="http://schemas.openxmlformats.org/drawingml/2006/main">
-          <a:graphicData uri="http://schemas.openxmlformats.org/drawingml/2006/chart">
-            <c:chart xmlns:c="http://schemas.openxmlformats.org/drawingml/2006/chart" r:id="rId1"/>
-          </a:graphicData>
-        </a:graphic>
-      </p:graphicFrame>
+      <p:pic>
+        <p:nvPicPr>
+          <p:cNvPr id="4" name="Image 0" descr="/tmp/rf-deck/img/season.png">    </p:cNvPr>
+          <p:cNvPicPr>
+            <a:picLocks noChangeAspect="1"/>
+          </p:cNvPicPr>
+          <p:nvPr/>
+        </p:nvPicPr>
+        <p:blipFill>
+          <a:blip r:embed="rId1"/>
+          <a:stretch>
+            <a:fillRect/>
+          </a:stretch>
+        </p:blipFill>
+        <p:spPr>
+          <a:xfrm>
+            <a:off x="640080" y="1828800"/>
+            <a:ext cx="7406640" cy="3977640"/>
+          </a:xfrm>
+          <a:prstGeom prst="rect">
+            <a:avLst/>
+          </a:prstGeom>
+        </p:spPr>
+      </p:pic>
       <p:sp>
         <p:nvSpPr>
           <p:cNvPr id="5" name="Shape 2"/>
@@ -11856,22 +10329,30 @@
           </a:p>
         </p:txBody>
       </p:sp>
-      <p:graphicFrame>
-        <p:nvGraphicFramePr>
-          <p:cNvPr id="4" name="Chart 0" descr=""/>
-          <p:cNvGraphicFramePr/>
-          <p:nvPr/>
-        </p:nvGraphicFramePr>
-        <p:xfrm>
-          <a:off x="640080" y="1920240"/>
-          <a:ext cx="6309360" cy="3703320"/>
-        </p:xfrm>
-        <a:graphic xmlns:a="http://schemas.openxmlformats.org/drawingml/2006/main">
-          <a:graphicData uri="http://schemas.openxmlformats.org/drawingml/2006/chart">
-            <c:chart xmlns:c="http://schemas.openxmlformats.org/drawingml/2006/chart" r:id="rId1"/>
-          </a:graphicData>
-        </a:graphic>
-      </p:graphicFrame>
+      <p:pic>
+        <p:nvPicPr>
+          <p:cNvPr id="4" name="Image 0" descr="/tmp/rf-deck/img/scenario.png">    </p:cNvPr>
+          <p:cNvPicPr>
+            <a:picLocks noChangeAspect="1"/>
+          </p:cNvPicPr>
+          <p:nvPr/>
+        </p:nvPicPr>
+        <p:blipFill>
+          <a:blip r:embed="rId1"/>
+          <a:stretch>
+            <a:fillRect/>
+          </a:stretch>
+        </p:blipFill>
+        <p:spPr>
+          <a:xfrm>
+            <a:off x="640080" y="1874520"/>
+            <a:ext cx="6309360" cy="3703320"/>
+          </a:xfrm>
+          <a:prstGeom prst="rect">
+            <a:avLst/>
+          </a:prstGeom>
+        </p:spPr>
+      </p:pic>
       <p:sp>
         <p:nvSpPr>
           <p:cNvPr id="5" name="Shape 2"/>

--- a/docs/Retail-Family-Investor.pptx
+++ b/docs/Retail-Family-Investor.pptx
@@ -2439,7 +2439,7 @@
                 <a:ea typeface="Georgia" pitchFamily="34" charset="-122"/>
                 <a:cs typeface="Georgia" pitchFamily="34" charset="-120"/>
               </a:rPr>
-              <a:t>Сток к сезону уже готов — стартуем не с нуля</a:t>
+              <a:t>Большой сток уже на WB — стартуем не с нуля</a:t>
             </a:r>
             <a:endParaRPr lang="en-US" sz="3000" dirty="0"/>
           </a:p>
@@ -2468,10 +2468,10 @@
             <a:tbl>
               <a:tblPr/>
               <a:tblGrid>
-                <a:gridCol w="2286000"/>
+                <a:gridCol w="2194560"/>
                 <a:gridCol w="1371600"/>
-                <a:gridCol w="914400"/>
-                <a:gridCol w="1737360"/>
+                <a:gridCol w="1188720"/>
+                <a:gridCol w="1554480"/>
               </a:tblGrid>
               <a:tr h="530352">
                 <a:tc>
@@ -2627,7 +2627,7 @@
                           <a:ea typeface="Calibri" pitchFamily="34" charset="-122"/>
                           <a:cs typeface="Calibri" pitchFamily="34" charset="-120"/>
                         </a:rPr>
-                        <a:t>SKU</a:t>
+                        <a:t>Артикулов</a:t>
                       </a:r>
                       <a:endParaRPr lang="en-US" sz="1250" dirty="0">
                         <a:latin typeface="Calibri" charset="0"/>
@@ -2830,7 +2830,7 @@
                           <a:ea typeface="Calibri" pitchFamily="34" charset="-122"/>
                           <a:cs typeface="Calibri" pitchFamily="34" charset="-120"/>
                         </a:rPr>
-                        <a:t>1 366</a:t>
+                        <a:t>11 403</a:t>
                       </a:r>
                       <a:endParaRPr lang="en-US" sz="1250" dirty="0">
                         <a:latin typeface="Calibri" charset="0"/>
@@ -2960,7 +2960,7 @@
                           <a:ea typeface="Calibri" pitchFamily="34" charset="-122"/>
                           <a:cs typeface="Calibri" pitchFamily="34" charset="-120"/>
                         </a:rPr>
-                        <a:t>~16,4 млн ₽</a:t>
+                        <a:t>~137 млн ₽</a:t>
                       </a:r>
                       <a:endParaRPr lang="en-US" sz="1250" dirty="0">
                         <a:latin typeface="Calibri" charset="0"/>
@@ -3092,7 +3092,7 @@
                           <a:ea typeface="Calibri" pitchFamily="34" charset="-122"/>
                           <a:cs typeface="Calibri" pitchFamily="34" charset="-120"/>
                         </a:rPr>
-                        <a:t>1 431</a:t>
+                        <a:t>7 812</a:t>
                       </a:r>
                       <a:endParaRPr lang="en-US" sz="1250" dirty="0">
                         <a:latin typeface="Calibri" charset="0"/>
@@ -3157,7 +3157,7 @@
                           <a:ea typeface="Calibri" pitchFamily="34" charset="-122"/>
                           <a:cs typeface="Calibri" pitchFamily="34" charset="-120"/>
                         </a:rPr>
-                        <a:t>23</a:t>
+                        <a:t>24</a:t>
                       </a:r>
                       <a:endParaRPr lang="en-US" sz="1250" dirty="0">
                         <a:latin typeface="Calibri" charset="0"/>
@@ -3222,7 +3222,7 @@
                           <a:ea typeface="Calibri" pitchFamily="34" charset="-122"/>
                           <a:cs typeface="Calibri" pitchFamily="34" charset="-120"/>
                         </a:rPr>
-                        <a:t>~10,0 млн ₽</a:t>
+                        <a:t>~55 млн ₽</a:t>
                       </a:r>
                       <a:endParaRPr lang="en-US" sz="1250" dirty="0">
                         <a:latin typeface="Calibri" charset="0"/>
@@ -3354,7 +3354,7 @@
                           <a:ea typeface="Calibri" pitchFamily="34" charset="-122"/>
                           <a:cs typeface="Calibri" pitchFamily="34" charset="-120"/>
                         </a:rPr>
-                        <a:t>2 797</a:t>
+                        <a:t>19 215</a:t>
                       </a:r>
                       <a:endParaRPr lang="en-US" sz="1250" dirty="0">
                         <a:latin typeface="Calibri" charset="0"/>
@@ -3419,7 +3419,7 @@
                           <a:ea typeface="Calibri" pitchFamily="34" charset="-122"/>
                           <a:cs typeface="Calibri" pitchFamily="34" charset="-120"/>
                         </a:rPr>
-                        <a:t>59</a:t>
+                        <a:t>60</a:t>
                       </a:r>
                       <a:endParaRPr lang="en-US" sz="1250" dirty="0">
                         <a:latin typeface="Calibri" charset="0"/>
@@ -3484,7 +3484,7 @@
                           <a:ea typeface="Calibri" pitchFamily="34" charset="-122"/>
                           <a:cs typeface="Calibri" pitchFamily="34" charset="-120"/>
                         </a:rPr>
-                        <a:t>~26,4 млн ₽</a:t>
+                        <a:t>~192 млн ₽</a:t>
                       </a:r>
                       <a:endParaRPr lang="en-US" sz="1250" dirty="0">
                         <a:latin typeface="Calibri" charset="0"/>
@@ -3546,7 +3546,7 @@
         <p:spPr>
           <a:xfrm>
             <a:off x="640080" y="4434840"/>
-            <a:ext cx="6309360" cy="457200"/>
+            <a:ext cx="6309360" cy="548640"/>
           </a:xfrm>
           <a:prstGeom prst="rect">
             <a:avLst/>
@@ -3562,7 +3562,7 @@
               <a:buNone/>
             </a:pPr>
             <a:r>
-              <a:rPr lang="en-US" sz="1150" i="1" dirty="0">
+              <a:rPr lang="en-US" sz="1100" i="1" dirty="0">
                 <a:solidFill>
                   <a:srgbClr val="6B7787"/>
                 </a:solidFill>
@@ -3570,9 +3570,9 @@
                 <a:ea typeface="Calibri" pitchFamily="34" charset="-122"/>
                 <a:cs typeface="Calibri" pitchFamily="34" charset="-120"/>
               </a:rPr>
-              <a:t>Данные из кабинета WB (синк 16.06.2026). Пуховиков в остатках нет — это новая категория.</a:t>
-            </a:r>
-            <a:endParaRPr lang="en-US" sz="1150" dirty="0"/>
+              <a:t>Живые данные из API WB (кабинет Retail Family). Себестоимость стока ~25,6 млн ₽. Пуховиков в остатках нет — новая категория.</a:t>
+            </a:r>
+            <a:endParaRPr lang="en-US" sz="1100" dirty="0"/>
           </a:p>
         </p:txBody>
       </p:sp>
@@ -3663,7 +3663,7 @@
                 <a:ea typeface="Georgia" pitchFamily="34" charset="-122"/>
                 <a:cs typeface="Georgia" pitchFamily="34" charset="-120"/>
               </a:rPr>
-              <a:t>~37 млн ₽</a:t>
+              <a:t>19 215 шт</a:t>
             </a:r>
             <a:endParaRPr lang="en-US" sz="2670" dirty="0"/>
           </a:p>
@@ -3702,7 +3702,7 @@
                 <a:ea typeface="Calibri" pitchFamily="34" charset="-122"/>
                 <a:cs typeface="Calibri" pitchFamily="34" charset="-120"/>
               </a:rPr>
-              <a:t>весь товар к сезону (WB + свой склад)</a:t>
+              <a:t>готовый сток курток+ветровок на WB</a:t>
             </a:r>
             <a:endParaRPr lang="en-US" sz="1150" dirty="0"/>
           </a:p>
@@ -3787,7 +3787,7 @@
               <a:buNone/>
             </a:pPr>
             <a:r>
-              <a:rPr lang="en-US" sz="2280" b="1" dirty="0">
+              <a:rPr lang="en-US" sz="2540" b="1" dirty="0">
                 <a:solidFill>
                   <a:srgbClr val="1E8449"/>
                 </a:solidFill>
@@ -3795,9 +3795,9 @@
                 <a:ea typeface="Georgia" pitchFamily="34" charset="-122"/>
                 <a:cs typeface="Georgia" pitchFamily="34" charset="-120"/>
               </a:rPr>
-              <a:t>Часть готова</a:t>
-            </a:r>
-            <a:endParaRPr lang="en-US" sz="2280" dirty="0"/>
+              <a:t>~192 млн ₽</a:t>
+            </a:r>
+            <a:endParaRPr lang="en-US" sz="2540" dirty="0"/>
           </a:p>
         </p:txBody>
       </p:sp>
@@ -3834,7 +3834,7 @@
                 <a:ea typeface="Calibri" pitchFamily="34" charset="-122"/>
                 <a:cs typeface="Calibri" pitchFamily="34" charset="-120"/>
               </a:rPr>
-              <a:t>сезонный закуп уже частично сделан</a:t>
+              <a:t>GMV-потенциал стока (план до СПП)</a:t>
             </a:r>
             <a:endParaRPr lang="en-US" sz="1150" dirty="0"/>
           </a:p>
@@ -3892,7 +3892,7 @@
               <a:buNone/>
             </a:pPr>
             <a:r>
-              <a:rPr lang="en-US" sz="1300" dirty="0">
+              <a:rPr lang="en-US" sz="1250" dirty="0">
                 <a:solidFill>
                   <a:srgbClr val="16243B"/>
                 </a:solidFill>
@@ -3900,9 +3900,9 @@
                 <a:ea typeface="Calibri" pitchFamily="34" charset="-122"/>
                 <a:cs typeface="Calibri" pitchFamily="34" charset="-120"/>
               </a:rPr>
-              <a:t>Деньги инвестора идут на условия 34,5% (на весь сток) и докуп пуховиков — а не на старт с нуля.</a:t>
-            </a:r>
-            <a:endParaRPr lang="en-US" sz="1300" dirty="0"/>
+              <a:t>Большой сток уже на WB. Деньги инвестора — на условия 34,5% (на весь сток) и докуп пуховиков, а не на старт с нуля.</a:t>
+            </a:r>
+            <a:endParaRPr lang="en-US" sz="1250" dirty="0"/>
           </a:p>
         </p:txBody>
       </p:sp>
@@ -4088,7 +4088,7 @@
                 <a:ea typeface="Georgia" pitchFamily="34" charset="-122"/>
                 <a:cs typeface="Georgia" pitchFamily="34" charset="-120"/>
               </a:rPr>
-              <a:t>Выручка и прибыль: текущий сток + новый закуп</a:t>
+              <a:t>Прибыль за сезон: 60–102 млн ₽ (2,0–3,4x)</a:t>
             </a:r>
             <a:endParaRPr lang="en-US" sz="3000" dirty="0"/>
           </a:p>
@@ -4151,7 +4151,7 @@
                 <a:ea typeface="Calibri" pitchFamily="34" charset="-122"/>
                 <a:cs typeface="Calibri" pitchFamily="34" charset="-120"/>
               </a:rPr>
-              <a:t>Основа возврата — новый закуп пуховиков (рыночная цена, ~78% прибыли). </a:t>
+              <a:t>Пуховики (новый закуп) дают надёжные ~41 млн — окупают запрос даже без репрайса. </a:t>
             </a:r>
             <a:pPr indent="0" marL="0">
               <a:buNone/>
@@ -4165,7 +4165,7 @@
                 <a:ea typeface="Calibri" pitchFamily="34" charset="-122"/>
                 <a:cs typeface="Calibri" pitchFamily="34" charset="-120"/>
               </a:rPr>
-              <a:t>Апсайд текущего стока зависит от репрайса под условия 34,5% (куртка: клиент ~8 400 после СПП vs ~5 800). Непроданное переходит на след. сезон. Цены до СПП, sell-through 80%.</a:t>
+              <a:t>Апсайд сверху — от репрайса большого текущего стока (куртка: клиент ~5 950–8 400 после СПП). Выкуп 80%, цены до СПП.</a:t>
             </a:r>
             <a:endParaRPr lang="en-US" sz="1050" dirty="0"/>
           </a:p>
@@ -4250,7 +4250,7 @@
               <a:buNone/>
             </a:pPr>
             <a:r>
-              <a:rPr lang="en-US" sz="2800" b="1" dirty="0">
+              <a:rPr lang="en-US" sz="2540" b="1" dirty="0">
                 <a:solidFill>
                   <a:srgbClr val="1E8449"/>
                 </a:solidFill>
@@ -4258,9 +4258,9 @@
                 <a:ea typeface="Georgia" pitchFamily="34" charset="-122"/>
                 <a:cs typeface="Georgia" pitchFamily="34" charset="-120"/>
               </a:rPr>
-              <a:t>53 млн ₽</a:t>
-            </a:r>
-            <a:endParaRPr lang="en-US" sz="2800" dirty="0"/>
+              <a:t>60–102 млн</a:t>
+            </a:r>
+            <a:endParaRPr lang="en-US" sz="2540" dirty="0"/>
           </a:p>
         </p:txBody>
       </p:sp>
@@ -4297,7 +4297,7 @@
                 <a:ea typeface="Calibri" pitchFamily="34" charset="-122"/>
                 <a:cs typeface="Calibri" pitchFamily="34" charset="-120"/>
               </a:rPr>
-              <a:t>прогноз прибыли за сезон (база 80%)</a:t>
+              <a:t>прогноз прибыли за сезон (по репрайсу)</a:t>
             </a:r>
             <a:endParaRPr lang="en-US" sz="1150" dirty="0"/>
           </a:p>
@@ -4390,7 +4390,7 @@
                 <a:ea typeface="Georgia" pitchFamily="34" charset="-122"/>
                 <a:cs typeface="Georgia" pitchFamily="34" charset="-120"/>
               </a:rPr>
-              <a:t>1,3–2,1x</a:t>
+              <a:t>2,0–3,4x</a:t>
             </a:r>
             <a:endParaRPr lang="en-US" sz="2800" dirty="0"/>
           </a:p>
@@ -4429,7 +4429,7 @@
                 <a:ea typeface="Calibri" pitchFamily="34" charset="-122"/>
                 <a:cs typeface="Calibri" pitchFamily="34" charset="-120"/>
               </a:rPr>
-              <a:t>возврат на 30 млн (sell-through 60–95%)</a:t>
+              <a:t>возврат на 30 млн инвестиций</a:t>
             </a:r>
             <a:endParaRPr lang="en-US" sz="1150" dirty="0"/>
           </a:p>
@@ -4514,7 +4514,7 @@
               <a:buNone/>
             </a:pPr>
             <a:r>
-              <a:rPr lang="en-US" sz="2670" b="1" dirty="0">
+              <a:rPr lang="en-US" sz="2800" b="1" dirty="0">
                 <a:solidFill>
                   <a:srgbClr val="16243B"/>
                 </a:solidFill>
@@ -4522,9 +4522,9 @@
                 <a:ea typeface="Georgia" pitchFamily="34" charset="-122"/>
                 <a:cs typeface="Georgia" pitchFamily="34" charset="-120"/>
               </a:rPr>
-              <a:t>135 млн ₽</a:t>
-            </a:r>
-            <a:endParaRPr lang="en-US" sz="2670" dirty="0"/>
+              <a:t>+41 млн</a:t>
+            </a:r>
+            <a:endParaRPr lang="en-US" sz="2800" dirty="0"/>
           </a:p>
         </p:txBody>
       </p:sp>
@@ -4561,7 +4561,7 @@
                 <a:ea typeface="Calibri" pitchFamily="34" charset="-122"/>
                 <a:cs typeface="Calibri" pitchFamily="34" charset="-120"/>
               </a:rPr>
-              <a:t>прогноз выручки за сезон (база 80%)</a:t>
+              <a:t>только пуховики — уже окупают запрос</a:t>
             </a:r>
             <a:endParaRPr lang="en-US" sz="1150" dirty="0"/>
           </a:p>
@@ -6007,7 +6007,7 @@
                 <a:ea typeface="Calibri" pitchFamily="34" charset="-122"/>
                 <a:cs typeface="Calibri" pitchFamily="34" charset="-120"/>
               </a:rPr>
-              <a:t>остаток 37 млн ₽, часть закупа к сезону готова — стартуем не с нуля. Прогноз прибыли за сезон </a:t>
+              <a:t>готовый сток 19 215 шт на WB (~192 млн ₽ GMV-потенциал) — стартуем не с нуля. Прогноз прибыли за сезон </a:t>
             </a:r>
             <a:pPr indent="0" marL="0">
               <a:buNone/>
@@ -6021,7 +6021,7 @@
                 <a:ea typeface="Calibri" pitchFamily="34" charset="-122"/>
                 <a:cs typeface="Calibri" pitchFamily="34" charset="-120"/>
               </a:rPr>
-              <a:t>~53 млн ₽ (1,8x на 30 млн).</a:t>
+              <a:t>~60–102 млн ₽ (2,0–3,4x на 30 млн).</a:t>
             </a:r>
             <a:endParaRPr lang="en-US" sz="1500" dirty="0"/>
           </a:p>
@@ -6527,7 +6527,7 @@
                 <a:ea typeface="Georgia" pitchFamily="34" charset="-122"/>
                 <a:cs typeface="Georgia" pitchFamily="34" charset="-120"/>
               </a:rPr>
-              <a:t>1,3–2,1x</a:t>
+              <a:t>2,0–3,4x</a:t>
             </a:r>
             <a:endParaRPr lang="en-US" sz="2800" dirty="0"/>
           </a:p>
@@ -7019,7 +7019,7 @@
                 <a:ea typeface="Calibri" pitchFamily="34" charset="-122"/>
                 <a:cs typeface="Calibri" pitchFamily="34" charset="-120"/>
               </a:rPr>
-              <a:t>Остаток 37 млн готов (часть закупа — тоже); +20 млн в пуховики (зимний пик), +10 млн на условия 34,5%.</a:t>
+              <a:t>Готовый сток 19 215 шт на WB (~192 млн GMV); +20 млн в пуховики (зимний пик), +10 млн на условия 34,5%.</a:t>
             </a:r>
             <a:endParaRPr lang="en-US" sz="1350" dirty="0"/>
           </a:p>

--- a/docs/Retail-Family-Investor.pptx
+++ b/docs/Retail-Family-Investor.pptx
@@ -14,9 +14,10 @@
     <p:sldId id="262" r:id="rId8"/>
     <p:sldId id="263" r:id="rId9"/>
     <p:sldId id="264" r:id="rId10"/>
+    <p:sldId id="265" r:id="rId11"/>
   </p:sldIdLst>
   <p:notesMasterIdLst>
-    <p:notesMasterId r:id="rId11"/>
+    <p:notesMasterId r:id="rId12"/>
   </p:notesMasterIdLst>
   <p:sldSz cx="12192000" cy="6858000"/>
   <p:notesSz cx="6858000" cy="12192000"/>
@@ -534,6 +535,94 @@
             <a:fld id="{F7021451-1387-4CA6-816F-3879F97B5CBC}" type="slidenum">
               <a:rPr lang="en-US"/>
               <a:t>1</a:t>
+            </a:fld>
+            <a:endParaRPr lang="en-US"/>
+          </a:p>
+        </p:txBody>
+      </p:sp>
+    </p:spTree>
+    <p:extLst>
+      <p:ext uri="{BB962C8B-B14F-4D97-AF65-F5344CB8AC3E}">
+        <p14:creationId xmlns:p14="http://schemas.microsoft.com/office/powerpoint/2010/main" val="1024086991"/>
+      </p:ext>
+    </p:extLst>
+  </p:cSld>
+  <p:clrMapOvr>
+    <a:masterClrMapping/>
+  </p:clrMapOvr>
+</p:notes>
+</file>
+
+<file path=ppt/notesSlides/notesSlide10.xml><?xml version="1.0" encoding="utf-8"?>
+<p:notes xmlns:a="http://schemas.openxmlformats.org/drawingml/2006/main" xmlns:r="http://schemas.openxmlformats.org/officeDocument/2006/relationships" xmlns:p="http://schemas.openxmlformats.org/presentationml/2006/main">
+  <p:cSld>
+    <p:spTree>
+      <p:nvGrpSpPr>
+        <p:cNvPr id="1" name=""/>
+        <p:cNvGrpSpPr/>
+        <p:nvPr/>
+      </p:nvGrpSpPr>
+      <p:grpSpPr>
+        <a:xfrm>
+          <a:off x="0" y="0"/>
+          <a:ext cx="0" cy="0"/>
+          <a:chOff x="0" y="0"/>
+          <a:chExt cx="0" cy="0"/>
+        </a:xfrm>
+      </p:grpSpPr>
+      <p:sp>
+        <p:nvSpPr>
+          <p:cNvPr id="2" name="Slide Image Placeholder 1"/>
+          <p:cNvSpPr>
+            <a:spLocks noGrp="1" noRot="1" noChangeAspect="1"/>
+          </p:cNvSpPr>
+          <p:nvPr>
+            <p:ph type="sldImg"/>
+          </p:nvPr>
+        </p:nvSpPr>
+        <p:spPr/>
+      </p:sp>
+      <p:sp>
+        <p:nvSpPr>
+          <p:cNvPr id="3" name="Notes Placeholder 2"/>
+          <p:cNvSpPr>
+            <a:spLocks noGrp="1"/>
+          </p:cNvSpPr>
+          <p:nvPr>
+            <p:ph type="body" idx="1"/>
+          </p:nvPr>
+        </p:nvSpPr>
+        <p:spPr/>
+        <p:txBody>
+          <a:bodyPr/>
+          <a:lstStyle/>
+          <a:p>
+            <a:r>
+              <a:rPr lang="en-US" dirty="0"/>
+              <a:t/>
+            </a:r>
+            <a:endParaRPr lang="en-US" dirty="0"/>
+          </a:p>
+        </p:txBody>
+      </p:sp>
+      <p:sp>
+        <p:nvSpPr>
+          <p:cNvPr id="4" name="Slide Number Placeholder 3"/>
+          <p:cNvSpPr>
+            <a:spLocks noGrp="1"/>
+          </p:cNvSpPr>
+          <p:nvPr>
+            <p:ph type="sldNum" sz="quarter" idx="10"/>
+          </p:nvPr>
+        </p:nvSpPr>
+        <p:spPr/>
+        <p:txBody>
+          <a:bodyPr/>
+          <a:lstStyle/>
+          <a:p>
+            <a:fld id="{F7021451-1387-4CA6-816F-3879F97B5CBC}" type="slidenum">
+              <a:rPr lang="en-US"/>
+              <a:t>10</a:t>
             </a:fld>
             <a:endParaRPr lang="en-US"/>
           </a:p>
@@ -2288,6 +2377,548 @@
 </p:sld>
 </file>
 
+<file path=ppt/slides/slide10.xml><?xml version="1.0" encoding="utf-8"?>
+<p:sld xmlns:a="http://schemas.openxmlformats.org/drawingml/2006/main" xmlns:r="http://schemas.openxmlformats.org/officeDocument/2006/relationships" xmlns:p="http://schemas.openxmlformats.org/presentationml/2006/main">
+  <p:cSld name="Slide 10">
+    <p:bg>
+      <p:bgPr>
+        <a:solidFill>
+          <a:srgbClr val="FFFFFF"/>
+        </a:solidFill>
+      </p:bgPr>
+    </p:bg>
+    <p:spTree>
+      <p:nvGrpSpPr>
+        <p:cNvPr id="1" name=""/>
+        <p:cNvGrpSpPr/>
+        <p:nvPr/>
+      </p:nvGrpSpPr>
+      <p:grpSpPr>
+        <a:xfrm>
+          <a:off x="0" y="0"/>
+          <a:ext cx="0" cy="0"/>
+          <a:chOff x="0" y="0"/>
+          <a:chExt cx="0" cy="0"/>
+        </a:xfrm>
+      </p:grpSpPr>
+      <p:sp>
+        <p:nvSpPr>
+          <p:cNvPr id="2" name="Text 0"/>
+          <p:cNvSpPr/>
+          <p:nvPr/>
+        </p:nvSpPr>
+        <p:spPr>
+          <a:xfrm>
+            <a:off x="640080" y="502920"/>
+            <a:ext cx="10058400" cy="274320"/>
+          </a:xfrm>
+          <a:prstGeom prst="rect">
+            <a:avLst/>
+          </a:prstGeom>
+          <a:noFill/>
+          <a:ln/>
+        </p:spPr>
+        <p:txBody>
+          <a:bodyPr wrap="square" lIns="0" tIns="0" rIns="0" bIns="0" rtlCol="0" anchor="ctr"/>
+          <a:lstStyle/>
+          <a:p>
+            <a:pPr indent="0" marL="0">
+              <a:buNone/>
+            </a:pPr>
+            <a:r>
+              <a:rPr lang="en-US" sz="1200" b="1" spc="300" kern="0" dirty="0">
+                <a:solidFill>
+                  <a:srgbClr val="6B7787"/>
+                </a:solidFill>
+                <a:latin typeface="Calibri" pitchFamily="34" charset="0"/>
+                <a:ea typeface="Calibri" pitchFamily="34" charset="-122"/>
+                <a:cs typeface="Calibri" pitchFamily="34" charset="-120"/>
+              </a:rPr>
+              <a:t>ПРИЛОЖЕНИЕ · ПОДТВЕРЖДЕНИЕ</a:t>
+            </a:r>
+            <a:endParaRPr lang="en-US" sz="1200" dirty="0"/>
+          </a:p>
+        </p:txBody>
+      </p:sp>
+      <p:sp>
+        <p:nvSpPr>
+          <p:cNvPr id="3" name="Text 1"/>
+          <p:cNvSpPr/>
+          <p:nvPr/>
+        </p:nvSpPr>
+        <p:spPr>
+          <a:xfrm>
+            <a:off x="640080" y="777240"/>
+            <a:ext cx="10908792" cy="822960"/>
+          </a:xfrm>
+          <a:prstGeom prst="rect">
+            <a:avLst/>
+          </a:prstGeom>
+          <a:noFill/>
+          <a:ln/>
+        </p:spPr>
+        <p:txBody>
+          <a:bodyPr wrap="square" lIns="0" tIns="0" rIns="0" bIns="0" rtlCol="0" anchor="ctr"/>
+          <a:lstStyle/>
+          <a:p>
+            <a:pPr indent="0" marL="0">
+              <a:buNone/>
+            </a:pPr>
+            <a:r>
+              <a:rPr lang="en-US" sz="3000" b="1" dirty="0">
+                <a:solidFill>
+                  <a:srgbClr val="16243B"/>
+                </a:solidFill>
+                <a:latin typeface="Georgia" pitchFamily="34" charset="0"/>
+                <a:ea typeface="Georgia" pitchFamily="34" charset="-122"/>
+                <a:cs typeface="Georgia" pitchFamily="34" charset="-120"/>
+              </a:rPr>
+              <a:t>Динамика продаж NORVIA (кабинет WB)</a:t>
+            </a:r>
+            <a:endParaRPr lang="en-US" sz="3000" dirty="0"/>
+          </a:p>
+        </p:txBody>
+      </p:sp>
+      <p:pic>
+        <p:nvPicPr>
+          <p:cNvPr id="4" name="Image 0" descr="/tmp/rf-deck/img/weekly.png">    </p:cNvPr>
+          <p:cNvPicPr>
+            <a:picLocks noChangeAspect="1"/>
+          </p:cNvPicPr>
+          <p:nvPr/>
+        </p:nvPicPr>
+        <p:blipFill>
+          <a:blip r:embed="rId1"/>
+          <a:stretch>
+            <a:fillRect/>
+          </a:stretch>
+        </p:blipFill>
+        <p:spPr>
+          <a:xfrm>
+            <a:off x="640080" y="1920240"/>
+            <a:ext cx="7223760" cy="3383280"/>
+          </a:xfrm>
+          <a:prstGeom prst="rect">
+            <a:avLst/>
+          </a:prstGeom>
+        </p:spPr>
+      </p:pic>
+      <p:sp>
+        <p:nvSpPr>
+          <p:cNvPr id="5" name="Shape 2"/>
+          <p:cNvSpPr/>
+          <p:nvPr/>
+        </p:nvSpPr>
+        <p:spPr>
+          <a:xfrm>
+            <a:off x="8138160" y="1965960"/>
+            <a:ext cx="3429000" cy="1143000"/>
+          </a:xfrm>
+          <a:prstGeom prst="roundRect">
+            <a:avLst>
+              <a:gd name="adj" fmla="val 5600"/>
+            </a:avLst>
+          </a:prstGeom>
+          <a:solidFill>
+            <a:srgbClr val="FFFFFF"/>
+          </a:solidFill>
+          <a:ln w="12700">
+            <a:solidFill>
+              <a:srgbClr val="D9E0EA"/>
+            </a:solidFill>
+            <a:prstDash val="solid"/>
+          </a:ln>
+          <a:effectLst>
+            <a:outerShdw sx="100000" sy="100000" kx="0" ky="0" algn="bl" rotWithShape="0" blurRad="114300" dist="38100" dir="8100000">
+              <a:srgbClr val="0F1E33">
+                <a:alpha val="16000"/>
+              </a:srgbClr>
+            </a:outerShdw>
+          </a:effectLst>
+        </p:spPr>
+      </p:sp>
+      <p:sp>
+        <p:nvSpPr>
+          <p:cNvPr id="6" name="Shape 3"/>
+          <p:cNvSpPr/>
+          <p:nvPr/>
+        </p:nvSpPr>
+        <p:spPr>
+          <a:xfrm>
+            <a:off x="8138160" y="1965960"/>
+            <a:ext cx="82296" cy="1143000"/>
+          </a:xfrm>
+          <a:prstGeom prst="rect">
+            <a:avLst/>
+          </a:prstGeom>
+          <a:solidFill>
+            <a:srgbClr val="1E8449"/>
+          </a:solidFill>
+          <a:ln/>
+        </p:spPr>
+      </p:sp>
+      <p:sp>
+        <p:nvSpPr>
+          <p:cNvPr id="7" name="Text 4"/>
+          <p:cNvSpPr/>
+          <p:nvPr/>
+        </p:nvSpPr>
+        <p:spPr>
+          <a:xfrm>
+            <a:off x="8394192" y="2084832"/>
+            <a:ext cx="3063240" cy="571500"/>
+          </a:xfrm>
+          <a:prstGeom prst="rect">
+            <a:avLst/>
+          </a:prstGeom>
+          <a:noFill/>
+          <a:ln/>
+        </p:spPr>
+        <p:txBody>
+          <a:bodyPr wrap="square" lIns="0" tIns="0" rIns="0" bIns="0" rtlCol="0" anchor="ctr"/>
+          <a:lstStyle/>
+          <a:p>
+            <a:pPr indent="0" marL="0">
+              <a:buNone/>
+            </a:pPr>
+            <a:r>
+              <a:rPr lang="en-US" sz="2460" b="1" dirty="0">
+                <a:solidFill>
+                  <a:srgbClr val="1E8449"/>
+                </a:solidFill>
+                <a:latin typeface="Georgia" pitchFamily="34" charset="0"/>
+                <a:ea typeface="Georgia" pitchFamily="34" charset="-122"/>
+                <a:cs typeface="Georgia" pitchFamily="34" charset="-120"/>
+              </a:rPr>
+              <a:t>30,8 млн ₽</a:t>
+            </a:r>
+            <a:endParaRPr lang="en-US" sz="2460" dirty="0"/>
+          </a:p>
+        </p:txBody>
+      </p:sp>
+      <p:sp>
+        <p:nvSpPr>
+          <p:cNvPr id="8" name="Text 5"/>
+          <p:cNvSpPr/>
+          <p:nvPr/>
+        </p:nvSpPr>
+        <p:spPr>
+          <a:xfrm>
+            <a:off x="8394192" y="2617470"/>
+            <a:ext cx="3017520" cy="445770"/>
+          </a:xfrm>
+          <a:prstGeom prst="rect">
+            <a:avLst/>
+          </a:prstGeom>
+          <a:noFill/>
+          <a:ln/>
+        </p:spPr>
+        <p:txBody>
+          <a:bodyPr wrap="square" lIns="0" tIns="0" rIns="0" bIns="0" rtlCol="0" anchor="t"/>
+          <a:lstStyle/>
+          <a:p>
+            <a:pPr indent="0" marL="0">
+              <a:buNone/>
+            </a:pPr>
+            <a:r>
+              <a:rPr lang="en-US" sz="1150" dirty="0">
+                <a:solidFill>
+                  <a:srgbClr val="6B7787"/>
+                </a:solidFill>
+                <a:latin typeface="Calibri" pitchFamily="34" charset="0"/>
+                <a:ea typeface="Calibri" pitchFamily="34" charset="-122"/>
+                <a:cs typeface="Calibri" pitchFamily="34" charset="-120"/>
+              </a:rPr>
+              <a:t>продаж за фев–июнь 2026</a:t>
+            </a:r>
+            <a:endParaRPr lang="en-US" sz="1150" dirty="0"/>
+          </a:p>
+        </p:txBody>
+      </p:sp>
+      <p:sp>
+        <p:nvSpPr>
+          <p:cNvPr id="9" name="Shape 6"/>
+          <p:cNvSpPr/>
+          <p:nvPr/>
+        </p:nvSpPr>
+        <p:spPr>
+          <a:xfrm>
+            <a:off x="8138160" y="3246120"/>
+            <a:ext cx="3429000" cy="1143000"/>
+          </a:xfrm>
+          <a:prstGeom prst="roundRect">
+            <a:avLst>
+              <a:gd name="adj" fmla="val 5600"/>
+            </a:avLst>
+          </a:prstGeom>
+          <a:solidFill>
+            <a:srgbClr val="FFFFFF"/>
+          </a:solidFill>
+          <a:ln w="12700">
+            <a:solidFill>
+              <a:srgbClr val="D9E0EA"/>
+            </a:solidFill>
+            <a:prstDash val="solid"/>
+          </a:ln>
+          <a:effectLst>
+            <a:outerShdw sx="100000" sy="100000" kx="0" ky="0" algn="bl" rotWithShape="0" blurRad="114300" dist="38100" dir="8100000">
+              <a:srgbClr val="0F1E33">
+                <a:alpha val="16000"/>
+              </a:srgbClr>
+            </a:outerShdw>
+          </a:effectLst>
+        </p:spPr>
+      </p:sp>
+      <p:sp>
+        <p:nvSpPr>
+          <p:cNvPr id="10" name="Shape 7"/>
+          <p:cNvSpPr/>
+          <p:nvPr/>
+        </p:nvSpPr>
+        <p:spPr>
+          <a:xfrm>
+            <a:off x="8138160" y="3246120"/>
+            <a:ext cx="82296" cy="1143000"/>
+          </a:xfrm>
+          <a:prstGeom prst="rect">
+            <a:avLst/>
+          </a:prstGeom>
+          <a:solidFill>
+            <a:srgbClr val="D4A24E"/>
+          </a:solidFill>
+          <a:ln/>
+        </p:spPr>
+      </p:sp>
+      <p:sp>
+        <p:nvSpPr>
+          <p:cNvPr id="11" name="Text 8"/>
+          <p:cNvSpPr/>
+          <p:nvPr/>
+        </p:nvSpPr>
+        <p:spPr>
+          <a:xfrm>
+            <a:off x="8394192" y="3364992"/>
+            <a:ext cx="3063240" cy="571500"/>
+          </a:xfrm>
+          <a:prstGeom prst="rect">
+            <a:avLst/>
+          </a:prstGeom>
+          <a:noFill/>
+          <a:ln/>
+        </p:spPr>
+        <p:txBody>
+          <a:bodyPr wrap="square" lIns="0" tIns="0" rIns="0" bIns="0" rtlCol="0" anchor="ctr"/>
+          <a:lstStyle/>
+          <a:p>
+            <a:pPr indent="0" marL="0">
+              <a:buNone/>
+            </a:pPr>
+            <a:r>
+              <a:rPr lang="en-US" sz="2460" b="1" dirty="0">
+                <a:solidFill>
+                  <a:srgbClr val="D4A24E"/>
+                </a:solidFill>
+                <a:latin typeface="Georgia" pitchFamily="34" charset="0"/>
+                <a:ea typeface="Georgia" pitchFamily="34" charset="-122"/>
+                <a:cs typeface="Georgia" pitchFamily="34" charset="-120"/>
+              </a:rPr>
+              <a:t>~7 млн/нед</a:t>
+            </a:r>
+            <a:endParaRPr lang="en-US" sz="2460" dirty="0"/>
+          </a:p>
+        </p:txBody>
+      </p:sp>
+      <p:sp>
+        <p:nvSpPr>
+          <p:cNvPr id="12" name="Text 9"/>
+          <p:cNvSpPr/>
+          <p:nvPr/>
+        </p:nvSpPr>
+        <p:spPr>
+          <a:xfrm>
+            <a:off x="8394192" y="3897630"/>
+            <a:ext cx="3017520" cy="445770"/>
+          </a:xfrm>
+          <a:prstGeom prst="rect">
+            <a:avLst/>
+          </a:prstGeom>
+          <a:noFill/>
+          <a:ln/>
+        </p:spPr>
+        <p:txBody>
+          <a:bodyPr wrap="square" lIns="0" tIns="0" rIns="0" bIns="0" rtlCol="0" anchor="t"/>
+          <a:lstStyle/>
+          <a:p>
+            <a:pPr indent="0" marL="0">
+              <a:buNone/>
+            </a:pPr>
+            <a:r>
+              <a:rPr lang="en-US" sz="1150" dirty="0">
+                <a:solidFill>
+                  <a:srgbClr val="6B7787"/>
+                </a:solidFill>
+                <a:latin typeface="Calibri" pitchFamily="34" charset="0"/>
+                <a:ea typeface="Calibri" pitchFamily="34" charset="-122"/>
+                <a:cs typeface="Calibri" pitchFamily="34" charset="-120"/>
+              </a:rPr>
+              <a:t>пик заказов в марте</a:t>
+            </a:r>
+            <a:endParaRPr lang="en-US" sz="1150" dirty="0"/>
+          </a:p>
+        </p:txBody>
+      </p:sp>
+      <p:sp>
+        <p:nvSpPr>
+          <p:cNvPr id="13" name="Shape 10"/>
+          <p:cNvSpPr/>
+          <p:nvPr/>
+        </p:nvSpPr>
+        <p:spPr>
+          <a:xfrm>
+            <a:off x="8138160" y="4526280"/>
+            <a:ext cx="3429000" cy="1417320"/>
+          </a:xfrm>
+          <a:prstGeom prst="roundRect">
+            <a:avLst>
+              <a:gd name="adj" fmla="val 4516"/>
+            </a:avLst>
+          </a:prstGeom>
+          <a:solidFill>
+            <a:srgbClr val="EEF2F8"/>
+          </a:solidFill>
+          <a:ln w="12700">
+            <a:solidFill>
+              <a:srgbClr val="D9E0EA"/>
+            </a:solidFill>
+            <a:prstDash val="solid"/>
+          </a:ln>
+        </p:spPr>
+      </p:sp>
+      <p:sp>
+        <p:nvSpPr>
+          <p:cNvPr id="14" name="Text 11"/>
+          <p:cNvSpPr/>
+          <p:nvPr/>
+        </p:nvSpPr>
+        <p:spPr>
+          <a:xfrm>
+            <a:off x="8366760" y="4663440"/>
+            <a:ext cx="3017520" cy="1143000"/>
+          </a:xfrm>
+          <a:prstGeom prst="rect">
+            <a:avLst/>
+          </a:prstGeom>
+          <a:noFill/>
+          <a:ln/>
+        </p:spPr>
+        <p:txBody>
+          <a:bodyPr wrap="square" lIns="0" tIns="0" rIns="0" bIns="0" rtlCol="0" anchor="ctr"/>
+          <a:lstStyle/>
+          <a:p>
+            <a:pPr indent="0" marL="0">
+              <a:buNone/>
+            </a:pPr>
+            <a:r>
+              <a:rPr lang="en-US" sz="1200" dirty="0">
+                <a:solidFill>
+                  <a:srgbClr val="16243B"/>
+                </a:solidFill>
+                <a:latin typeface="Calibri" pitchFamily="34" charset="0"/>
+                <a:ea typeface="Calibri" pitchFamily="34" charset="-122"/>
+                <a:cs typeface="Calibri" pitchFamily="34" charset="-120"/>
+              </a:rPr>
+              <a:t>Реальная кривая из кабинета: весенний пик в марте, далее ветровки. Подтверждает трек-рекорд и сезонность.</a:t>
+            </a:r>
+            <a:endParaRPr lang="en-US" sz="1200" dirty="0"/>
+          </a:p>
+        </p:txBody>
+      </p:sp>
+      <p:sp>
+        <p:nvSpPr>
+          <p:cNvPr id="15" name="Text 12"/>
+          <p:cNvSpPr/>
+          <p:nvPr/>
+        </p:nvSpPr>
+        <p:spPr>
+          <a:xfrm>
+            <a:off x="11274552" y="6400800"/>
+            <a:ext cx="548640" cy="274320"/>
+          </a:xfrm>
+          <a:prstGeom prst="rect">
+            <a:avLst/>
+          </a:prstGeom>
+          <a:noFill/>
+          <a:ln/>
+        </p:spPr>
+        <p:txBody>
+          <a:bodyPr wrap="square" rtlCol="0" anchor="ctr"/>
+          <a:lstStyle/>
+          <a:p>
+            <a:pPr algn="r" indent="0" marL="0">
+              <a:buNone/>
+            </a:pPr>
+            <a:r>
+              <a:rPr lang="en-US" sz="1000" dirty="0">
+                <a:solidFill>
+                  <a:srgbClr val="6B7787"/>
+                </a:solidFill>
+                <a:latin typeface="Calibri" pitchFamily="34" charset="0"/>
+                <a:ea typeface="Calibri" pitchFamily="34" charset="-122"/>
+                <a:cs typeface="Calibri" pitchFamily="34" charset="-120"/>
+              </a:rPr>
+              <a:t>08</a:t>
+            </a:r>
+            <a:endParaRPr lang="en-US" sz="1000" dirty="0"/>
+          </a:p>
+        </p:txBody>
+      </p:sp>
+      <p:sp>
+        <p:nvSpPr>
+          <p:cNvPr id="16" name="Text 13"/>
+          <p:cNvSpPr/>
+          <p:nvPr/>
+        </p:nvSpPr>
+        <p:spPr>
+          <a:xfrm>
+            <a:off x="640080" y="6400800"/>
+            <a:ext cx="3657600" cy="274320"/>
+          </a:xfrm>
+          <a:prstGeom prst="rect">
+            <a:avLst/>
+          </a:prstGeom>
+          <a:noFill/>
+          <a:ln/>
+        </p:spPr>
+        <p:txBody>
+          <a:bodyPr wrap="square" rtlCol="0" anchor="ctr"/>
+          <a:lstStyle/>
+          <a:p>
+            <a:pPr indent="0" marL="0">
+              <a:buNone/>
+            </a:pPr>
+            <a:r>
+              <a:rPr lang="en-US" sz="900" spc="200" kern="0" dirty="0">
+                <a:solidFill>
+                  <a:srgbClr val="6B7787"/>
+                </a:solidFill>
+                <a:latin typeface="Calibri" pitchFamily="34" charset="0"/>
+                <a:ea typeface="Calibri" pitchFamily="34" charset="-122"/>
+                <a:cs typeface="Calibri" pitchFamily="34" charset="-120"/>
+              </a:rPr>
+              <a:t>RETAIL FAMILY</a:t>
+            </a:r>
+            <a:endParaRPr lang="en-US" sz="900" dirty="0"/>
+          </a:p>
+        </p:txBody>
+      </p:sp>
+    </p:spTree>
+  </p:cSld>
+  <p:clrMapOvr>
+    <a:masterClrMapping/>
+  </p:clrMapOvr>
+</p:sld>
+</file>
+
 <file path=ppt/slides/slide2.xml><?xml version="1.0" encoding="utf-8"?>
 <p:sld xmlns:a="http://schemas.openxmlformats.org/drawingml/2006/main" xmlns:r="http://schemas.openxmlformats.org/officeDocument/2006/relationships" xmlns:p="http://schemas.openxmlformats.org/presentationml/2006/main">
   <p:cSld name="Slide 2">
@@ -6880,49 +7511,2527 @@
                 <a:ea typeface="Georgia" pitchFamily="34" charset="-122"/>
                 <a:cs typeface="Georgia" pitchFamily="34" charset="-120"/>
               </a:rPr>
-              <a:t>Подтверждение цифр — скриншоты кабинета WB</a:t>
+              <a:t>Остатки на складах WB · NORVIA (19.06.2026)</a:t>
             </a:r>
             <a:endParaRPr lang="en-US" sz="3000" dirty="0"/>
           </a:p>
         </p:txBody>
       </p:sp>
-      <p:sp>
-        <p:nvSpPr>
-          <p:cNvPr id="4" name="Shape 2"/>
-          <p:cNvSpPr/>
-          <p:nvPr/>
-        </p:nvSpPr>
-        <p:spPr>
-          <a:xfrm>
-            <a:off x="640080" y="1874520"/>
-            <a:ext cx="5257800" cy="1783080"/>
+      <p:graphicFrame>
+        <p:nvGraphicFramePr>
+          <p:cNvPr id="10" name="Table 0"/>
+          <p:cNvGraphicFramePr>
+            <a:graphicFrameLocks noGrp="1"/>
+          </p:cNvGraphicFramePr>
+          <p:nvPr>
+            <p:extLst>
+              <p:ext uri="{D42A27DB-BD31-4B8C-83A1-F6EECF244321}">
+                <p14:modId xmlns:p14="http://schemas.microsoft.com/office/powerpoint/2010/main" val="1579011935"/>
+              </p:ext>
+            </p:extLst>
+          </p:nvPr>
+        </p:nvGraphicFramePr>
+        <p:xfrm>
+          <a:off x="640080" y="2011680"/>
+          <a:ext cx="10908792" cy="914400"/>
+        </p:xfrm>
+        <a:graphic>
+          <a:graphicData uri="http://schemas.openxmlformats.org/drawingml/2006/table">
+            <a:tbl>
+              <a:tblPr/>
+              <a:tblGrid>
+                <a:gridCol w="1463040"/>
+                <a:gridCol w="1143000"/>
+                <a:gridCol w="1143000"/>
+                <a:gridCol w="1188720"/>
+                <a:gridCol w="1325880"/>
+                <a:gridCol w="1325880"/>
+                <a:gridCol w="1280160"/>
+                <a:gridCol w="1143000"/>
+                <a:gridCol w="896112"/>
+              </a:tblGrid>
+              <a:tr h="566928">
+                <a:tc>
+                  <a:txBody>
+                    <a:bodyPr/>
+                    <a:lstStyle/>
+                    <a:p>
+                      <a:pPr algn="ctr" indent="0" marL="0">
+                        <a:buNone/>
+                      </a:pPr>
+                      <a:r>
+                        <a:rPr lang="en-US" sz="1100" b="1" dirty="0">
+                          <a:solidFill>
+                            <a:srgbClr val="FFFFFF"/>
+                          </a:solidFill>
+                          <a:latin typeface="Calibri" pitchFamily="34" charset="0"/>
+                          <a:ea typeface="Calibri" pitchFamily="34" charset="-122"/>
+                          <a:cs typeface="Calibri" pitchFamily="34" charset="-120"/>
+                        </a:rPr>
+                        <a:t>Предмет</a:t>
+                      </a:r>
+                      <a:endParaRPr lang="en-US" sz="1100" dirty="0">
+                        <a:latin typeface="Calibri" charset="0"/>
+                        <a:ea typeface="Calibri" charset="0"/>
+                        <a:cs typeface="Calibri" charset="0"/>
+                      </a:endParaRPr>
+                    </a:p>
+                  </a:txBody>
+                  <a:tcPr marL="91440" marR="91440" marT="45720" marB="45720" anchor="ctr">
+                    <a:lnL w="12700" cap="flat" cmpd="sng" algn="ctr">
+                      <a:solidFill>
+                        <a:srgbClr val="D9E0EA"/>
+                      </a:solidFill>
+                      <a:prstDash val="solid"/>
+                      <a:round/>
+                      <a:headEnd type="none" w="med" len="med"/>
+                      <a:tailEnd type="none" w="med" len="med"/>
+                    </a:lnL>
+                    <a:lnR w="12700" cap="flat" cmpd="sng" algn="ctr">
+                      <a:solidFill>
+                        <a:srgbClr val="D9E0EA"/>
+                      </a:solidFill>
+                      <a:prstDash val="solid"/>
+                      <a:round/>
+                      <a:headEnd type="none" w="med" len="med"/>
+                      <a:tailEnd type="none" w="med" len="med"/>
+                    </a:lnR>
+                    <a:lnT w="12700" cap="flat" cmpd="sng" algn="ctr">
+                      <a:solidFill>
+                        <a:srgbClr val="D9E0EA"/>
+                      </a:solidFill>
+                      <a:prstDash val="solid"/>
+                      <a:round/>
+                      <a:headEnd type="none" w="med" len="med"/>
+                      <a:tailEnd type="none" w="med" len="med"/>
+                    </a:lnT>
+                    <a:lnB w="12700" cap="flat" cmpd="sng" algn="ctr">
+                      <a:solidFill>
+                        <a:srgbClr val="D9E0EA"/>
+                      </a:solidFill>
+                      <a:prstDash val="solid"/>
+                      <a:round/>
+                      <a:headEnd type="none" w="med" len="med"/>
+                      <a:tailEnd type="none" w="med" len="med"/>
+                    </a:lnB>
+                    <a:solidFill>
+                      <a:srgbClr val="0F1E33"/>
+                    </a:solidFill>
+                  </a:tcPr>
+                </a:tc>
+                <a:tc>
+                  <a:txBody>
+                    <a:bodyPr/>
+                    <a:lstStyle/>
+                    <a:p>
+                      <a:pPr algn="ctr" indent="0" marL="0">
+                        <a:buNone/>
+                      </a:pPr>
+                      <a:r>
+                        <a:rPr lang="en-US" sz="1100" b="1" dirty="0">
+                          <a:solidFill>
+                            <a:srgbClr val="FFFFFF"/>
+                          </a:solidFill>
+                          <a:latin typeface="Calibri" pitchFamily="34" charset="0"/>
+                          <a:ea typeface="Calibri" pitchFamily="34" charset="-122"/>
+                          <a:cs typeface="Calibri" pitchFamily="34" charset="-120"/>
+                        </a:rPr>
+                        <a:t>Всего на WB</a:t>
+                      </a:r>
+                      <a:endParaRPr lang="en-US" sz="1100" dirty="0">
+                        <a:latin typeface="Calibri" charset="0"/>
+                        <a:ea typeface="Calibri" charset="0"/>
+                        <a:cs typeface="Calibri" charset="0"/>
+                      </a:endParaRPr>
+                    </a:p>
+                  </a:txBody>
+                  <a:tcPr marL="91440" marR="91440" marT="45720" marB="45720" anchor="ctr">
+                    <a:lnL w="12700" cap="flat" cmpd="sng" algn="ctr">
+                      <a:solidFill>
+                        <a:srgbClr val="D9E0EA"/>
+                      </a:solidFill>
+                      <a:prstDash val="solid"/>
+                      <a:round/>
+                      <a:headEnd type="none" w="med" len="med"/>
+                      <a:tailEnd type="none" w="med" len="med"/>
+                    </a:lnL>
+                    <a:lnR w="12700" cap="flat" cmpd="sng" algn="ctr">
+                      <a:solidFill>
+                        <a:srgbClr val="D9E0EA"/>
+                      </a:solidFill>
+                      <a:prstDash val="solid"/>
+                      <a:round/>
+                      <a:headEnd type="none" w="med" len="med"/>
+                      <a:tailEnd type="none" w="med" len="med"/>
+                    </a:lnR>
+                    <a:lnT w="12700" cap="flat" cmpd="sng" algn="ctr">
+                      <a:solidFill>
+                        <a:srgbClr val="D9E0EA"/>
+                      </a:solidFill>
+                      <a:prstDash val="solid"/>
+                      <a:round/>
+                      <a:headEnd type="none" w="med" len="med"/>
+                      <a:tailEnd type="none" w="med" len="med"/>
+                    </a:lnT>
+                    <a:lnB w="12700" cap="flat" cmpd="sng" algn="ctr">
+                      <a:solidFill>
+                        <a:srgbClr val="D9E0EA"/>
+                      </a:solidFill>
+                      <a:prstDash val="solid"/>
+                      <a:round/>
+                      <a:headEnd type="none" w="med" len="med"/>
+                      <a:tailEnd type="none" w="med" len="med"/>
+                    </a:lnB>
+                    <a:solidFill>
+                      <a:srgbClr val="0F1E33"/>
+                    </a:solidFill>
+                  </a:tcPr>
+                </a:tc>
+                <a:tc>
+                  <a:txBody>
+                    <a:bodyPr/>
+                    <a:lstStyle/>
+                    <a:p>
+                      <a:pPr algn="ctr" indent="0" marL="0">
+                        <a:buNone/>
+                      </a:pPr>
+                      <a:r>
+                        <a:rPr lang="en-US" sz="1100" b="1" dirty="0">
+                          <a:solidFill>
+                            <a:srgbClr val="FFFFFF"/>
+                          </a:solidFill>
+                          <a:latin typeface="Calibri" pitchFamily="34" charset="0"/>
+                          <a:ea typeface="Calibri" pitchFamily="34" charset="-122"/>
+                          <a:cs typeface="Calibri" pitchFamily="34" charset="-120"/>
+                        </a:rPr>
+                        <a:t>Тула</a:t>
+                      </a:r>
+                      <a:endParaRPr lang="en-US" sz="1100" dirty="0">
+                        <a:latin typeface="Calibri" charset="0"/>
+                        <a:ea typeface="Calibri" charset="0"/>
+                        <a:cs typeface="Calibri" charset="0"/>
+                      </a:endParaRPr>
+                    </a:p>
+                  </a:txBody>
+                  <a:tcPr marL="91440" marR="91440" marT="45720" marB="45720" anchor="ctr">
+                    <a:lnL w="12700" cap="flat" cmpd="sng" algn="ctr">
+                      <a:solidFill>
+                        <a:srgbClr val="D9E0EA"/>
+                      </a:solidFill>
+                      <a:prstDash val="solid"/>
+                      <a:round/>
+                      <a:headEnd type="none" w="med" len="med"/>
+                      <a:tailEnd type="none" w="med" len="med"/>
+                    </a:lnL>
+                    <a:lnR w="12700" cap="flat" cmpd="sng" algn="ctr">
+                      <a:solidFill>
+                        <a:srgbClr val="D9E0EA"/>
+                      </a:solidFill>
+                      <a:prstDash val="solid"/>
+                      <a:round/>
+                      <a:headEnd type="none" w="med" len="med"/>
+                      <a:tailEnd type="none" w="med" len="med"/>
+                    </a:lnR>
+                    <a:lnT w="12700" cap="flat" cmpd="sng" algn="ctr">
+                      <a:solidFill>
+                        <a:srgbClr val="D9E0EA"/>
+                      </a:solidFill>
+                      <a:prstDash val="solid"/>
+                      <a:round/>
+                      <a:headEnd type="none" w="med" len="med"/>
+                      <a:tailEnd type="none" w="med" len="med"/>
+                    </a:lnT>
+                    <a:lnB w="12700" cap="flat" cmpd="sng" algn="ctr">
+                      <a:solidFill>
+                        <a:srgbClr val="D9E0EA"/>
+                      </a:solidFill>
+                      <a:prstDash val="solid"/>
+                      <a:round/>
+                      <a:headEnd type="none" w="med" len="med"/>
+                      <a:tailEnd type="none" w="med" len="med"/>
+                    </a:lnB>
+                    <a:solidFill>
+                      <a:srgbClr val="0F1E33"/>
+                    </a:solidFill>
+                  </a:tcPr>
+                </a:tc>
+                <a:tc>
+                  <a:txBody>
+                    <a:bodyPr/>
+                    <a:lstStyle/>
+                    <a:p>
+                      <a:pPr algn="ctr" indent="0" marL="0">
+                        <a:buNone/>
+                      </a:pPr>
+                      <a:r>
+                        <a:rPr lang="en-US" sz="1100" b="1" dirty="0">
+                          <a:solidFill>
+                            <a:srgbClr val="FFFFFF"/>
+                          </a:solidFill>
+                          <a:latin typeface="Calibri" pitchFamily="34" charset="0"/>
+                          <a:ea typeface="Calibri" pitchFamily="34" charset="-122"/>
+                          <a:cs typeface="Calibri" pitchFamily="34" charset="-120"/>
+                        </a:rPr>
+                        <a:t>Коледино</a:t>
+                      </a:r>
+                      <a:endParaRPr lang="en-US" sz="1100" dirty="0">
+                        <a:latin typeface="Calibri" charset="0"/>
+                        <a:ea typeface="Calibri" charset="0"/>
+                        <a:cs typeface="Calibri" charset="0"/>
+                      </a:endParaRPr>
+                    </a:p>
+                  </a:txBody>
+                  <a:tcPr marL="91440" marR="91440" marT="45720" marB="45720" anchor="ctr">
+                    <a:lnL w="12700" cap="flat" cmpd="sng" algn="ctr">
+                      <a:solidFill>
+                        <a:srgbClr val="D9E0EA"/>
+                      </a:solidFill>
+                      <a:prstDash val="solid"/>
+                      <a:round/>
+                      <a:headEnd type="none" w="med" len="med"/>
+                      <a:tailEnd type="none" w="med" len="med"/>
+                    </a:lnL>
+                    <a:lnR w="12700" cap="flat" cmpd="sng" algn="ctr">
+                      <a:solidFill>
+                        <a:srgbClr val="D9E0EA"/>
+                      </a:solidFill>
+                      <a:prstDash val="solid"/>
+                      <a:round/>
+                      <a:headEnd type="none" w="med" len="med"/>
+                      <a:tailEnd type="none" w="med" len="med"/>
+                    </a:lnR>
+                    <a:lnT w="12700" cap="flat" cmpd="sng" algn="ctr">
+                      <a:solidFill>
+                        <a:srgbClr val="D9E0EA"/>
+                      </a:solidFill>
+                      <a:prstDash val="solid"/>
+                      <a:round/>
+                      <a:headEnd type="none" w="med" len="med"/>
+                      <a:tailEnd type="none" w="med" len="med"/>
+                    </a:lnT>
+                    <a:lnB w="12700" cap="flat" cmpd="sng" algn="ctr">
+                      <a:solidFill>
+                        <a:srgbClr val="D9E0EA"/>
+                      </a:solidFill>
+                      <a:prstDash val="solid"/>
+                      <a:round/>
+                      <a:headEnd type="none" w="med" len="med"/>
+                      <a:tailEnd type="none" w="med" len="med"/>
+                    </a:lnB>
+                    <a:solidFill>
+                      <a:srgbClr val="0F1E33"/>
+                    </a:solidFill>
+                  </a:tcPr>
+                </a:tc>
+                <a:tc>
+                  <a:txBody>
+                    <a:bodyPr/>
+                    <a:lstStyle/>
+                    <a:p>
+                      <a:pPr algn="ctr" indent="0" marL="0">
+                        <a:buNone/>
+                      </a:pPr>
+                      <a:r>
+                        <a:rPr lang="en-US" sz="1100" b="1" dirty="0">
+                          <a:solidFill>
+                            <a:srgbClr val="FFFFFF"/>
+                          </a:solidFill>
+                          <a:latin typeface="Calibri" pitchFamily="34" charset="0"/>
+                          <a:ea typeface="Calibri" pitchFamily="34" charset="-122"/>
+                          <a:cs typeface="Calibri" pitchFamily="34" charset="-120"/>
+                        </a:rPr>
+                        <a:t>Екат-бург</a:t>
+                      </a:r>
+                      <a:endParaRPr lang="en-US" sz="1100" dirty="0">
+                        <a:latin typeface="Calibri" charset="0"/>
+                        <a:ea typeface="Calibri" charset="0"/>
+                        <a:cs typeface="Calibri" charset="0"/>
+                      </a:endParaRPr>
+                    </a:p>
+                  </a:txBody>
+                  <a:tcPr marL="91440" marR="91440" marT="45720" marB="45720" anchor="ctr">
+                    <a:lnL w="12700" cap="flat" cmpd="sng" algn="ctr">
+                      <a:solidFill>
+                        <a:srgbClr val="D9E0EA"/>
+                      </a:solidFill>
+                      <a:prstDash val="solid"/>
+                      <a:round/>
+                      <a:headEnd type="none" w="med" len="med"/>
+                      <a:tailEnd type="none" w="med" len="med"/>
+                    </a:lnL>
+                    <a:lnR w="12700" cap="flat" cmpd="sng" algn="ctr">
+                      <a:solidFill>
+                        <a:srgbClr val="D9E0EA"/>
+                      </a:solidFill>
+                      <a:prstDash val="solid"/>
+                      <a:round/>
+                      <a:headEnd type="none" w="med" len="med"/>
+                      <a:tailEnd type="none" w="med" len="med"/>
+                    </a:lnR>
+                    <a:lnT w="12700" cap="flat" cmpd="sng" algn="ctr">
+                      <a:solidFill>
+                        <a:srgbClr val="D9E0EA"/>
+                      </a:solidFill>
+                      <a:prstDash val="solid"/>
+                      <a:round/>
+                      <a:headEnd type="none" w="med" len="med"/>
+                      <a:tailEnd type="none" w="med" len="med"/>
+                    </a:lnT>
+                    <a:lnB w="12700" cap="flat" cmpd="sng" algn="ctr">
+                      <a:solidFill>
+                        <a:srgbClr val="D9E0EA"/>
+                      </a:solidFill>
+                      <a:prstDash val="solid"/>
+                      <a:round/>
+                      <a:headEnd type="none" w="med" len="med"/>
+                      <a:tailEnd type="none" w="med" len="med"/>
+                    </a:lnB>
+                    <a:solidFill>
+                      <a:srgbClr val="0F1E33"/>
+                    </a:solidFill>
+                  </a:tcPr>
+                </a:tc>
+                <a:tc>
+                  <a:txBody>
+                    <a:bodyPr/>
+                    <a:lstStyle/>
+                    <a:p>
+                      <a:pPr algn="ctr" indent="0" marL="0">
+                        <a:buNone/>
+                      </a:pPr>
+                      <a:r>
+                        <a:rPr lang="en-US" sz="1100" b="1" dirty="0">
+                          <a:solidFill>
+                            <a:srgbClr val="FFFFFF"/>
+                          </a:solidFill>
+                          <a:latin typeface="Calibri" pitchFamily="34" charset="0"/>
+                          <a:ea typeface="Calibri" pitchFamily="34" charset="-122"/>
+                          <a:cs typeface="Calibri" pitchFamily="34" charset="-120"/>
+                        </a:rPr>
+                        <a:t>Эл-сталь</a:t>
+                      </a:r>
+                      <a:endParaRPr lang="en-US" sz="1100" dirty="0">
+                        <a:latin typeface="Calibri" charset="0"/>
+                        <a:ea typeface="Calibri" charset="0"/>
+                        <a:cs typeface="Calibri" charset="0"/>
+                      </a:endParaRPr>
+                    </a:p>
+                  </a:txBody>
+                  <a:tcPr marL="91440" marR="91440" marT="45720" marB="45720" anchor="ctr">
+                    <a:lnL w="12700" cap="flat" cmpd="sng" algn="ctr">
+                      <a:solidFill>
+                        <a:srgbClr val="D9E0EA"/>
+                      </a:solidFill>
+                      <a:prstDash val="solid"/>
+                      <a:round/>
+                      <a:headEnd type="none" w="med" len="med"/>
+                      <a:tailEnd type="none" w="med" len="med"/>
+                    </a:lnL>
+                    <a:lnR w="12700" cap="flat" cmpd="sng" algn="ctr">
+                      <a:solidFill>
+                        <a:srgbClr val="D9E0EA"/>
+                      </a:solidFill>
+                      <a:prstDash val="solid"/>
+                      <a:round/>
+                      <a:headEnd type="none" w="med" len="med"/>
+                      <a:tailEnd type="none" w="med" len="med"/>
+                    </a:lnR>
+                    <a:lnT w="12700" cap="flat" cmpd="sng" algn="ctr">
+                      <a:solidFill>
+                        <a:srgbClr val="D9E0EA"/>
+                      </a:solidFill>
+                      <a:prstDash val="solid"/>
+                      <a:round/>
+                      <a:headEnd type="none" w="med" len="med"/>
+                      <a:tailEnd type="none" w="med" len="med"/>
+                    </a:lnT>
+                    <a:lnB w="12700" cap="flat" cmpd="sng" algn="ctr">
+                      <a:solidFill>
+                        <a:srgbClr val="D9E0EA"/>
+                      </a:solidFill>
+                      <a:prstDash val="solid"/>
+                      <a:round/>
+                      <a:headEnd type="none" w="med" len="med"/>
+                      <a:tailEnd type="none" w="med" len="med"/>
+                    </a:lnB>
+                    <a:solidFill>
+                      <a:srgbClr val="0F1E33"/>
+                    </a:solidFill>
+                  </a:tcPr>
+                </a:tc>
+                <a:tc>
+                  <a:txBody>
+                    <a:bodyPr/>
+                    <a:lstStyle/>
+                    <a:p>
+                      <a:pPr algn="ctr" indent="0" marL="0">
+                        <a:buNone/>
+                      </a:pPr>
+                      <a:r>
+                        <a:rPr lang="en-US" sz="1100" b="1" dirty="0">
+                          <a:solidFill>
+                            <a:srgbClr val="FFFFFF"/>
+                          </a:solidFill>
+                          <a:latin typeface="Calibri" pitchFamily="34" charset="0"/>
+                          <a:ea typeface="Calibri" pitchFamily="34" charset="-122"/>
+                          <a:cs typeface="Calibri" pitchFamily="34" charset="-120"/>
+                        </a:rPr>
+                        <a:t>Краснодар</a:t>
+                      </a:r>
+                      <a:endParaRPr lang="en-US" sz="1100" dirty="0">
+                        <a:latin typeface="Calibri" charset="0"/>
+                        <a:ea typeface="Calibri" charset="0"/>
+                        <a:cs typeface="Calibri" charset="0"/>
+                      </a:endParaRPr>
+                    </a:p>
+                  </a:txBody>
+                  <a:tcPr marL="91440" marR="91440" marT="45720" marB="45720" anchor="ctr">
+                    <a:lnL w="12700" cap="flat" cmpd="sng" algn="ctr">
+                      <a:solidFill>
+                        <a:srgbClr val="D9E0EA"/>
+                      </a:solidFill>
+                      <a:prstDash val="solid"/>
+                      <a:round/>
+                      <a:headEnd type="none" w="med" len="med"/>
+                      <a:tailEnd type="none" w="med" len="med"/>
+                    </a:lnL>
+                    <a:lnR w="12700" cap="flat" cmpd="sng" algn="ctr">
+                      <a:solidFill>
+                        <a:srgbClr val="D9E0EA"/>
+                      </a:solidFill>
+                      <a:prstDash val="solid"/>
+                      <a:round/>
+                      <a:headEnd type="none" w="med" len="med"/>
+                      <a:tailEnd type="none" w="med" len="med"/>
+                    </a:lnR>
+                    <a:lnT w="12700" cap="flat" cmpd="sng" algn="ctr">
+                      <a:solidFill>
+                        <a:srgbClr val="D9E0EA"/>
+                      </a:solidFill>
+                      <a:prstDash val="solid"/>
+                      <a:round/>
+                      <a:headEnd type="none" w="med" len="med"/>
+                      <a:tailEnd type="none" w="med" len="med"/>
+                    </a:lnT>
+                    <a:lnB w="12700" cap="flat" cmpd="sng" algn="ctr">
+                      <a:solidFill>
+                        <a:srgbClr val="D9E0EA"/>
+                      </a:solidFill>
+                      <a:prstDash val="solid"/>
+                      <a:round/>
+                      <a:headEnd type="none" w="med" len="med"/>
+                      <a:tailEnd type="none" w="med" len="med"/>
+                    </a:lnB>
+                    <a:solidFill>
+                      <a:srgbClr val="0F1E33"/>
+                    </a:solidFill>
+                  </a:tcPr>
+                </a:tc>
+                <a:tc>
+                  <a:txBody>
+                    <a:bodyPr/>
+                    <a:lstStyle/>
+                    <a:p>
+                      <a:pPr algn="ctr" indent="0" marL="0">
+                        <a:buNone/>
+                      </a:pPr>
+                      <a:r>
+                        <a:rPr lang="en-US" sz="1100" b="1" dirty="0">
+                          <a:solidFill>
+                            <a:srgbClr val="FFFFFF"/>
+                          </a:solidFill>
+                          <a:latin typeface="Calibri" pitchFamily="34" charset="0"/>
+                          <a:ea typeface="Calibri" pitchFamily="34" charset="-122"/>
+                          <a:cs typeface="Calibri" pitchFamily="34" charset="-120"/>
+                        </a:rPr>
+                        <a:t>Самара</a:t>
+                      </a:r>
+                      <a:endParaRPr lang="en-US" sz="1100" dirty="0">
+                        <a:latin typeface="Calibri" charset="0"/>
+                        <a:ea typeface="Calibri" charset="0"/>
+                        <a:cs typeface="Calibri" charset="0"/>
+                      </a:endParaRPr>
+                    </a:p>
+                  </a:txBody>
+                  <a:tcPr marL="91440" marR="91440" marT="45720" marB="45720" anchor="ctr">
+                    <a:lnL w="12700" cap="flat" cmpd="sng" algn="ctr">
+                      <a:solidFill>
+                        <a:srgbClr val="D9E0EA"/>
+                      </a:solidFill>
+                      <a:prstDash val="solid"/>
+                      <a:round/>
+                      <a:headEnd type="none" w="med" len="med"/>
+                      <a:tailEnd type="none" w="med" len="med"/>
+                    </a:lnL>
+                    <a:lnR w="12700" cap="flat" cmpd="sng" algn="ctr">
+                      <a:solidFill>
+                        <a:srgbClr val="D9E0EA"/>
+                      </a:solidFill>
+                      <a:prstDash val="solid"/>
+                      <a:round/>
+                      <a:headEnd type="none" w="med" len="med"/>
+                      <a:tailEnd type="none" w="med" len="med"/>
+                    </a:lnR>
+                    <a:lnT w="12700" cap="flat" cmpd="sng" algn="ctr">
+                      <a:solidFill>
+                        <a:srgbClr val="D9E0EA"/>
+                      </a:solidFill>
+                      <a:prstDash val="solid"/>
+                      <a:round/>
+                      <a:headEnd type="none" w="med" len="med"/>
+                      <a:tailEnd type="none" w="med" len="med"/>
+                    </a:lnT>
+                    <a:lnB w="12700" cap="flat" cmpd="sng" algn="ctr">
+                      <a:solidFill>
+                        <a:srgbClr val="D9E0EA"/>
+                      </a:solidFill>
+                      <a:prstDash val="solid"/>
+                      <a:round/>
+                      <a:headEnd type="none" w="med" len="med"/>
+                      <a:tailEnd type="none" w="med" len="med"/>
+                    </a:lnB>
+                    <a:solidFill>
+                      <a:srgbClr val="0F1E33"/>
+                    </a:solidFill>
+                  </a:tcPr>
+                </a:tc>
+                <a:tc>
+                  <a:txBody>
+                    <a:bodyPr/>
+                    <a:lstStyle/>
+                    <a:p>
+                      <a:pPr algn="ctr" indent="0" marL="0">
+                        <a:buNone/>
+                      </a:pPr>
+                      <a:r>
+                        <a:rPr lang="en-US" sz="1100" b="1" dirty="0">
+                          <a:solidFill>
+                            <a:srgbClr val="FFFFFF"/>
+                          </a:solidFill>
+                          <a:latin typeface="Calibri" pitchFamily="34" charset="0"/>
+                          <a:ea typeface="Calibri" pitchFamily="34" charset="-122"/>
+                          <a:cs typeface="Calibri" pitchFamily="34" charset="-120"/>
+                        </a:rPr>
+                        <a:t>Прочие</a:t>
+                      </a:r>
+                      <a:endParaRPr lang="en-US" sz="1100" dirty="0">
+                        <a:latin typeface="Calibri" charset="0"/>
+                        <a:ea typeface="Calibri" charset="0"/>
+                        <a:cs typeface="Calibri" charset="0"/>
+                      </a:endParaRPr>
+                    </a:p>
+                  </a:txBody>
+                  <a:tcPr marL="91440" marR="91440" marT="45720" marB="45720" anchor="ctr">
+                    <a:lnL w="12700" cap="flat" cmpd="sng" algn="ctr">
+                      <a:solidFill>
+                        <a:srgbClr val="D9E0EA"/>
+                      </a:solidFill>
+                      <a:prstDash val="solid"/>
+                      <a:round/>
+                      <a:headEnd type="none" w="med" len="med"/>
+                      <a:tailEnd type="none" w="med" len="med"/>
+                    </a:lnL>
+                    <a:lnR w="12700" cap="flat" cmpd="sng" algn="ctr">
+                      <a:solidFill>
+                        <a:srgbClr val="D9E0EA"/>
+                      </a:solidFill>
+                      <a:prstDash val="solid"/>
+                      <a:round/>
+                      <a:headEnd type="none" w="med" len="med"/>
+                      <a:tailEnd type="none" w="med" len="med"/>
+                    </a:lnR>
+                    <a:lnT w="12700" cap="flat" cmpd="sng" algn="ctr">
+                      <a:solidFill>
+                        <a:srgbClr val="D9E0EA"/>
+                      </a:solidFill>
+                      <a:prstDash val="solid"/>
+                      <a:round/>
+                      <a:headEnd type="none" w="med" len="med"/>
+                      <a:tailEnd type="none" w="med" len="med"/>
+                    </a:lnT>
+                    <a:lnB w="12700" cap="flat" cmpd="sng" algn="ctr">
+                      <a:solidFill>
+                        <a:srgbClr val="D9E0EA"/>
+                      </a:solidFill>
+                      <a:prstDash val="solid"/>
+                      <a:round/>
+                      <a:headEnd type="none" w="med" len="med"/>
+                      <a:tailEnd type="none" w="med" len="med"/>
+                    </a:lnB>
+                    <a:solidFill>
+                      <a:srgbClr val="0F1E33"/>
+                    </a:solidFill>
+                  </a:tcPr>
+                </a:tc>
+              </a:tr>
+              <a:tr h="548640">
+                <a:tc>
+                  <a:txBody>
+                    <a:bodyPr/>
+                    <a:lstStyle/>
+                    <a:p>
+                      <a:pPr algn="l" indent="0" marL="0">
+                        <a:buNone/>
+                      </a:pPr>
+                      <a:r>
+                        <a:rPr lang="en-US" sz="1150" dirty="0">
+                          <a:solidFill>
+                            <a:srgbClr val="16243B"/>
+                          </a:solidFill>
+                          <a:latin typeface="Calibri" pitchFamily="34" charset="0"/>
+                          <a:ea typeface="Calibri" pitchFamily="34" charset="-122"/>
+                          <a:cs typeface="Calibri" pitchFamily="34" charset="-120"/>
+                        </a:rPr>
+                        <a:t>Куртки</a:t>
+                      </a:r>
+                      <a:endParaRPr lang="en-US" sz="1150" dirty="0">
+                        <a:latin typeface="Calibri" charset="0"/>
+                        <a:ea typeface="Calibri" charset="0"/>
+                        <a:cs typeface="Calibri" charset="0"/>
+                      </a:endParaRPr>
+                    </a:p>
+                  </a:txBody>
+                  <a:tcPr marL="91440" marR="91440" marT="45720" marB="45720" anchor="ctr">
+                    <a:lnL w="12700" cap="flat" cmpd="sng" algn="ctr">
+                      <a:solidFill>
+                        <a:srgbClr val="D9E0EA"/>
+                      </a:solidFill>
+                      <a:prstDash val="solid"/>
+                      <a:round/>
+                      <a:headEnd type="none" w="med" len="med"/>
+                      <a:tailEnd type="none" w="med" len="med"/>
+                    </a:lnL>
+                    <a:lnR w="12700" cap="flat" cmpd="sng" algn="ctr">
+                      <a:solidFill>
+                        <a:srgbClr val="D9E0EA"/>
+                      </a:solidFill>
+                      <a:prstDash val="solid"/>
+                      <a:round/>
+                      <a:headEnd type="none" w="med" len="med"/>
+                      <a:tailEnd type="none" w="med" len="med"/>
+                    </a:lnR>
+                    <a:lnT w="12700" cap="flat" cmpd="sng" algn="ctr">
+                      <a:solidFill>
+                        <a:srgbClr val="D9E0EA"/>
+                      </a:solidFill>
+                      <a:prstDash val="solid"/>
+                      <a:round/>
+                      <a:headEnd type="none" w="med" len="med"/>
+                      <a:tailEnd type="none" w="med" len="med"/>
+                    </a:lnT>
+                    <a:lnB w="12700" cap="flat" cmpd="sng" algn="ctr">
+                      <a:solidFill>
+                        <a:srgbClr val="D9E0EA"/>
+                      </a:solidFill>
+                      <a:prstDash val="solid"/>
+                      <a:round/>
+                      <a:headEnd type="none" w="med" len="med"/>
+                      <a:tailEnd type="none" w="med" len="med"/>
+                    </a:lnB>
+                  </a:tcPr>
+                </a:tc>
+                <a:tc>
+                  <a:txBody>
+                    <a:bodyPr/>
+                    <a:lstStyle/>
+                    <a:p>
+                      <a:pPr algn="ctr" indent="0" marL="0">
+                        <a:buNone/>
+                      </a:pPr>
+                      <a:r>
+                        <a:rPr lang="en-US" sz="1150" b="1" dirty="0">
+                          <a:solidFill>
+                            <a:srgbClr val="16243B"/>
+                          </a:solidFill>
+                          <a:latin typeface="Calibri" pitchFamily="34" charset="0"/>
+                          <a:ea typeface="Calibri" pitchFamily="34" charset="-122"/>
+                          <a:cs typeface="Calibri" pitchFamily="34" charset="-120"/>
+                        </a:rPr>
+                        <a:t>11 404</a:t>
+                      </a:r>
+                      <a:endParaRPr lang="en-US" sz="1150" dirty="0">
+                        <a:latin typeface="Calibri" charset="0"/>
+                        <a:ea typeface="Calibri" charset="0"/>
+                        <a:cs typeface="Calibri" charset="0"/>
+                      </a:endParaRPr>
+                    </a:p>
+                  </a:txBody>
+                  <a:tcPr marL="91440" marR="91440" marT="45720" marB="45720" anchor="ctr">
+                    <a:lnL w="12700" cap="flat" cmpd="sng" algn="ctr">
+                      <a:solidFill>
+                        <a:srgbClr val="D9E0EA"/>
+                      </a:solidFill>
+                      <a:prstDash val="solid"/>
+                      <a:round/>
+                      <a:headEnd type="none" w="med" len="med"/>
+                      <a:tailEnd type="none" w="med" len="med"/>
+                    </a:lnL>
+                    <a:lnR w="12700" cap="flat" cmpd="sng" algn="ctr">
+                      <a:solidFill>
+                        <a:srgbClr val="D9E0EA"/>
+                      </a:solidFill>
+                      <a:prstDash val="solid"/>
+                      <a:round/>
+                      <a:headEnd type="none" w="med" len="med"/>
+                      <a:tailEnd type="none" w="med" len="med"/>
+                    </a:lnR>
+                    <a:lnT w="12700" cap="flat" cmpd="sng" algn="ctr">
+                      <a:solidFill>
+                        <a:srgbClr val="D9E0EA"/>
+                      </a:solidFill>
+                      <a:prstDash val="solid"/>
+                      <a:round/>
+                      <a:headEnd type="none" w="med" len="med"/>
+                      <a:tailEnd type="none" w="med" len="med"/>
+                    </a:lnT>
+                    <a:lnB w="12700" cap="flat" cmpd="sng" algn="ctr">
+                      <a:solidFill>
+                        <a:srgbClr val="D9E0EA"/>
+                      </a:solidFill>
+                      <a:prstDash val="solid"/>
+                      <a:round/>
+                      <a:headEnd type="none" w="med" len="med"/>
+                      <a:tailEnd type="none" w="med" len="med"/>
+                    </a:lnB>
+                  </a:tcPr>
+                </a:tc>
+                <a:tc>
+                  <a:txBody>
+                    <a:bodyPr/>
+                    <a:lstStyle/>
+                    <a:p>
+                      <a:pPr algn="ctr" indent="0" marL="0">
+                        <a:buNone/>
+                      </a:pPr>
+                      <a:r>
+                        <a:rPr lang="en-US" sz="1150" dirty="0">
+                          <a:solidFill>
+                            <a:srgbClr val="16243B"/>
+                          </a:solidFill>
+                          <a:latin typeface="Calibri" pitchFamily="34" charset="0"/>
+                          <a:ea typeface="Calibri" pitchFamily="34" charset="-122"/>
+                          <a:cs typeface="Calibri" pitchFamily="34" charset="-120"/>
+                        </a:rPr>
+                        <a:t>2 014</a:t>
+                      </a:r>
+                      <a:endParaRPr lang="en-US" sz="1150" dirty="0">
+                        <a:latin typeface="Calibri" charset="0"/>
+                        <a:ea typeface="Calibri" charset="0"/>
+                        <a:cs typeface="Calibri" charset="0"/>
+                      </a:endParaRPr>
+                    </a:p>
+                  </a:txBody>
+                  <a:tcPr marL="91440" marR="91440" marT="45720" marB="45720" anchor="ctr">
+                    <a:lnL w="12700" cap="flat" cmpd="sng" algn="ctr">
+                      <a:solidFill>
+                        <a:srgbClr val="D9E0EA"/>
+                      </a:solidFill>
+                      <a:prstDash val="solid"/>
+                      <a:round/>
+                      <a:headEnd type="none" w="med" len="med"/>
+                      <a:tailEnd type="none" w="med" len="med"/>
+                    </a:lnL>
+                    <a:lnR w="12700" cap="flat" cmpd="sng" algn="ctr">
+                      <a:solidFill>
+                        <a:srgbClr val="D9E0EA"/>
+                      </a:solidFill>
+                      <a:prstDash val="solid"/>
+                      <a:round/>
+                      <a:headEnd type="none" w="med" len="med"/>
+                      <a:tailEnd type="none" w="med" len="med"/>
+                    </a:lnR>
+                    <a:lnT w="12700" cap="flat" cmpd="sng" algn="ctr">
+                      <a:solidFill>
+                        <a:srgbClr val="D9E0EA"/>
+                      </a:solidFill>
+                      <a:prstDash val="solid"/>
+                      <a:round/>
+                      <a:headEnd type="none" w="med" len="med"/>
+                      <a:tailEnd type="none" w="med" len="med"/>
+                    </a:lnT>
+                    <a:lnB w="12700" cap="flat" cmpd="sng" algn="ctr">
+                      <a:solidFill>
+                        <a:srgbClr val="D9E0EA"/>
+                      </a:solidFill>
+                      <a:prstDash val="solid"/>
+                      <a:round/>
+                      <a:headEnd type="none" w="med" len="med"/>
+                      <a:tailEnd type="none" w="med" len="med"/>
+                    </a:lnB>
+                  </a:tcPr>
+                </a:tc>
+                <a:tc>
+                  <a:txBody>
+                    <a:bodyPr/>
+                    <a:lstStyle/>
+                    <a:p>
+                      <a:pPr algn="ctr" indent="0" marL="0">
+                        <a:buNone/>
+                      </a:pPr>
+                      <a:r>
+                        <a:rPr lang="en-US" sz="1150" dirty="0">
+                          <a:solidFill>
+                            <a:srgbClr val="16243B"/>
+                          </a:solidFill>
+                          <a:latin typeface="Calibri" pitchFamily="34" charset="0"/>
+                          <a:ea typeface="Calibri" pitchFamily="34" charset="-122"/>
+                          <a:cs typeface="Calibri" pitchFamily="34" charset="-120"/>
+                        </a:rPr>
+                        <a:t>2 292</a:t>
+                      </a:r>
+                      <a:endParaRPr lang="en-US" sz="1150" dirty="0">
+                        <a:latin typeface="Calibri" charset="0"/>
+                        <a:ea typeface="Calibri" charset="0"/>
+                        <a:cs typeface="Calibri" charset="0"/>
+                      </a:endParaRPr>
+                    </a:p>
+                  </a:txBody>
+                  <a:tcPr marL="91440" marR="91440" marT="45720" marB="45720" anchor="ctr">
+                    <a:lnL w="12700" cap="flat" cmpd="sng" algn="ctr">
+                      <a:solidFill>
+                        <a:srgbClr val="D9E0EA"/>
+                      </a:solidFill>
+                      <a:prstDash val="solid"/>
+                      <a:round/>
+                      <a:headEnd type="none" w="med" len="med"/>
+                      <a:tailEnd type="none" w="med" len="med"/>
+                    </a:lnL>
+                    <a:lnR w="12700" cap="flat" cmpd="sng" algn="ctr">
+                      <a:solidFill>
+                        <a:srgbClr val="D9E0EA"/>
+                      </a:solidFill>
+                      <a:prstDash val="solid"/>
+                      <a:round/>
+                      <a:headEnd type="none" w="med" len="med"/>
+                      <a:tailEnd type="none" w="med" len="med"/>
+                    </a:lnR>
+                    <a:lnT w="12700" cap="flat" cmpd="sng" algn="ctr">
+                      <a:solidFill>
+                        <a:srgbClr val="D9E0EA"/>
+                      </a:solidFill>
+                      <a:prstDash val="solid"/>
+                      <a:round/>
+                      <a:headEnd type="none" w="med" len="med"/>
+                      <a:tailEnd type="none" w="med" len="med"/>
+                    </a:lnT>
+                    <a:lnB w="12700" cap="flat" cmpd="sng" algn="ctr">
+                      <a:solidFill>
+                        <a:srgbClr val="D9E0EA"/>
+                      </a:solidFill>
+                      <a:prstDash val="solid"/>
+                      <a:round/>
+                      <a:headEnd type="none" w="med" len="med"/>
+                      <a:tailEnd type="none" w="med" len="med"/>
+                    </a:lnB>
+                  </a:tcPr>
+                </a:tc>
+                <a:tc>
+                  <a:txBody>
+                    <a:bodyPr/>
+                    <a:lstStyle/>
+                    <a:p>
+                      <a:pPr algn="ctr" indent="0" marL="0">
+                        <a:buNone/>
+                      </a:pPr>
+                      <a:r>
+                        <a:rPr lang="en-US" sz="1150" dirty="0">
+                          <a:solidFill>
+                            <a:srgbClr val="16243B"/>
+                          </a:solidFill>
+                          <a:latin typeface="Calibri" pitchFamily="34" charset="0"/>
+                          <a:ea typeface="Calibri" pitchFamily="34" charset="-122"/>
+                          <a:cs typeface="Calibri" pitchFamily="34" charset="-120"/>
+                        </a:rPr>
+                        <a:t>1 753</a:t>
+                      </a:r>
+                      <a:endParaRPr lang="en-US" sz="1150" dirty="0">
+                        <a:latin typeface="Calibri" charset="0"/>
+                        <a:ea typeface="Calibri" charset="0"/>
+                        <a:cs typeface="Calibri" charset="0"/>
+                      </a:endParaRPr>
+                    </a:p>
+                  </a:txBody>
+                  <a:tcPr marL="91440" marR="91440" marT="45720" marB="45720" anchor="ctr">
+                    <a:lnL w="12700" cap="flat" cmpd="sng" algn="ctr">
+                      <a:solidFill>
+                        <a:srgbClr val="D9E0EA"/>
+                      </a:solidFill>
+                      <a:prstDash val="solid"/>
+                      <a:round/>
+                      <a:headEnd type="none" w="med" len="med"/>
+                      <a:tailEnd type="none" w="med" len="med"/>
+                    </a:lnL>
+                    <a:lnR w="12700" cap="flat" cmpd="sng" algn="ctr">
+                      <a:solidFill>
+                        <a:srgbClr val="D9E0EA"/>
+                      </a:solidFill>
+                      <a:prstDash val="solid"/>
+                      <a:round/>
+                      <a:headEnd type="none" w="med" len="med"/>
+                      <a:tailEnd type="none" w="med" len="med"/>
+                    </a:lnR>
+                    <a:lnT w="12700" cap="flat" cmpd="sng" algn="ctr">
+                      <a:solidFill>
+                        <a:srgbClr val="D9E0EA"/>
+                      </a:solidFill>
+                      <a:prstDash val="solid"/>
+                      <a:round/>
+                      <a:headEnd type="none" w="med" len="med"/>
+                      <a:tailEnd type="none" w="med" len="med"/>
+                    </a:lnT>
+                    <a:lnB w="12700" cap="flat" cmpd="sng" algn="ctr">
+                      <a:solidFill>
+                        <a:srgbClr val="D9E0EA"/>
+                      </a:solidFill>
+                      <a:prstDash val="solid"/>
+                      <a:round/>
+                      <a:headEnd type="none" w="med" len="med"/>
+                      <a:tailEnd type="none" w="med" len="med"/>
+                    </a:lnB>
+                  </a:tcPr>
+                </a:tc>
+                <a:tc>
+                  <a:txBody>
+                    <a:bodyPr/>
+                    <a:lstStyle/>
+                    <a:p>
+                      <a:pPr algn="ctr" indent="0" marL="0">
+                        <a:buNone/>
+                      </a:pPr>
+                      <a:r>
+                        <a:rPr lang="en-US" sz="1150" dirty="0">
+                          <a:solidFill>
+                            <a:srgbClr val="16243B"/>
+                          </a:solidFill>
+                          <a:latin typeface="Calibri" pitchFamily="34" charset="0"/>
+                          <a:ea typeface="Calibri" pitchFamily="34" charset="-122"/>
+                          <a:cs typeface="Calibri" pitchFamily="34" charset="-120"/>
+                        </a:rPr>
+                        <a:t>1 517</a:t>
+                      </a:r>
+                      <a:endParaRPr lang="en-US" sz="1150" dirty="0">
+                        <a:latin typeface="Calibri" charset="0"/>
+                        <a:ea typeface="Calibri" charset="0"/>
+                        <a:cs typeface="Calibri" charset="0"/>
+                      </a:endParaRPr>
+                    </a:p>
+                  </a:txBody>
+                  <a:tcPr marL="91440" marR="91440" marT="45720" marB="45720" anchor="ctr">
+                    <a:lnL w="12700" cap="flat" cmpd="sng" algn="ctr">
+                      <a:solidFill>
+                        <a:srgbClr val="D9E0EA"/>
+                      </a:solidFill>
+                      <a:prstDash val="solid"/>
+                      <a:round/>
+                      <a:headEnd type="none" w="med" len="med"/>
+                      <a:tailEnd type="none" w="med" len="med"/>
+                    </a:lnL>
+                    <a:lnR w="12700" cap="flat" cmpd="sng" algn="ctr">
+                      <a:solidFill>
+                        <a:srgbClr val="D9E0EA"/>
+                      </a:solidFill>
+                      <a:prstDash val="solid"/>
+                      <a:round/>
+                      <a:headEnd type="none" w="med" len="med"/>
+                      <a:tailEnd type="none" w="med" len="med"/>
+                    </a:lnR>
+                    <a:lnT w="12700" cap="flat" cmpd="sng" algn="ctr">
+                      <a:solidFill>
+                        <a:srgbClr val="D9E0EA"/>
+                      </a:solidFill>
+                      <a:prstDash val="solid"/>
+                      <a:round/>
+                      <a:headEnd type="none" w="med" len="med"/>
+                      <a:tailEnd type="none" w="med" len="med"/>
+                    </a:lnT>
+                    <a:lnB w="12700" cap="flat" cmpd="sng" algn="ctr">
+                      <a:solidFill>
+                        <a:srgbClr val="D9E0EA"/>
+                      </a:solidFill>
+                      <a:prstDash val="solid"/>
+                      <a:round/>
+                      <a:headEnd type="none" w="med" len="med"/>
+                      <a:tailEnd type="none" w="med" len="med"/>
+                    </a:lnB>
+                  </a:tcPr>
+                </a:tc>
+                <a:tc>
+                  <a:txBody>
+                    <a:bodyPr/>
+                    <a:lstStyle/>
+                    <a:p>
+                      <a:pPr algn="ctr" indent="0" marL="0">
+                        <a:buNone/>
+                      </a:pPr>
+                      <a:r>
+                        <a:rPr lang="en-US" sz="1150" dirty="0">
+                          <a:solidFill>
+                            <a:srgbClr val="16243B"/>
+                          </a:solidFill>
+                          <a:latin typeface="Calibri" pitchFamily="34" charset="0"/>
+                          <a:ea typeface="Calibri" pitchFamily="34" charset="-122"/>
+                          <a:cs typeface="Calibri" pitchFamily="34" charset="-120"/>
+                        </a:rPr>
+                        <a:t>846</a:t>
+                      </a:r>
+                      <a:endParaRPr lang="en-US" sz="1150" dirty="0">
+                        <a:latin typeface="Calibri" charset="0"/>
+                        <a:ea typeface="Calibri" charset="0"/>
+                        <a:cs typeface="Calibri" charset="0"/>
+                      </a:endParaRPr>
+                    </a:p>
+                  </a:txBody>
+                  <a:tcPr marL="91440" marR="91440" marT="45720" marB="45720" anchor="ctr">
+                    <a:lnL w="12700" cap="flat" cmpd="sng" algn="ctr">
+                      <a:solidFill>
+                        <a:srgbClr val="D9E0EA"/>
+                      </a:solidFill>
+                      <a:prstDash val="solid"/>
+                      <a:round/>
+                      <a:headEnd type="none" w="med" len="med"/>
+                      <a:tailEnd type="none" w="med" len="med"/>
+                    </a:lnL>
+                    <a:lnR w="12700" cap="flat" cmpd="sng" algn="ctr">
+                      <a:solidFill>
+                        <a:srgbClr val="D9E0EA"/>
+                      </a:solidFill>
+                      <a:prstDash val="solid"/>
+                      <a:round/>
+                      <a:headEnd type="none" w="med" len="med"/>
+                      <a:tailEnd type="none" w="med" len="med"/>
+                    </a:lnR>
+                    <a:lnT w="12700" cap="flat" cmpd="sng" algn="ctr">
+                      <a:solidFill>
+                        <a:srgbClr val="D9E0EA"/>
+                      </a:solidFill>
+                      <a:prstDash val="solid"/>
+                      <a:round/>
+                      <a:headEnd type="none" w="med" len="med"/>
+                      <a:tailEnd type="none" w="med" len="med"/>
+                    </a:lnT>
+                    <a:lnB w="12700" cap="flat" cmpd="sng" algn="ctr">
+                      <a:solidFill>
+                        <a:srgbClr val="D9E0EA"/>
+                      </a:solidFill>
+                      <a:prstDash val="solid"/>
+                      <a:round/>
+                      <a:headEnd type="none" w="med" len="med"/>
+                      <a:tailEnd type="none" w="med" len="med"/>
+                    </a:lnB>
+                  </a:tcPr>
+                </a:tc>
+                <a:tc>
+                  <a:txBody>
+                    <a:bodyPr/>
+                    <a:lstStyle/>
+                    <a:p>
+                      <a:pPr algn="ctr" indent="0" marL="0">
+                        <a:buNone/>
+                      </a:pPr>
+                      <a:r>
+                        <a:rPr lang="en-US" sz="1150" dirty="0">
+                          <a:solidFill>
+                            <a:srgbClr val="16243B"/>
+                          </a:solidFill>
+                          <a:latin typeface="Calibri" pitchFamily="34" charset="0"/>
+                          <a:ea typeface="Calibri" pitchFamily="34" charset="-122"/>
+                          <a:cs typeface="Calibri" pitchFamily="34" charset="-120"/>
+                        </a:rPr>
+                        <a:t>822</a:t>
+                      </a:r>
+                      <a:endParaRPr lang="en-US" sz="1150" dirty="0">
+                        <a:latin typeface="Calibri" charset="0"/>
+                        <a:ea typeface="Calibri" charset="0"/>
+                        <a:cs typeface="Calibri" charset="0"/>
+                      </a:endParaRPr>
+                    </a:p>
+                  </a:txBody>
+                  <a:tcPr marL="91440" marR="91440" marT="45720" marB="45720" anchor="ctr">
+                    <a:lnL w="12700" cap="flat" cmpd="sng" algn="ctr">
+                      <a:solidFill>
+                        <a:srgbClr val="D9E0EA"/>
+                      </a:solidFill>
+                      <a:prstDash val="solid"/>
+                      <a:round/>
+                      <a:headEnd type="none" w="med" len="med"/>
+                      <a:tailEnd type="none" w="med" len="med"/>
+                    </a:lnL>
+                    <a:lnR w="12700" cap="flat" cmpd="sng" algn="ctr">
+                      <a:solidFill>
+                        <a:srgbClr val="D9E0EA"/>
+                      </a:solidFill>
+                      <a:prstDash val="solid"/>
+                      <a:round/>
+                      <a:headEnd type="none" w="med" len="med"/>
+                      <a:tailEnd type="none" w="med" len="med"/>
+                    </a:lnR>
+                    <a:lnT w="12700" cap="flat" cmpd="sng" algn="ctr">
+                      <a:solidFill>
+                        <a:srgbClr val="D9E0EA"/>
+                      </a:solidFill>
+                      <a:prstDash val="solid"/>
+                      <a:round/>
+                      <a:headEnd type="none" w="med" len="med"/>
+                      <a:tailEnd type="none" w="med" len="med"/>
+                    </a:lnT>
+                    <a:lnB w="12700" cap="flat" cmpd="sng" algn="ctr">
+                      <a:solidFill>
+                        <a:srgbClr val="D9E0EA"/>
+                      </a:solidFill>
+                      <a:prstDash val="solid"/>
+                      <a:round/>
+                      <a:headEnd type="none" w="med" len="med"/>
+                      <a:tailEnd type="none" w="med" len="med"/>
+                    </a:lnB>
+                  </a:tcPr>
+                </a:tc>
+                <a:tc>
+                  <a:txBody>
+                    <a:bodyPr/>
+                    <a:lstStyle/>
+                    <a:p>
+                      <a:pPr algn="ctr" indent="0" marL="0">
+                        <a:buNone/>
+                      </a:pPr>
+                      <a:r>
+                        <a:rPr lang="en-US" sz="1150" dirty="0">
+                          <a:solidFill>
+                            <a:srgbClr val="16243B"/>
+                          </a:solidFill>
+                          <a:latin typeface="Calibri" pitchFamily="34" charset="0"/>
+                          <a:ea typeface="Calibri" pitchFamily="34" charset="-122"/>
+                          <a:cs typeface="Calibri" pitchFamily="34" charset="-120"/>
+                        </a:rPr>
+                        <a:t>2 160</a:t>
+                      </a:r>
+                      <a:endParaRPr lang="en-US" sz="1150" dirty="0">
+                        <a:latin typeface="Calibri" charset="0"/>
+                        <a:ea typeface="Calibri" charset="0"/>
+                        <a:cs typeface="Calibri" charset="0"/>
+                      </a:endParaRPr>
+                    </a:p>
+                  </a:txBody>
+                  <a:tcPr marL="91440" marR="91440" marT="45720" marB="45720" anchor="ctr">
+                    <a:lnL w="12700" cap="flat" cmpd="sng" algn="ctr">
+                      <a:solidFill>
+                        <a:srgbClr val="D9E0EA"/>
+                      </a:solidFill>
+                      <a:prstDash val="solid"/>
+                      <a:round/>
+                      <a:headEnd type="none" w="med" len="med"/>
+                      <a:tailEnd type="none" w="med" len="med"/>
+                    </a:lnL>
+                    <a:lnR w="12700" cap="flat" cmpd="sng" algn="ctr">
+                      <a:solidFill>
+                        <a:srgbClr val="D9E0EA"/>
+                      </a:solidFill>
+                      <a:prstDash val="solid"/>
+                      <a:round/>
+                      <a:headEnd type="none" w="med" len="med"/>
+                      <a:tailEnd type="none" w="med" len="med"/>
+                    </a:lnR>
+                    <a:lnT w="12700" cap="flat" cmpd="sng" algn="ctr">
+                      <a:solidFill>
+                        <a:srgbClr val="D9E0EA"/>
+                      </a:solidFill>
+                      <a:prstDash val="solid"/>
+                      <a:round/>
+                      <a:headEnd type="none" w="med" len="med"/>
+                      <a:tailEnd type="none" w="med" len="med"/>
+                    </a:lnT>
+                    <a:lnB w="12700" cap="flat" cmpd="sng" algn="ctr">
+                      <a:solidFill>
+                        <a:srgbClr val="D9E0EA"/>
+                      </a:solidFill>
+                      <a:prstDash val="solid"/>
+                      <a:round/>
+                      <a:headEnd type="none" w="med" len="med"/>
+                      <a:tailEnd type="none" w="med" len="med"/>
+                    </a:lnB>
+                  </a:tcPr>
+                </a:tc>
+              </a:tr>
+              <a:tr h="548640">
+                <a:tc>
+                  <a:txBody>
+                    <a:bodyPr/>
+                    <a:lstStyle/>
+                    <a:p>
+                      <a:pPr algn="l" indent="0" marL="0">
+                        <a:buNone/>
+                      </a:pPr>
+                      <a:r>
+                        <a:rPr lang="en-US" sz="1150" dirty="0">
+                          <a:solidFill>
+                            <a:srgbClr val="16243B"/>
+                          </a:solidFill>
+                          <a:latin typeface="Calibri" pitchFamily="34" charset="0"/>
+                          <a:ea typeface="Calibri" pitchFamily="34" charset="-122"/>
+                          <a:cs typeface="Calibri" pitchFamily="34" charset="-120"/>
+                        </a:rPr>
+                        <a:t>Ветровки</a:t>
+                      </a:r>
+                      <a:endParaRPr lang="en-US" sz="1150" dirty="0">
+                        <a:latin typeface="Calibri" charset="0"/>
+                        <a:ea typeface="Calibri" charset="0"/>
+                        <a:cs typeface="Calibri" charset="0"/>
+                      </a:endParaRPr>
+                    </a:p>
+                  </a:txBody>
+                  <a:tcPr marL="91440" marR="91440" marT="45720" marB="45720" anchor="ctr">
+                    <a:lnL w="12700" cap="flat" cmpd="sng" algn="ctr">
+                      <a:solidFill>
+                        <a:srgbClr val="D9E0EA"/>
+                      </a:solidFill>
+                      <a:prstDash val="solid"/>
+                      <a:round/>
+                      <a:headEnd type="none" w="med" len="med"/>
+                      <a:tailEnd type="none" w="med" len="med"/>
+                    </a:lnL>
+                    <a:lnR w="12700" cap="flat" cmpd="sng" algn="ctr">
+                      <a:solidFill>
+                        <a:srgbClr val="D9E0EA"/>
+                      </a:solidFill>
+                      <a:prstDash val="solid"/>
+                      <a:round/>
+                      <a:headEnd type="none" w="med" len="med"/>
+                      <a:tailEnd type="none" w="med" len="med"/>
+                    </a:lnR>
+                    <a:lnT w="12700" cap="flat" cmpd="sng" algn="ctr">
+                      <a:solidFill>
+                        <a:srgbClr val="D9E0EA"/>
+                      </a:solidFill>
+                      <a:prstDash val="solid"/>
+                      <a:round/>
+                      <a:headEnd type="none" w="med" len="med"/>
+                      <a:tailEnd type="none" w="med" len="med"/>
+                    </a:lnT>
+                    <a:lnB w="12700" cap="flat" cmpd="sng" algn="ctr">
+                      <a:solidFill>
+                        <a:srgbClr val="D9E0EA"/>
+                      </a:solidFill>
+                      <a:prstDash val="solid"/>
+                      <a:round/>
+                      <a:headEnd type="none" w="med" len="med"/>
+                      <a:tailEnd type="none" w="med" len="med"/>
+                    </a:lnB>
+                  </a:tcPr>
+                </a:tc>
+                <a:tc>
+                  <a:txBody>
+                    <a:bodyPr/>
+                    <a:lstStyle/>
+                    <a:p>
+                      <a:pPr algn="ctr" indent="0" marL="0">
+                        <a:buNone/>
+                      </a:pPr>
+                      <a:r>
+                        <a:rPr lang="en-US" sz="1150" b="1" dirty="0">
+                          <a:solidFill>
+                            <a:srgbClr val="16243B"/>
+                          </a:solidFill>
+                          <a:latin typeface="Calibri" pitchFamily="34" charset="0"/>
+                          <a:ea typeface="Calibri" pitchFamily="34" charset="-122"/>
+                          <a:cs typeface="Calibri" pitchFamily="34" charset="-120"/>
+                        </a:rPr>
+                        <a:t>7 805</a:t>
+                      </a:r>
+                      <a:endParaRPr lang="en-US" sz="1150" dirty="0">
+                        <a:latin typeface="Calibri" charset="0"/>
+                        <a:ea typeface="Calibri" charset="0"/>
+                        <a:cs typeface="Calibri" charset="0"/>
+                      </a:endParaRPr>
+                    </a:p>
+                  </a:txBody>
+                  <a:tcPr marL="91440" marR="91440" marT="45720" marB="45720" anchor="ctr">
+                    <a:lnL w="12700" cap="flat" cmpd="sng" algn="ctr">
+                      <a:solidFill>
+                        <a:srgbClr val="D9E0EA"/>
+                      </a:solidFill>
+                      <a:prstDash val="solid"/>
+                      <a:round/>
+                      <a:headEnd type="none" w="med" len="med"/>
+                      <a:tailEnd type="none" w="med" len="med"/>
+                    </a:lnL>
+                    <a:lnR w="12700" cap="flat" cmpd="sng" algn="ctr">
+                      <a:solidFill>
+                        <a:srgbClr val="D9E0EA"/>
+                      </a:solidFill>
+                      <a:prstDash val="solid"/>
+                      <a:round/>
+                      <a:headEnd type="none" w="med" len="med"/>
+                      <a:tailEnd type="none" w="med" len="med"/>
+                    </a:lnR>
+                    <a:lnT w="12700" cap="flat" cmpd="sng" algn="ctr">
+                      <a:solidFill>
+                        <a:srgbClr val="D9E0EA"/>
+                      </a:solidFill>
+                      <a:prstDash val="solid"/>
+                      <a:round/>
+                      <a:headEnd type="none" w="med" len="med"/>
+                      <a:tailEnd type="none" w="med" len="med"/>
+                    </a:lnT>
+                    <a:lnB w="12700" cap="flat" cmpd="sng" algn="ctr">
+                      <a:solidFill>
+                        <a:srgbClr val="D9E0EA"/>
+                      </a:solidFill>
+                      <a:prstDash val="solid"/>
+                      <a:round/>
+                      <a:headEnd type="none" w="med" len="med"/>
+                      <a:tailEnd type="none" w="med" len="med"/>
+                    </a:lnB>
+                  </a:tcPr>
+                </a:tc>
+                <a:tc>
+                  <a:txBody>
+                    <a:bodyPr/>
+                    <a:lstStyle/>
+                    <a:p>
+                      <a:pPr algn="ctr" indent="0" marL="0">
+                        <a:buNone/>
+                      </a:pPr>
+                      <a:r>
+                        <a:rPr lang="en-US" sz="1150" dirty="0">
+                          <a:solidFill>
+                            <a:srgbClr val="16243B"/>
+                          </a:solidFill>
+                          <a:latin typeface="Calibri" pitchFamily="34" charset="0"/>
+                          <a:ea typeface="Calibri" pitchFamily="34" charset="-122"/>
+                          <a:cs typeface="Calibri" pitchFamily="34" charset="-120"/>
+                        </a:rPr>
+                        <a:t>1 834</a:t>
+                      </a:r>
+                      <a:endParaRPr lang="en-US" sz="1150" dirty="0">
+                        <a:latin typeface="Calibri" charset="0"/>
+                        <a:ea typeface="Calibri" charset="0"/>
+                        <a:cs typeface="Calibri" charset="0"/>
+                      </a:endParaRPr>
+                    </a:p>
+                  </a:txBody>
+                  <a:tcPr marL="91440" marR="91440" marT="45720" marB="45720" anchor="ctr">
+                    <a:lnL w="12700" cap="flat" cmpd="sng" algn="ctr">
+                      <a:solidFill>
+                        <a:srgbClr val="D9E0EA"/>
+                      </a:solidFill>
+                      <a:prstDash val="solid"/>
+                      <a:round/>
+                      <a:headEnd type="none" w="med" len="med"/>
+                      <a:tailEnd type="none" w="med" len="med"/>
+                    </a:lnL>
+                    <a:lnR w="12700" cap="flat" cmpd="sng" algn="ctr">
+                      <a:solidFill>
+                        <a:srgbClr val="D9E0EA"/>
+                      </a:solidFill>
+                      <a:prstDash val="solid"/>
+                      <a:round/>
+                      <a:headEnd type="none" w="med" len="med"/>
+                      <a:tailEnd type="none" w="med" len="med"/>
+                    </a:lnR>
+                    <a:lnT w="12700" cap="flat" cmpd="sng" algn="ctr">
+                      <a:solidFill>
+                        <a:srgbClr val="D9E0EA"/>
+                      </a:solidFill>
+                      <a:prstDash val="solid"/>
+                      <a:round/>
+                      <a:headEnd type="none" w="med" len="med"/>
+                      <a:tailEnd type="none" w="med" len="med"/>
+                    </a:lnT>
+                    <a:lnB w="12700" cap="flat" cmpd="sng" algn="ctr">
+                      <a:solidFill>
+                        <a:srgbClr val="D9E0EA"/>
+                      </a:solidFill>
+                      <a:prstDash val="solid"/>
+                      <a:round/>
+                      <a:headEnd type="none" w="med" len="med"/>
+                      <a:tailEnd type="none" w="med" len="med"/>
+                    </a:lnB>
+                  </a:tcPr>
+                </a:tc>
+                <a:tc>
+                  <a:txBody>
+                    <a:bodyPr/>
+                    <a:lstStyle/>
+                    <a:p>
+                      <a:pPr algn="ctr" indent="0" marL="0">
+                        <a:buNone/>
+                      </a:pPr>
+                      <a:r>
+                        <a:rPr lang="en-US" sz="1150" dirty="0">
+                          <a:solidFill>
+                            <a:srgbClr val="16243B"/>
+                          </a:solidFill>
+                          <a:latin typeface="Calibri" pitchFamily="34" charset="0"/>
+                          <a:ea typeface="Calibri" pitchFamily="34" charset="-122"/>
+                          <a:cs typeface="Calibri" pitchFamily="34" charset="-120"/>
+                        </a:rPr>
+                        <a:t>579</a:t>
+                      </a:r>
+                      <a:endParaRPr lang="en-US" sz="1150" dirty="0">
+                        <a:latin typeface="Calibri" charset="0"/>
+                        <a:ea typeface="Calibri" charset="0"/>
+                        <a:cs typeface="Calibri" charset="0"/>
+                      </a:endParaRPr>
+                    </a:p>
+                  </a:txBody>
+                  <a:tcPr marL="91440" marR="91440" marT="45720" marB="45720" anchor="ctr">
+                    <a:lnL w="12700" cap="flat" cmpd="sng" algn="ctr">
+                      <a:solidFill>
+                        <a:srgbClr val="D9E0EA"/>
+                      </a:solidFill>
+                      <a:prstDash val="solid"/>
+                      <a:round/>
+                      <a:headEnd type="none" w="med" len="med"/>
+                      <a:tailEnd type="none" w="med" len="med"/>
+                    </a:lnL>
+                    <a:lnR w="12700" cap="flat" cmpd="sng" algn="ctr">
+                      <a:solidFill>
+                        <a:srgbClr val="D9E0EA"/>
+                      </a:solidFill>
+                      <a:prstDash val="solid"/>
+                      <a:round/>
+                      <a:headEnd type="none" w="med" len="med"/>
+                      <a:tailEnd type="none" w="med" len="med"/>
+                    </a:lnR>
+                    <a:lnT w="12700" cap="flat" cmpd="sng" algn="ctr">
+                      <a:solidFill>
+                        <a:srgbClr val="D9E0EA"/>
+                      </a:solidFill>
+                      <a:prstDash val="solid"/>
+                      <a:round/>
+                      <a:headEnd type="none" w="med" len="med"/>
+                      <a:tailEnd type="none" w="med" len="med"/>
+                    </a:lnT>
+                    <a:lnB w="12700" cap="flat" cmpd="sng" algn="ctr">
+                      <a:solidFill>
+                        <a:srgbClr val="D9E0EA"/>
+                      </a:solidFill>
+                      <a:prstDash val="solid"/>
+                      <a:round/>
+                      <a:headEnd type="none" w="med" len="med"/>
+                      <a:tailEnd type="none" w="med" len="med"/>
+                    </a:lnB>
+                  </a:tcPr>
+                </a:tc>
+                <a:tc>
+                  <a:txBody>
+                    <a:bodyPr/>
+                    <a:lstStyle/>
+                    <a:p>
+                      <a:pPr algn="ctr" indent="0" marL="0">
+                        <a:buNone/>
+                      </a:pPr>
+                      <a:r>
+                        <a:rPr lang="en-US" sz="1150" dirty="0">
+                          <a:solidFill>
+                            <a:srgbClr val="16243B"/>
+                          </a:solidFill>
+                          <a:latin typeface="Calibri" pitchFamily="34" charset="0"/>
+                          <a:ea typeface="Calibri" pitchFamily="34" charset="-122"/>
+                          <a:cs typeface="Calibri" pitchFamily="34" charset="-120"/>
+                        </a:rPr>
+                        <a:t>952</a:t>
+                      </a:r>
+                      <a:endParaRPr lang="en-US" sz="1150" dirty="0">
+                        <a:latin typeface="Calibri" charset="0"/>
+                        <a:ea typeface="Calibri" charset="0"/>
+                        <a:cs typeface="Calibri" charset="0"/>
+                      </a:endParaRPr>
+                    </a:p>
+                  </a:txBody>
+                  <a:tcPr marL="91440" marR="91440" marT="45720" marB="45720" anchor="ctr">
+                    <a:lnL w="12700" cap="flat" cmpd="sng" algn="ctr">
+                      <a:solidFill>
+                        <a:srgbClr val="D9E0EA"/>
+                      </a:solidFill>
+                      <a:prstDash val="solid"/>
+                      <a:round/>
+                      <a:headEnd type="none" w="med" len="med"/>
+                      <a:tailEnd type="none" w="med" len="med"/>
+                    </a:lnL>
+                    <a:lnR w="12700" cap="flat" cmpd="sng" algn="ctr">
+                      <a:solidFill>
+                        <a:srgbClr val="D9E0EA"/>
+                      </a:solidFill>
+                      <a:prstDash val="solid"/>
+                      <a:round/>
+                      <a:headEnd type="none" w="med" len="med"/>
+                      <a:tailEnd type="none" w="med" len="med"/>
+                    </a:lnR>
+                    <a:lnT w="12700" cap="flat" cmpd="sng" algn="ctr">
+                      <a:solidFill>
+                        <a:srgbClr val="D9E0EA"/>
+                      </a:solidFill>
+                      <a:prstDash val="solid"/>
+                      <a:round/>
+                      <a:headEnd type="none" w="med" len="med"/>
+                      <a:tailEnd type="none" w="med" len="med"/>
+                    </a:lnT>
+                    <a:lnB w="12700" cap="flat" cmpd="sng" algn="ctr">
+                      <a:solidFill>
+                        <a:srgbClr val="D9E0EA"/>
+                      </a:solidFill>
+                      <a:prstDash val="solid"/>
+                      <a:round/>
+                      <a:headEnd type="none" w="med" len="med"/>
+                      <a:tailEnd type="none" w="med" len="med"/>
+                    </a:lnB>
+                  </a:tcPr>
+                </a:tc>
+                <a:tc>
+                  <a:txBody>
+                    <a:bodyPr/>
+                    <a:lstStyle/>
+                    <a:p>
+                      <a:pPr algn="ctr" indent="0" marL="0">
+                        <a:buNone/>
+                      </a:pPr>
+                      <a:r>
+                        <a:rPr lang="en-US" sz="1150" dirty="0">
+                          <a:solidFill>
+                            <a:srgbClr val="16243B"/>
+                          </a:solidFill>
+                          <a:latin typeface="Calibri" pitchFamily="34" charset="0"/>
+                          <a:ea typeface="Calibri" pitchFamily="34" charset="-122"/>
+                          <a:cs typeface="Calibri" pitchFamily="34" charset="-120"/>
+                        </a:rPr>
+                        <a:t>1 144</a:t>
+                      </a:r>
+                      <a:endParaRPr lang="en-US" sz="1150" dirty="0">
+                        <a:latin typeface="Calibri" charset="0"/>
+                        <a:ea typeface="Calibri" charset="0"/>
+                        <a:cs typeface="Calibri" charset="0"/>
+                      </a:endParaRPr>
+                    </a:p>
+                  </a:txBody>
+                  <a:tcPr marL="91440" marR="91440" marT="45720" marB="45720" anchor="ctr">
+                    <a:lnL w="12700" cap="flat" cmpd="sng" algn="ctr">
+                      <a:solidFill>
+                        <a:srgbClr val="D9E0EA"/>
+                      </a:solidFill>
+                      <a:prstDash val="solid"/>
+                      <a:round/>
+                      <a:headEnd type="none" w="med" len="med"/>
+                      <a:tailEnd type="none" w="med" len="med"/>
+                    </a:lnL>
+                    <a:lnR w="12700" cap="flat" cmpd="sng" algn="ctr">
+                      <a:solidFill>
+                        <a:srgbClr val="D9E0EA"/>
+                      </a:solidFill>
+                      <a:prstDash val="solid"/>
+                      <a:round/>
+                      <a:headEnd type="none" w="med" len="med"/>
+                      <a:tailEnd type="none" w="med" len="med"/>
+                    </a:lnR>
+                    <a:lnT w="12700" cap="flat" cmpd="sng" algn="ctr">
+                      <a:solidFill>
+                        <a:srgbClr val="D9E0EA"/>
+                      </a:solidFill>
+                      <a:prstDash val="solid"/>
+                      <a:round/>
+                      <a:headEnd type="none" w="med" len="med"/>
+                      <a:tailEnd type="none" w="med" len="med"/>
+                    </a:lnT>
+                    <a:lnB w="12700" cap="flat" cmpd="sng" algn="ctr">
+                      <a:solidFill>
+                        <a:srgbClr val="D9E0EA"/>
+                      </a:solidFill>
+                      <a:prstDash val="solid"/>
+                      <a:round/>
+                      <a:headEnd type="none" w="med" len="med"/>
+                      <a:tailEnd type="none" w="med" len="med"/>
+                    </a:lnB>
+                  </a:tcPr>
+                </a:tc>
+                <a:tc>
+                  <a:txBody>
+                    <a:bodyPr/>
+                    <a:lstStyle/>
+                    <a:p>
+                      <a:pPr algn="ctr" indent="0" marL="0">
+                        <a:buNone/>
+                      </a:pPr>
+                      <a:r>
+                        <a:rPr lang="en-US" sz="1150" dirty="0">
+                          <a:solidFill>
+                            <a:srgbClr val="16243B"/>
+                          </a:solidFill>
+                          <a:latin typeface="Calibri" pitchFamily="34" charset="0"/>
+                          <a:ea typeface="Calibri" pitchFamily="34" charset="-122"/>
+                          <a:cs typeface="Calibri" pitchFamily="34" charset="-120"/>
+                        </a:rPr>
+                        <a:t>724</a:t>
+                      </a:r>
+                      <a:endParaRPr lang="en-US" sz="1150" dirty="0">
+                        <a:latin typeface="Calibri" charset="0"/>
+                        <a:ea typeface="Calibri" charset="0"/>
+                        <a:cs typeface="Calibri" charset="0"/>
+                      </a:endParaRPr>
+                    </a:p>
+                  </a:txBody>
+                  <a:tcPr marL="91440" marR="91440" marT="45720" marB="45720" anchor="ctr">
+                    <a:lnL w="12700" cap="flat" cmpd="sng" algn="ctr">
+                      <a:solidFill>
+                        <a:srgbClr val="D9E0EA"/>
+                      </a:solidFill>
+                      <a:prstDash val="solid"/>
+                      <a:round/>
+                      <a:headEnd type="none" w="med" len="med"/>
+                      <a:tailEnd type="none" w="med" len="med"/>
+                    </a:lnL>
+                    <a:lnR w="12700" cap="flat" cmpd="sng" algn="ctr">
+                      <a:solidFill>
+                        <a:srgbClr val="D9E0EA"/>
+                      </a:solidFill>
+                      <a:prstDash val="solid"/>
+                      <a:round/>
+                      <a:headEnd type="none" w="med" len="med"/>
+                      <a:tailEnd type="none" w="med" len="med"/>
+                    </a:lnR>
+                    <a:lnT w="12700" cap="flat" cmpd="sng" algn="ctr">
+                      <a:solidFill>
+                        <a:srgbClr val="D9E0EA"/>
+                      </a:solidFill>
+                      <a:prstDash val="solid"/>
+                      <a:round/>
+                      <a:headEnd type="none" w="med" len="med"/>
+                      <a:tailEnd type="none" w="med" len="med"/>
+                    </a:lnT>
+                    <a:lnB w="12700" cap="flat" cmpd="sng" algn="ctr">
+                      <a:solidFill>
+                        <a:srgbClr val="D9E0EA"/>
+                      </a:solidFill>
+                      <a:prstDash val="solid"/>
+                      <a:round/>
+                      <a:headEnd type="none" w="med" len="med"/>
+                      <a:tailEnd type="none" w="med" len="med"/>
+                    </a:lnB>
+                  </a:tcPr>
+                </a:tc>
+                <a:tc>
+                  <a:txBody>
+                    <a:bodyPr/>
+                    <a:lstStyle/>
+                    <a:p>
+                      <a:pPr algn="ctr" indent="0" marL="0">
+                        <a:buNone/>
+                      </a:pPr>
+                      <a:r>
+                        <a:rPr lang="en-US" sz="1150" dirty="0">
+                          <a:solidFill>
+                            <a:srgbClr val="16243B"/>
+                          </a:solidFill>
+                          <a:latin typeface="Calibri" pitchFamily="34" charset="0"/>
+                          <a:ea typeface="Calibri" pitchFamily="34" charset="-122"/>
+                          <a:cs typeface="Calibri" pitchFamily="34" charset="-120"/>
+                        </a:rPr>
+                        <a:t>833</a:t>
+                      </a:r>
+                      <a:endParaRPr lang="en-US" sz="1150" dirty="0">
+                        <a:latin typeface="Calibri" charset="0"/>
+                        <a:ea typeface="Calibri" charset="0"/>
+                        <a:cs typeface="Calibri" charset="0"/>
+                      </a:endParaRPr>
+                    </a:p>
+                  </a:txBody>
+                  <a:tcPr marL="91440" marR="91440" marT="45720" marB="45720" anchor="ctr">
+                    <a:lnL w="12700" cap="flat" cmpd="sng" algn="ctr">
+                      <a:solidFill>
+                        <a:srgbClr val="D9E0EA"/>
+                      </a:solidFill>
+                      <a:prstDash val="solid"/>
+                      <a:round/>
+                      <a:headEnd type="none" w="med" len="med"/>
+                      <a:tailEnd type="none" w="med" len="med"/>
+                    </a:lnL>
+                    <a:lnR w="12700" cap="flat" cmpd="sng" algn="ctr">
+                      <a:solidFill>
+                        <a:srgbClr val="D9E0EA"/>
+                      </a:solidFill>
+                      <a:prstDash val="solid"/>
+                      <a:round/>
+                      <a:headEnd type="none" w="med" len="med"/>
+                      <a:tailEnd type="none" w="med" len="med"/>
+                    </a:lnR>
+                    <a:lnT w="12700" cap="flat" cmpd="sng" algn="ctr">
+                      <a:solidFill>
+                        <a:srgbClr val="D9E0EA"/>
+                      </a:solidFill>
+                      <a:prstDash val="solid"/>
+                      <a:round/>
+                      <a:headEnd type="none" w="med" len="med"/>
+                      <a:tailEnd type="none" w="med" len="med"/>
+                    </a:lnT>
+                    <a:lnB w="12700" cap="flat" cmpd="sng" algn="ctr">
+                      <a:solidFill>
+                        <a:srgbClr val="D9E0EA"/>
+                      </a:solidFill>
+                      <a:prstDash val="solid"/>
+                      <a:round/>
+                      <a:headEnd type="none" w="med" len="med"/>
+                      <a:tailEnd type="none" w="med" len="med"/>
+                    </a:lnB>
+                  </a:tcPr>
+                </a:tc>
+                <a:tc>
+                  <a:txBody>
+                    <a:bodyPr/>
+                    <a:lstStyle/>
+                    <a:p>
+                      <a:pPr algn="ctr" indent="0" marL="0">
+                        <a:buNone/>
+                      </a:pPr>
+                      <a:r>
+                        <a:rPr lang="en-US" sz="1150" dirty="0">
+                          <a:solidFill>
+                            <a:srgbClr val="16243B"/>
+                          </a:solidFill>
+                          <a:latin typeface="Calibri" pitchFamily="34" charset="0"/>
+                          <a:ea typeface="Calibri" pitchFamily="34" charset="-122"/>
+                          <a:cs typeface="Calibri" pitchFamily="34" charset="-120"/>
+                        </a:rPr>
+                        <a:t>1 739</a:t>
+                      </a:r>
+                      <a:endParaRPr lang="en-US" sz="1150" dirty="0">
+                        <a:latin typeface="Calibri" charset="0"/>
+                        <a:ea typeface="Calibri" charset="0"/>
+                        <a:cs typeface="Calibri" charset="0"/>
+                      </a:endParaRPr>
+                    </a:p>
+                  </a:txBody>
+                  <a:tcPr marL="91440" marR="91440" marT="45720" marB="45720" anchor="ctr">
+                    <a:lnL w="12700" cap="flat" cmpd="sng" algn="ctr">
+                      <a:solidFill>
+                        <a:srgbClr val="D9E0EA"/>
+                      </a:solidFill>
+                      <a:prstDash val="solid"/>
+                      <a:round/>
+                      <a:headEnd type="none" w="med" len="med"/>
+                      <a:tailEnd type="none" w="med" len="med"/>
+                    </a:lnL>
+                    <a:lnR w="12700" cap="flat" cmpd="sng" algn="ctr">
+                      <a:solidFill>
+                        <a:srgbClr val="D9E0EA"/>
+                      </a:solidFill>
+                      <a:prstDash val="solid"/>
+                      <a:round/>
+                      <a:headEnd type="none" w="med" len="med"/>
+                      <a:tailEnd type="none" w="med" len="med"/>
+                    </a:lnR>
+                    <a:lnT w="12700" cap="flat" cmpd="sng" algn="ctr">
+                      <a:solidFill>
+                        <a:srgbClr val="D9E0EA"/>
+                      </a:solidFill>
+                      <a:prstDash val="solid"/>
+                      <a:round/>
+                      <a:headEnd type="none" w="med" len="med"/>
+                      <a:tailEnd type="none" w="med" len="med"/>
+                    </a:lnT>
+                    <a:lnB w="12700" cap="flat" cmpd="sng" algn="ctr">
+                      <a:solidFill>
+                        <a:srgbClr val="D9E0EA"/>
+                      </a:solidFill>
+                      <a:prstDash val="solid"/>
+                      <a:round/>
+                      <a:headEnd type="none" w="med" len="med"/>
+                      <a:tailEnd type="none" w="med" len="med"/>
+                    </a:lnB>
+                  </a:tcPr>
+                </a:tc>
+              </a:tr>
+              <a:tr h="566928">
+                <a:tc>
+                  <a:txBody>
+                    <a:bodyPr/>
+                    <a:lstStyle/>
+                    <a:p>
+                      <a:pPr algn="l" indent="0" marL="0">
+                        <a:buNone/>
+                      </a:pPr>
+                      <a:r>
+                        <a:rPr lang="en-US" sz="1150" b="1" dirty="0">
+                          <a:solidFill>
+                            <a:srgbClr val="16243B"/>
+                          </a:solidFill>
+                          <a:latin typeface="Calibri" pitchFamily="34" charset="0"/>
+                          <a:ea typeface="Calibri" pitchFamily="34" charset="-122"/>
+                          <a:cs typeface="Calibri" pitchFamily="34" charset="-120"/>
+                        </a:rPr>
+                        <a:t>Итого</a:t>
+                      </a:r>
+                      <a:endParaRPr lang="en-US" sz="1150" dirty="0">
+                        <a:latin typeface="Calibri" charset="0"/>
+                        <a:ea typeface="Calibri" charset="0"/>
+                        <a:cs typeface="Calibri" charset="0"/>
+                      </a:endParaRPr>
+                    </a:p>
+                  </a:txBody>
+                  <a:tcPr marL="91440" marR="91440" marT="45720" marB="45720" anchor="ctr">
+                    <a:lnL w="12700" cap="flat" cmpd="sng" algn="ctr">
+                      <a:solidFill>
+                        <a:srgbClr val="D9E0EA"/>
+                      </a:solidFill>
+                      <a:prstDash val="solid"/>
+                      <a:round/>
+                      <a:headEnd type="none" w="med" len="med"/>
+                      <a:tailEnd type="none" w="med" len="med"/>
+                    </a:lnL>
+                    <a:lnR w="12700" cap="flat" cmpd="sng" algn="ctr">
+                      <a:solidFill>
+                        <a:srgbClr val="D9E0EA"/>
+                      </a:solidFill>
+                      <a:prstDash val="solid"/>
+                      <a:round/>
+                      <a:headEnd type="none" w="med" len="med"/>
+                      <a:tailEnd type="none" w="med" len="med"/>
+                    </a:lnR>
+                    <a:lnT w="12700" cap="flat" cmpd="sng" algn="ctr">
+                      <a:solidFill>
+                        <a:srgbClr val="D9E0EA"/>
+                      </a:solidFill>
+                      <a:prstDash val="solid"/>
+                      <a:round/>
+                      <a:headEnd type="none" w="med" len="med"/>
+                      <a:tailEnd type="none" w="med" len="med"/>
+                    </a:lnT>
+                    <a:lnB w="12700" cap="flat" cmpd="sng" algn="ctr">
+                      <a:solidFill>
+                        <a:srgbClr val="D9E0EA"/>
+                      </a:solidFill>
+                      <a:prstDash val="solid"/>
+                      <a:round/>
+                      <a:headEnd type="none" w="med" len="med"/>
+                      <a:tailEnd type="none" w="med" len="med"/>
+                    </a:lnB>
+                  </a:tcPr>
+                </a:tc>
+                <a:tc>
+                  <a:txBody>
+                    <a:bodyPr/>
+                    <a:lstStyle/>
+                    <a:p>
+                      <a:pPr algn="ctr" indent="0" marL="0">
+                        <a:buNone/>
+                      </a:pPr>
+                      <a:r>
+                        <a:rPr lang="en-US" sz="1150" b="1" dirty="0">
+                          <a:solidFill>
+                            <a:srgbClr val="16243B"/>
+                          </a:solidFill>
+                          <a:latin typeface="Calibri" pitchFamily="34" charset="0"/>
+                          <a:ea typeface="Calibri" pitchFamily="34" charset="-122"/>
+                          <a:cs typeface="Calibri" pitchFamily="34" charset="-120"/>
+                        </a:rPr>
+                        <a:t>19 209</a:t>
+                      </a:r>
+                      <a:endParaRPr lang="en-US" sz="1150" dirty="0">
+                        <a:latin typeface="Calibri" charset="0"/>
+                        <a:ea typeface="Calibri" charset="0"/>
+                        <a:cs typeface="Calibri" charset="0"/>
+                      </a:endParaRPr>
+                    </a:p>
+                  </a:txBody>
+                  <a:tcPr marL="91440" marR="91440" marT="45720" marB="45720" anchor="ctr">
+                    <a:lnL w="12700" cap="flat" cmpd="sng" algn="ctr">
+                      <a:solidFill>
+                        <a:srgbClr val="D9E0EA"/>
+                      </a:solidFill>
+                      <a:prstDash val="solid"/>
+                      <a:round/>
+                      <a:headEnd type="none" w="med" len="med"/>
+                      <a:tailEnd type="none" w="med" len="med"/>
+                    </a:lnL>
+                    <a:lnR w="12700" cap="flat" cmpd="sng" algn="ctr">
+                      <a:solidFill>
+                        <a:srgbClr val="D9E0EA"/>
+                      </a:solidFill>
+                      <a:prstDash val="solid"/>
+                      <a:round/>
+                      <a:headEnd type="none" w="med" len="med"/>
+                      <a:tailEnd type="none" w="med" len="med"/>
+                    </a:lnR>
+                    <a:lnT w="12700" cap="flat" cmpd="sng" algn="ctr">
+                      <a:solidFill>
+                        <a:srgbClr val="D9E0EA"/>
+                      </a:solidFill>
+                      <a:prstDash val="solid"/>
+                      <a:round/>
+                      <a:headEnd type="none" w="med" len="med"/>
+                      <a:tailEnd type="none" w="med" len="med"/>
+                    </a:lnT>
+                    <a:lnB w="12700" cap="flat" cmpd="sng" algn="ctr">
+                      <a:solidFill>
+                        <a:srgbClr val="D9E0EA"/>
+                      </a:solidFill>
+                      <a:prstDash val="solid"/>
+                      <a:round/>
+                      <a:headEnd type="none" w="med" len="med"/>
+                      <a:tailEnd type="none" w="med" len="med"/>
+                    </a:lnB>
+                  </a:tcPr>
+                </a:tc>
+                <a:tc>
+                  <a:txBody>
+                    <a:bodyPr/>
+                    <a:lstStyle/>
+                    <a:p>
+                      <a:pPr algn="ctr" indent="0" marL="0">
+                        <a:buNone/>
+                      </a:pPr>
+                      <a:r>
+                        <a:rPr lang="en-US" sz="1150" dirty="0">
+                          <a:solidFill>
+                            <a:srgbClr val="16243B"/>
+                          </a:solidFill>
+                          <a:latin typeface="Calibri" pitchFamily="34" charset="0"/>
+                          <a:ea typeface="Calibri" pitchFamily="34" charset="-122"/>
+                          <a:cs typeface="Calibri" pitchFamily="34" charset="-120"/>
+                        </a:rPr>
+                        <a:t>3 848</a:t>
+                      </a:r>
+                      <a:endParaRPr lang="en-US" sz="1150" dirty="0">
+                        <a:latin typeface="Calibri" charset="0"/>
+                        <a:ea typeface="Calibri" charset="0"/>
+                        <a:cs typeface="Calibri" charset="0"/>
+                      </a:endParaRPr>
+                    </a:p>
+                  </a:txBody>
+                  <a:tcPr marL="91440" marR="91440" marT="45720" marB="45720" anchor="ctr">
+                    <a:lnL w="12700" cap="flat" cmpd="sng" algn="ctr">
+                      <a:solidFill>
+                        <a:srgbClr val="D9E0EA"/>
+                      </a:solidFill>
+                      <a:prstDash val="solid"/>
+                      <a:round/>
+                      <a:headEnd type="none" w="med" len="med"/>
+                      <a:tailEnd type="none" w="med" len="med"/>
+                    </a:lnL>
+                    <a:lnR w="12700" cap="flat" cmpd="sng" algn="ctr">
+                      <a:solidFill>
+                        <a:srgbClr val="D9E0EA"/>
+                      </a:solidFill>
+                      <a:prstDash val="solid"/>
+                      <a:round/>
+                      <a:headEnd type="none" w="med" len="med"/>
+                      <a:tailEnd type="none" w="med" len="med"/>
+                    </a:lnR>
+                    <a:lnT w="12700" cap="flat" cmpd="sng" algn="ctr">
+                      <a:solidFill>
+                        <a:srgbClr val="D9E0EA"/>
+                      </a:solidFill>
+                      <a:prstDash val="solid"/>
+                      <a:round/>
+                      <a:headEnd type="none" w="med" len="med"/>
+                      <a:tailEnd type="none" w="med" len="med"/>
+                    </a:lnT>
+                    <a:lnB w="12700" cap="flat" cmpd="sng" algn="ctr">
+                      <a:solidFill>
+                        <a:srgbClr val="D9E0EA"/>
+                      </a:solidFill>
+                      <a:prstDash val="solid"/>
+                      <a:round/>
+                      <a:headEnd type="none" w="med" len="med"/>
+                      <a:tailEnd type="none" w="med" len="med"/>
+                    </a:lnB>
+                  </a:tcPr>
+                </a:tc>
+                <a:tc>
+                  <a:txBody>
+                    <a:bodyPr/>
+                    <a:lstStyle/>
+                    <a:p>
+                      <a:pPr algn="ctr" indent="0" marL="0">
+                        <a:buNone/>
+                      </a:pPr>
+                      <a:r>
+                        <a:rPr lang="en-US" sz="1150" dirty="0">
+                          <a:solidFill>
+                            <a:srgbClr val="16243B"/>
+                          </a:solidFill>
+                          <a:latin typeface="Calibri" pitchFamily="34" charset="0"/>
+                          <a:ea typeface="Calibri" pitchFamily="34" charset="-122"/>
+                          <a:cs typeface="Calibri" pitchFamily="34" charset="-120"/>
+                        </a:rPr>
+                        <a:t>2 871</a:t>
+                      </a:r>
+                      <a:endParaRPr lang="en-US" sz="1150" dirty="0">
+                        <a:latin typeface="Calibri" charset="0"/>
+                        <a:ea typeface="Calibri" charset="0"/>
+                        <a:cs typeface="Calibri" charset="0"/>
+                      </a:endParaRPr>
+                    </a:p>
+                  </a:txBody>
+                  <a:tcPr marL="91440" marR="91440" marT="45720" marB="45720" anchor="ctr">
+                    <a:lnL w="12700" cap="flat" cmpd="sng" algn="ctr">
+                      <a:solidFill>
+                        <a:srgbClr val="D9E0EA"/>
+                      </a:solidFill>
+                      <a:prstDash val="solid"/>
+                      <a:round/>
+                      <a:headEnd type="none" w="med" len="med"/>
+                      <a:tailEnd type="none" w="med" len="med"/>
+                    </a:lnL>
+                    <a:lnR w="12700" cap="flat" cmpd="sng" algn="ctr">
+                      <a:solidFill>
+                        <a:srgbClr val="D9E0EA"/>
+                      </a:solidFill>
+                      <a:prstDash val="solid"/>
+                      <a:round/>
+                      <a:headEnd type="none" w="med" len="med"/>
+                      <a:tailEnd type="none" w="med" len="med"/>
+                    </a:lnR>
+                    <a:lnT w="12700" cap="flat" cmpd="sng" algn="ctr">
+                      <a:solidFill>
+                        <a:srgbClr val="D9E0EA"/>
+                      </a:solidFill>
+                      <a:prstDash val="solid"/>
+                      <a:round/>
+                      <a:headEnd type="none" w="med" len="med"/>
+                      <a:tailEnd type="none" w="med" len="med"/>
+                    </a:lnT>
+                    <a:lnB w="12700" cap="flat" cmpd="sng" algn="ctr">
+                      <a:solidFill>
+                        <a:srgbClr val="D9E0EA"/>
+                      </a:solidFill>
+                      <a:prstDash val="solid"/>
+                      <a:round/>
+                      <a:headEnd type="none" w="med" len="med"/>
+                      <a:tailEnd type="none" w="med" len="med"/>
+                    </a:lnB>
+                  </a:tcPr>
+                </a:tc>
+                <a:tc>
+                  <a:txBody>
+                    <a:bodyPr/>
+                    <a:lstStyle/>
+                    <a:p>
+                      <a:pPr algn="ctr" indent="0" marL="0">
+                        <a:buNone/>
+                      </a:pPr>
+                      <a:r>
+                        <a:rPr lang="en-US" sz="1150" dirty="0">
+                          <a:solidFill>
+                            <a:srgbClr val="16243B"/>
+                          </a:solidFill>
+                          <a:latin typeface="Calibri" pitchFamily="34" charset="0"/>
+                          <a:ea typeface="Calibri" pitchFamily="34" charset="-122"/>
+                          <a:cs typeface="Calibri" pitchFamily="34" charset="-120"/>
+                        </a:rPr>
+                        <a:t>2 705</a:t>
+                      </a:r>
+                      <a:endParaRPr lang="en-US" sz="1150" dirty="0">
+                        <a:latin typeface="Calibri" charset="0"/>
+                        <a:ea typeface="Calibri" charset="0"/>
+                        <a:cs typeface="Calibri" charset="0"/>
+                      </a:endParaRPr>
+                    </a:p>
+                  </a:txBody>
+                  <a:tcPr marL="91440" marR="91440" marT="45720" marB="45720" anchor="ctr">
+                    <a:lnL w="12700" cap="flat" cmpd="sng" algn="ctr">
+                      <a:solidFill>
+                        <a:srgbClr val="D9E0EA"/>
+                      </a:solidFill>
+                      <a:prstDash val="solid"/>
+                      <a:round/>
+                      <a:headEnd type="none" w="med" len="med"/>
+                      <a:tailEnd type="none" w="med" len="med"/>
+                    </a:lnL>
+                    <a:lnR w="12700" cap="flat" cmpd="sng" algn="ctr">
+                      <a:solidFill>
+                        <a:srgbClr val="D9E0EA"/>
+                      </a:solidFill>
+                      <a:prstDash val="solid"/>
+                      <a:round/>
+                      <a:headEnd type="none" w="med" len="med"/>
+                      <a:tailEnd type="none" w="med" len="med"/>
+                    </a:lnR>
+                    <a:lnT w="12700" cap="flat" cmpd="sng" algn="ctr">
+                      <a:solidFill>
+                        <a:srgbClr val="D9E0EA"/>
+                      </a:solidFill>
+                      <a:prstDash val="solid"/>
+                      <a:round/>
+                      <a:headEnd type="none" w="med" len="med"/>
+                      <a:tailEnd type="none" w="med" len="med"/>
+                    </a:lnT>
+                    <a:lnB w="12700" cap="flat" cmpd="sng" algn="ctr">
+                      <a:solidFill>
+                        <a:srgbClr val="D9E0EA"/>
+                      </a:solidFill>
+                      <a:prstDash val="solid"/>
+                      <a:round/>
+                      <a:headEnd type="none" w="med" len="med"/>
+                      <a:tailEnd type="none" w="med" len="med"/>
+                    </a:lnB>
+                  </a:tcPr>
+                </a:tc>
+                <a:tc>
+                  <a:txBody>
+                    <a:bodyPr/>
+                    <a:lstStyle/>
+                    <a:p>
+                      <a:pPr algn="ctr" indent="0" marL="0">
+                        <a:buNone/>
+                      </a:pPr>
+                      <a:r>
+                        <a:rPr lang="en-US" sz="1150" dirty="0">
+                          <a:solidFill>
+                            <a:srgbClr val="16243B"/>
+                          </a:solidFill>
+                          <a:latin typeface="Calibri" pitchFamily="34" charset="0"/>
+                          <a:ea typeface="Calibri" pitchFamily="34" charset="-122"/>
+                          <a:cs typeface="Calibri" pitchFamily="34" charset="-120"/>
+                        </a:rPr>
+                        <a:t>2 661</a:t>
+                      </a:r>
+                      <a:endParaRPr lang="en-US" sz="1150" dirty="0">
+                        <a:latin typeface="Calibri" charset="0"/>
+                        <a:ea typeface="Calibri" charset="0"/>
+                        <a:cs typeface="Calibri" charset="0"/>
+                      </a:endParaRPr>
+                    </a:p>
+                  </a:txBody>
+                  <a:tcPr marL="91440" marR="91440" marT="45720" marB="45720" anchor="ctr">
+                    <a:lnL w="12700" cap="flat" cmpd="sng" algn="ctr">
+                      <a:solidFill>
+                        <a:srgbClr val="D9E0EA"/>
+                      </a:solidFill>
+                      <a:prstDash val="solid"/>
+                      <a:round/>
+                      <a:headEnd type="none" w="med" len="med"/>
+                      <a:tailEnd type="none" w="med" len="med"/>
+                    </a:lnL>
+                    <a:lnR w="12700" cap="flat" cmpd="sng" algn="ctr">
+                      <a:solidFill>
+                        <a:srgbClr val="D9E0EA"/>
+                      </a:solidFill>
+                      <a:prstDash val="solid"/>
+                      <a:round/>
+                      <a:headEnd type="none" w="med" len="med"/>
+                      <a:tailEnd type="none" w="med" len="med"/>
+                    </a:lnR>
+                    <a:lnT w="12700" cap="flat" cmpd="sng" algn="ctr">
+                      <a:solidFill>
+                        <a:srgbClr val="D9E0EA"/>
+                      </a:solidFill>
+                      <a:prstDash val="solid"/>
+                      <a:round/>
+                      <a:headEnd type="none" w="med" len="med"/>
+                      <a:tailEnd type="none" w="med" len="med"/>
+                    </a:lnT>
+                    <a:lnB w="12700" cap="flat" cmpd="sng" algn="ctr">
+                      <a:solidFill>
+                        <a:srgbClr val="D9E0EA"/>
+                      </a:solidFill>
+                      <a:prstDash val="solid"/>
+                      <a:round/>
+                      <a:headEnd type="none" w="med" len="med"/>
+                      <a:tailEnd type="none" w="med" len="med"/>
+                    </a:lnB>
+                  </a:tcPr>
+                </a:tc>
+                <a:tc>
+                  <a:txBody>
+                    <a:bodyPr/>
+                    <a:lstStyle/>
+                    <a:p>
+                      <a:pPr algn="ctr" indent="0" marL="0">
+                        <a:buNone/>
+                      </a:pPr>
+                      <a:r>
+                        <a:rPr lang="en-US" sz="1150" dirty="0">
+                          <a:solidFill>
+                            <a:srgbClr val="16243B"/>
+                          </a:solidFill>
+                          <a:latin typeface="Calibri" pitchFamily="34" charset="0"/>
+                          <a:ea typeface="Calibri" pitchFamily="34" charset="-122"/>
+                          <a:cs typeface="Calibri" pitchFamily="34" charset="-120"/>
+                        </a:rPr>
+                        <a:t>1 570</a:t>
+                      </a:r>
+                      <a:endParaRPr lang="en-US" sz="1150" dirty="0">
+                        <a:latin typeface="Calibri" charset="0"/>
+                        <a:ea typeface="Calibri" charset="0"/>
+                        <a:cs typeface="Calibri" charset="0"/>
+                      </a:endParaRPr>
+                    </a:p>
+                  </a:txBody>
+                  <a:tcPr marL="91440" marR="91440" marT="45720" marB="45720" anchor="ctr">
+                    <a:lnL w="12700" cap="flat" cmpd="sng" algn="ctr">
+                      <a:solidFill>
+                        <a:srgbClr val="D9E0EA"/>
+                      </a:solidFill>
+                      <a:prstDash val="solid"/>
+                      <a:round/>
+                      <a:headEnd type="none" w="med" len="med"/>
+                      <a:tailEnd type="none" w="med" len="med"/>
+                    </a:lnL>
+                    <a:lnR w="12700" cap="flat" cmpd="sng" algn="ctr">
+                      <a:solidFill>
+                        <a:srgbClr val="D9E0EA"/>
+                      </a:solidFill>
+                      <a:prstDash val="solid"/>
+                      <a:round/>
+                      <a:headEnd type="none" w="med" len="med"/>
+                      <a:tailEnd type="none" w="med" len="med"/>
+                    </a:lnR>
+                    <a:lnT w="12700" cap="flat" cmpd="sng" algn="ctr">
+                      <a:solidFill>
+                        <a:srgbClr val="D9E0EA"/>
+                      </a:solidFill>
+                      <a:prstDash val="solid"/>
+                      <a:round/>
+                      <a:headEnd type="none" w="med" len="med"/>
+                      <a:tailEnd type="none" w="med" len="med"/>
+                    </a:lnT>
+                    <a:lnB w="12700" cap="flat" cmpd="sng" algn="ctr">
+                      <a:solidFill>
+                        <a:srgbClr val="D9E0EA"/>
+                      </a:solidFill>
+                      <a:prstDash val="solid"/>
+                      <a:round/>
+                      <a:headEnd type="none" w="med" len="med"/>
+                      <a:tailEnd type="none" w="med" len="med"/>
+                    </a:lnB>
+                  </a:tcPr>
+                </a:tc>
+                <a:tc>
+                  <a:txBody>
+                    <a:bodyPr/>
+                    <a:lstStyle/>
+                    <a:p>
+                      <a:pPr algn="ctr" indent="0" marL="0">
+                        <a:buNone/>
+                      </a:pPr>
+                      <a:r>
+                        <a:rPr lang="en-US" sz="1150" dirty="0">
+                          <a:solidFill>
+                            <a:srgbClr val="16243B"/>
+                          </a:solidFill>
+                          <a:latin typeface="Calibri" pitchFamily="34" charset="0"/>
+                          <a:ea typeface="Calibri" pitchFamily="34" charset="-122"/>
+                          <a:cs typeface="Calibri" pitchFamily="34" charset="-120"/>
+                        </a:rPr>
+                        <a:t>1 655</a:t>
+                      </a:r>
+                      <a:endParaRPr lang="en-US" sz="1150" dirty="0">
+                        <a:latin typeface="Calibri" charset="0"/>
+                        <a:ea typeface="Calibri" charset="0"/>
+                        <a:cs typeface="Calibri" charset="0"/>
+                      </a:endParaRPr>
+                    </a:p>
+                  </a:txBody>
+                  <a:tcPr marL="91440" marR="91440" marT="45720" marB="45720" anchor="ctr">
+                    <a:lnL w="12700" cap="flat" cmpd="sng" algn="ctr">
+                      <a:solidFill>
+                        <a:srgbClr val="D9E0EA"/>
+                      </a:solidFill>
+                      <a:prstDash val="solid"/>
+                      <a:round/>
+                      <a:headEnd type="none" w="med" len="med"/>
+                      <a:tailEnd type="none" w="med" len="med"/>
+                    </a:lnL>
+                    <a:lnR w="12700" cap="flat" cmpd="sng" algn="ctr">
+                      <a:solidFill>
+                        <a:srgbClr val="D9E0EA"/>
+                      </a:solidFill>
+                      <a:prstDash val="solid"/>
+                      <a:round/>
+                      <a:headEnd type="none" w="med" len="med"/>
+                      <a:tailEnd type="none" w="med" len="med"/>
+                    </a:lnR>
+                    <a:lnT w="12700" cap="flat" cmpd="sng" algn="ctr">
+                      <a:solidFill>
+                        <a:srgbClr val="D9E0EA"/>
+                      </a:solidFill>
+                      <a:prstDash val="solid"/>
+                      <a:round/>
+                      <a:headEnd type="none" w="med" len="med"/>
+                      <a:tailEnd type="none" w="med" len="med"/>
+                    </a:lnT>
+                    <a:lnB w="12700" cap="flat" cmpd="sng" algn="ctr">
+                      <a:solidFill>
+                        <a:srgbClr val="D9E0EA"/>
+                      </a:solidFill>
+                      <a:prstDash val="solid"/>
+                      <a:round/>
+                      <a:headEnd type="none" w="med" len="med"/>
+                      <a:tailEnd type="none" w="med" len="med"/>
+                    </a:lnB>
+                  </a:tcPr>
+                </a:tc>
+                <a:tc>
+                  <a:txBody>
+                    <a:bodyPr/>
+                    <a:lstStyle/>
+                    <a:p>
+                      <a:pPr algn="ctr" indent="0" marL="0">
+                        <a:buNone/>
+                      </a:pPr>
+                      <a:r>
+                        <a:rPr lang="en-US" sz="1150" dirty="0">
+                          <a:solidFill>
+                            <a:srgbClr val="16243B"/>
+                          </a:solidFill>
+                          <a:latin typeface="Calibri" pitchFamily="34" charset="0"/>
+                          <a:ea typeface="Calibri" pitchFamily="34" charset="-122"/>
+                          <a:cs typeface="Calibri" pitchFamily="34" charset="-120"/>
+                        </a:rPr>
+                        <a:t>3 899</a:t>
+                      </a:r>
+                      <a:endParaRPr lang="en-US" sz="1150" dirty="0">
+                        <a:latin typeface="Calibri" charset="0"/>
+                        <a:ea typeface="Calibri" charset="0"/>
+                        <a:cs typeface="Calibri" charset="0"/>
+                      </a:endParaRPr>
+                    </a:p>
+                  </a:txBody>
+                  <a:tcPr marL="91440" marR="91440" marT="45720" marB="45720" anchor="ctr">
+                    <a:lnL w="12700" cap="flat" cmpd="sng" algn="ctr">
+                      <a:solidFill>
+                        <a:srgbClr val="D9E0EA"/>
+                      </a:solidFill>
+                      <a:prstDash val="solid"/>
+                      <a:round/>
+                      <a:headEnd type="none" w="med" len="med"/>
+                      <a:tailEnd type="none" w="med" len="med"/>
+                    </a:lnL>
+                    <a:lnR w="12700" cap="flat" cmpd="sng" algn="ctr">
+                      <a:solidFill>
+                        <a:srgbClr val="D9E0EA"/>
+                      </a:solidFill>
+                      <a:prstDash val="solid"/>
+                      <a:round/>
+                      <a:headEnd type="none" w="med" len="med"/>
+                      <a:tailEnd type="none" w="med" len="med"/>
+                    </a:lnR>
+                    <a:lnT w="12700" cap="flat" cmpd="sng" algn="ctr">
+                      <a:solidFill>
+                        <a:srgbClr val="D9E0EA"/>
+                      </a:solidFill>
+                      <a:prstDash val="solid"/>
+                      <a:round/>
+                      <a:headEnd type="none" w="med" len="med"/>
+                      <a:tailEnd type="none" w="med" len="med"/>
+                    </a:lnT>
+                    <a:lnB w="12700" cap="flat" cmpd="sng" algn="ctr">
+                      <a:solidFill>
+                        <a:srgbClr val="D9E0EA"/>
+                      </a:solidFill>
+                      <a:prstDash val="solid"/>
+                      <a:round/>
+                      <a:headEnd type="none" w="med" len="med"/>
+                      <a:tailEnd type="none" w="med" len="med"/>
+                    </a:lnB>
+                  </a:tcPr>
+                </a:tc>
+              </a:tr>
+            </a:tbl>
+          </a:graphicData>
+        </a:graphic>
+      </p:graphicFrame>
+      <p:sp>
+        <p:nvSpPr>
+          <p:cNvPr id="5" name="Text 2"/>
+          <p:cNvSpPr/>
+          <p:nvPr/>
+        </p:nvSpPr>
+        <p:spPr>
+          <a:xfrm>
+            <a:off x="640080" y="4572000"/>
+            <a:ext cx="10908792" cy="457200"/>
+          </a:xfrm>
+          <a:prstGeom prst="rect">
+            <a:avLst/>
+          </a:prstGeom>
+          <a:noFill/>
+          <a:ln/>
+        </p:spPr>
+        <p:txBody>
+          <a:bodyPr wrap="square" lIns="0" tIns="0" rIns="0" bIns="0" rtlCol="0" anchor="t"/>
+          <a:lstStyle/>
+          <a:p>
+            <a:pPr indent="0" marL="0">
+              <a:buNone/>
+            </a:pPr>
+            <a:r>
+              <a:rPr lang="en-US" sz="1200" i="1" dirty="0">
+                <a:solidFill>
+                  <a:srgbClr val="6B7787"/>
+                </a:solidFill>
+                <a:latin typeface="Calibri" pitchFamily="34" charset="0"/>
+                <a:ea typeface="Calibri" pitchFamily="34" charset="-122"/>
+                <a:cs typeface="Calibri" pitchFamily="34" charset="-120"/>
+              </a:rPr>
+              <a:t>Источник: отчёт по остаткам на складе, кабинет WB (F-Retail Family). Готовый сток курток+ветровок: 19 209 шт на 15+ складах.</a:t>
+            </a:r>
+            <a:endParaRPr lang="en-US" sz="1200" dirty="0"/>
+          </a:p>
+        </p:txBody>
+      </p:sp>
+      <p:sp>
+        <p:nvSpPr>
+          <p:cNvPr id="6" name="Shape 3"/>
+          <p:cNvSpPr/>
+          <p:nvPr/>
+        </p:nvSpPr>
+        <p:spPr>
+          <a:xfrm>
+            <a:off x="640080" y="5120640"/>
+            <a:ext cx="5303520" cy="960120"/>
           </a:xfrm>
           <a:prstGeom prst="roundRect">
             <a:avLst>
-              <a:gd name="adj" fmla="val 3077"/>
+              <a:gd name="adj" fmla="val 6667"/>
             </a:avLst>
           </a:prstGeom>
           <a:solidFill>
-            <a:srgbClr val="EEF2F8"/>
+            <a:srgbClr val="FFFFFF"/>
           </a:solidFill>
           <a:ln w="12700">
             <a:solidFill>
               <a:srgbClr val="D9E0EA"/>
             </a:solidFill>
-            <a:prstDash val="dash"/>
+            <a:prstDash val="solid"/>
           </a:ln>
-        </p:spPr>
-      </p:sp>
-      <p:sp>
-        <p:nvSpPr>
-          <p:cNvPr id="5" name="Text 3"/>
-          <p:cNvSpPr/>
-          <p:nvPr/>
-        </p:nvSpPr>
-        <p:spPr>
-          <a:xfrm>
-            <a:off x="640080" y="2446020"/>
-            <a:ext cx="5257800" cy="365760"/>
+          <a:effectLst>
+            <a:outerShdw sx="100000" sy="100000" kx="0" ky="0" algn="bl" rotWithShape="0" blurRad="114300" dist="38100" dir="8100000">
+              <a:srgbClr val="0F1E33">
+                <a:alpha val="16000"/>
+              </a:srgbClr>
+            </a:outerShdw>
+          </a:effectLst>
+        </p:spPr>
+      </p:sp>
+      <p:sp>
+        <p:nvSpPr>
+          <p:cNvPr id="7" name="Shape 4"/>
+          <p:cNvSpPr/>
+          <p:nvPr/>
+        </p:nvSpPr>
+        <p:spPr>
+          <a:xfrm>
+            <a:off x="640080" y="5120640"/>
+            <a:ext cx="82296" cy="960120"/>
+          </a:xfrm>
+          <a:prstGeom prst="rect">
+            <a:avLst/>
+          </a:prstGeom>
+          <a:solidFill>
+            <a:srgbClr val="1E8449"/>
+          </a:solidFill>
+          <a:ln/>
+        </p:spPr>
+      </p:sp>
+      <p:sp>
+        <p:nvSpPr>
+          <p:cNvPr id="8" name="Text 5"/>
+          <p:cNvSpPr/>
+          <p:nvPr/>
+        </p:nvSpPr>
+        <p:spPr>
+          <a:xfrm>
+            <a:off x="896112" y="5239512"/>
+            <a:ext cx="4937760" cy="480060"/>
           </a:xfrm>
           <a:prstGeom prst="rect">
             <a:avLst/>
@@ -6934,11 +10043,50 @@
           <a:bodyPr wrap="square" lIns="0" tIns="0" rIns="0" bIns="0" rtlCol="0" anchor="ctr"/>
           <a:lstStyle/>
           <a:p>
-            <a:pPr algn="ctr" indent="0" marL="0">
+            <a:pPr indent="0" marL="0">
               <a:buNone/>
             </a:pPr>
             <a:r>
-              <a:rPr lang="en-US" sz="1300" i="1" dirty="0">
+              <a:rPr lang="en-US" sz="2580" b="1" dirty="0">
+                <a:solidFill>
+                  <a:srgbClr val="1E8449"/>
+                </a:solidFill>
+                <a:latin typeface="Georgia" pitchFamily="34" charset="0"/>
+                <a:ea typeface="Georgia" pitchFamily="34" charset="-122"/>
+                <a:cs typeface="Georgia" pitchFamily="34" charset="-120"/>
+              </a:rPr>
+              <a:t>19 209 шт</a:t>
+            </a:r>
+            <a:endParaRPr lang="en-US" sz="2580" dirty="0"/>
+          </a:p>
+        </p:txBody>
+      </p:sp>
+      <p:sp>
+        <p:nvSpPr>
+          <p:cNvPr id="9" name="Text 6"/>
+          <p:cNvSpPr/>
+          <p:nvPr/>
+        </p:nvSpPr>
+        <p:spPr>
+          <a:xfrm>
+            <a:off x="896112" y="5667908"/>
+            <a:ext cx="4892040" cy="374447"/>
+          </a:xfrm>
+          <a:prstGeom prst="rect">
+            <a:avLst/>
+          </a:prstGeom>
+          <a:noFill/>
+          <a:ln/>
+        </p:spPr>
+        <p:txBody>
+          <a:bodyPr wrap="square" lIns="0" tIns="0" rIns="0" bIns="0" rtlCol="0" anchor="t"/>
+          <a:lstStyle/>
+          <a:p>
+            <a:pPr indent="0" marL="0">
+              <a:buNone/>
+            </a:pPr>
+            <a:r>
+              <a:rPr lang="en-US" sz="1150" dirty="0">
                 <a:solidFill>
                   <a:srgbClr val="6B7787"/>
                 </a:solidFill>
@@ -6946,88 +10094,76 @@
                 <a:ea typeface="Calibri" pitchFamily="34" charset="-122"/>
                 <a:cs typeface="Calibri" pitchFamily="34" charset="-120"/>
               </a:rPr>
-              <a:t>вставить скриншот</a:t>
-            </a:r>
-            <a:endParaRPr lang="en-US" sz="1300" dirty="0"/>
-          </a:p>
-        </p:txBody>
-      </p:sp>
-      <p:sp>
-        <p:nvSpPr>
-          <p:cNvPr id="6" name="Text 4"/>
-          <p:cNvSpPr/>
-          <p:nvPr/>
-        </p:nvSpPr>
-        <p:spPr>
-          <a:xfrm>
-            <a:off x="640080" y="2811780"/>
-            <a:ext cx="5257800" cy="365760"/>
-          </a:xfrm>
-          <a:prstGeom prst="rect">
-            <a:avLst/>
-          </a:prstGeom>
-          <a:noFill/>
-          <a:ln/>
-        </p:spPr>
-        <p:txBody>
-          <a:bodyPr wrap="square" lIns="0" tIns="0" rIns="0" bIns="0" rtlCol="0" anchor="ctr"/>
-          <a:lstStyle/>
-          <a:p>
-            <a:pPr algn="ctr" indent="0" marL="0">
-              <a:buNone/>
-            </a:pPr>
-            <a:r>
-              <a:rPr lang="en-US" sz="1300" b="1" dirty="0">
-                <a:solidFill>
-                  <a:srgbClr val="16243B"/>
-                </a:solidFill>
-                <a:latin typeface="Calibri" pitchFamily="34" charset="0"/>
-                <a:ea typeface="Calibri" pitchFamily="34" charset="-122"/>
-                <a:cs typeface="Calibri" pitchFamily="34" charset="-120"/>
-              </a:rPr>
-              <a:t>Продажи (воронка / отчёт)</a:t>
-            </a:r>
-            <a:endParaRPr lang="en-US" sz="1300" dirty="0"/>
-          </a:p>
-        </p:txBody>
-      </p:sp>
-      <p:sp>
-        <p:nvSpPr>
-          <p:cNvPr id="7" name="Shape 5"/>
-          <p:cNvSpPr/>
-          <p:nvPr/>
-        </p:nvSpPr>
-        <p:spPr>
-          <a:xfrm>
-            <a:off x="6172200" y="1874520"/>
-            <a:ext cx="5257800" cy="1783080"/>
+              <a:t>готовый сток на складах WB</a:t>
+            </a:r>
+            <a:endParaRPr lang="en-US" sz="1150" dirty="0"/>
+          </a:p>
+        </p:txBody>
+      </p:sp>
+      <p:sp>
+        <p:nvSpPr>
+          <p:cNvPr id="10" name="Shape 7"/>
+          <p:cNvSpPr/>
+          <p:nvPr/>
+        </p:nvSpPr>
+        <p:spPr>
+          <a:xfrm>
+            <a:off x="6245352" y="5120640"/>
+            <a:ext cx="5303520" cy="960120"/>
           </a:xfrm>
           <a:prstGeom prst="roundRect">
             <a:avLst>
-              <a:gd name="adj" fmla="val 3077"/>
+              <a:gd name="adj" fmla="val 6667"/>
             </a:avLst>
           </a:prstGeom>
           <a:solidFill>
-            <a:srgbClr val="EEF2F8"/>
+            <a:srgbClr val="FFFFFF"/>
           </a:solidFill>
           <a:ln w="12700">
             <a:solidFill>
               <a:srgbClr val="D9E0EA"/>
             </a:solidFill>
-            <a:prstDash val="dash"/>
+            <a:prstDash val="solid"/>
           </a:ln>
-        </p:spPr>
-      </p:sp>
-      <p:sp>
-        <p:nvSpPr>
-          <p:cNvPr id="8" name="Text 6"/>
-          <p:cNvSpPr/>
-          <p:nvPr/>
-        </p:nvSpPr>
-        <p:spPr>
-          <a:xfrm>
-            <a:off x="6172200" y="2446020"/>
-            <a:ext cx="5257800" cy="365760"/>
+          <a:effectLst>
+            <a:outerShdw sx="100000" sy="100000" kx="0" ky="0" algn="bl" rotWithShape="0" blurRad="114300" dist="38100" dir="8100000">
+              <a:srgbClr val="0F1E33">
+                <a:alpha val="16000"/>
+              </a:srgbClr>
+            </a:outerShdw>
+          </a:effectLst>
+        </p:spPr>
+      </p:sp>
+      <p:sp>
+        <p:nvSpPr>
+          <p:cNvPr id="11" name="Shape 8"/>
+          <p:cNvSpPr/>
+          <p:nvPr/>
+        </p:nvSpPr>
+        <p:spPr>
+          <a:xfrm>
+            <a:off x="6245352" y="5120640"/>
+            <a:ext cx="82296" cy="960120"/>
+          </a:xfrm>
+          <a:prstGeom prst="rect">
+            <a:avLst/>
+          </a:prstGeom>
+          <a:solidFill>
+            <a:srgbClr val="D4A24E"/>
+          </a:solidFill>
+          <a:ln/>
+        </p:spPr>
+      </p:sp>
+      <p:sp>
+        <p:nvSpPr>
+          <p:cNvPr id="12" name="Text 9"/>
+          <p:cNvSpPr/>
+          <p:nvPr/>
+        </p:nvSpPr>
+        <p:spPr>
+          <a:xfrm>
+            <a:off x="6501384" y="5239512"/>
+            <a:ext cx="4937760" cy="480060"/>
           </a:xfrm>
           <a:prstGeom prst="rect">
             <a:avLst/>
@@ -7039,11 +10175,50 @@
           <a:bodyPr wrap="square" lIns="0" tIns="0" rIns="0" bIns="0" rtlCol="0" anchor="ctr"/>
           <a:lstStyle/>
           <a:p>
-            <a:pPr algn="ctr" indent="0" marL="0">
+            <a:pPr indent="0" marL="0">
               <a:buNone/>
             </a:pPr>
             <a:r>
-              <a:rPr lang="en-US" sz="1300" i="1" dirty="0">
+              <a:rPr lang="en-US" sz="2340" b="1" dirty="0">
+                <a:solidFill>
+                  <a:srgbClr val="D4A24E"/>
+                </a:solidFill>
+                <a:latin typeface="Georgia" pitchFamily="34" charset="0"/>
+                <a:ea typeface="Georgia" pitchFamily="34" charset="-122"/>
+                <a:cs typeface="Georgia" pitchFamily="34" charset="-120"/>
+              </a:rPr>
+              <a:t>~25,6 млн ₽</a:t>
+            </a:r>
+            <a:endParaRPr lang="en-US" sz="2340" dirty="0"/>
+          </a:p>
+        </p:txBody>
+      </p:sp>
+      <p:sp>
+        <p:nvSpPr>
+          <p:cNvPr id="13" name="Text 10"/>
+          <p:cNvSpPr/>
+          <p:nvPr/>
+        </p:nvSpPr>
+        <p:spPr>
+          <a:xfrm>
+            <a:off x="6501384" y="5667908"/>
+            <a:ext cx="4892040" cy="374447"/>
+          </a:xfrm>
+          <a:prstGeom prst="rect">
+            <a:avLst/>
+          </a:prstGeom>
+          <a:noFill/>
+          <a:ln/>
+        </p:spPr>
+        <p:txBody>
+          <a:bodyPr wrap="square" lIns="0" tIns="0" rIns="0" bIns="0" rtlCol="0" anchor="t"/>
+          <a:lstStyle/>
+          <a:p>
+            <a:pPr indent="0" marL="0">
+              <a:buNone/>
+            </a:pPr>
+            <a:r>
+              <a:rPr lang="en-US" sz="1150" dirty="0">
                 <a:solidFill>
                   <a:srgbClr val="6B7787"/>
                 </a:solidFill>
@@ -7051,22 +10226,22 @@
                 <a:ea typeface="Calibri" pitchFamily="34" charset="-122"/>
                 <a:cs typeface="Calibri" pitchFamily="34" charset="-120"/>
               </a:rPr>
-              <a:t>вставить скриншот</a:t>
-            </a:r>
-            <a:endParaRPr lang="en-US" sz="1300" dirty="0"/>
-          </a:p>
-        </p:txBody>
-      </p:sp>
-      <p:sp>
-        <p:nvSpPr>
-          <p:cNvPr id="9" name="Text 7"/>
-          <p:cNvSpPr/>
-          <p:nvPr/>
-        </p:nvSpPr>
-        <p:spPr>
-          <a:xfrm>
-            <a:off x="6172200" y="2811780"/>
-            <a:ext cx="5257800" cy="365760"/>
+              <a:t>себестоимость (до ~190 млн в рознице)</a:t>
+            </a:r>
+            <a:endParaRPr lang="en-US" sz="1150" dirty="0"/>
+          </a:p>
+        </p:txBody>
+      </p:sp>
+      <p:sp>
+        <p:nvSpPr>
+          <p:cNvPr id="14" name="Text 11"/>
+          <p:cNvSpPr/>
+          <p:nvPr/>
+        </p:nvSpPr>
+        <p:spPr>
+          <a:xfrm>
+            <a:off x="11274552" y="6400800"/>
+            <a:ext cx="548640" cy="274320"/>
           </a:xfrm>
           <a:prstGeom prst="rect">
             <a:avLst/>
@@ -7075,270 +10250,21 @@
           <a:ln/>
         </p:spPr>
         <p:txBody>
-          <a:bodyPr wrap="square" lIns="0" tIns="0" rIns="0" bIns="0" rtlCol="0" anchor="ctr"/>
-          <a:lstStyle/>
-          <a:p>
-            <a:pPr algn="ctr" indent="0" marL="0">
+          <a:bodyPr wrap="square" rtlCol="0" anchor="ctr"/>
+          <a:lstStyle/>
+          <a:p>
+            <a:pPr algn="r" indent="0" marL="0">
               <a:buNone/>
             </a:pPr>
             <a:r>
-              <a:rPr lang="en-US" sz="1300" b="1" dirty="0">
-                <a:solidFill>
-                  <a:srgbClr val="16243B"/>
+              <a:rPr lang="en-US" sz="1000" dirty="0">
+                <a:solidFill>
+                  <a:srgbClr val="6B7787"/>
                 </a:solidFill>
                 <a:latin typeface="Calibri" pitchFamily="34" charset="0"/>
                 <a:ea typeface="Calibri" pitchFamily="34" charset="-122"/>
                 <a:cs typeface="Calibri" pitchFamily="34" charset="-120"/>
               </a:rPr>
-              <a:t>Остатки на складах</a:t>
-            </a:r>
-            <a:endParaRPr lang="en-US" sz="1300" dirty="0"/>
-          </a:p>
-        </p:txBody>
-      </p:sp>
-      <p:sp>
-        <p:nvSpPr>
-          <p:cNvPr id="10" name="Shape 8"/>
-          <p:cNvSpPr/>
-          <p:nvPr/>
-        </p:nvSpPr>
-        <p:spPr>
-          <a:xfrm>
-            <a:off x="640080" y="3977640"/>
-            <a:ext cx="5257800" cy="1783080"/>
-          </a:xfrm>
-          <a:prstGeom prst="roundRect">
-            <a:avLst>
-              <a:gd name="adj" fmla="val 3077"/>
-            </a:avLst>
-          </a:prstGeom>
-          <a:solidFill>
-            <a:srgbClr val="EEF2F8"/>
-          </a:solidFill>
-          <a:ln w="12700">
-            <a:solidFill>
-              <a:srgbClr val="D9E0EA"/>
-            </a:solidFill>
-            <a:prstDash val="dash"/>
-          </a:ln>
-        </p:spPr>
-      </p:sp>
-      <p:sp>
-        <p:nvSpPr>
-          <p:cNvPr id="11" name="Text 9"/>
-          <p:cNvSpPr/>
-          <p:nvPr/>
-        </p:nvSpPr>
-        <p:spPr>
-          <a:xfrm>
-            <a:off x="640080" y="4549140"/>
-            <a:ext cx="5257800" cy="365760"/>
-          </a:xfrm>
-          <a:prstGeom prst="rect">
-            <a:avLst/>
-          </a:prstGeom>
-          <a:noFill/>
-          <a:ln/>
-        </p:spPr>
-        <p:txBody>
-          <a:bodyPr wrap="square" lIns="0" tIns="0" rIns="0" bIns="0" rtlCol="0" anchor="ctr"/>
-          <a:lstStyle/>
-          <a:p>
-            <a:pPr algn="ctr" indent="0" marL="0">
-              <a:buNone/>
-            </a:pPr>
-            <a:r>
-              <a:rPr lang="en-US" sz="1300" i="1" dirty="0">
-                <a:solidFill>
-                  <a:srgbClr val="6B7787"/>
-                </a:solidFill>
-                <a:latin typeface="Calibri" pitchFamily="34" charset="0"/>
-                <a:ea typeface="Calibri" pitchFamily="34" charset="-122"/>
-                <a:cs typeface="Calibri" pitchFamily="34" charset="-120"/>
-              </a:rPr>
-              <a:t>вставить скриншот</a:t>
-            </a:r>
-            <a:endParaRPr lang="en-US" sz="1300" dirty="0"/>
-          </a:p>
-        </p:txBody>
-      </p:sp>
-      <p:sp>
-        <p:nvSpPr>
-          <p:cNvPr id="12" name="Text 10"/>
-          <p:cNvSpPr/>
-          <p:nvPr/>
-        </p:nvSpPr>
-        <p:spPr>
-          <a:xfrm>
-            <a:off x="640080" y="4914900"/>
-            <a:ext cx="5257800" cy="365760"/>
-          </a:xfrm>
-          <a:prstGeom prst="rect">
-            <a:avLst/>
-          </a:prstGeom>
-          <a:noFill/>
-          <a:ln/>
-        </p:spPr>
-        <p:txBody>
-          <a:bodyPr wrap="square" lIns="0" tIns="0" rIns="0" bIns="0" rtlCol="0" anchor="ctr"/>
-          <a:lstStyle/>
-          <a:p>
-            <a:pPr algn="ctr" indent="0" marL="0">
-              <a:buNone/>
-            </a:pPr>
-            <a:r>
-              <a:rPr lang="en-US" sz="1300" b="1" dirty="0">
-                <a:solidFill>
-                  <a:srgbClr val="16243B"/>
-                </a:solidFill>
-                <a:latin typeface="Calibri" pitchFamily="34" charset="0"/>
-                <a:ea typeface="Calibri" pitchFamily="34" charset="-122"/>
-                <a:cs typeface="Calibri" pitchFamily="34" charset="-120"/>
-              </a:rPr>
-              <a:t>Финансовый отчёт / выручка</a:t>
-            </a:r>
-            <a:endParaRPr lang="en-US" sz="1300" dirty="0"/>
-          </a:p>
-        </p:txBody>
-      </p:sp>
-      <p:sp>
-        <p:nvSpPr>
-          <p:cNvPr id="13" name="Shape 11"/>
-          <p:cNvSpPr/>
-          <p:nvPr/>
-        </p:nvSpPr>
-        <p:spPr>
-          <a:xfrm>
-            <a:off x="6172200" y="3977640"/>
-            <a:ext cx="5257800" cy="1783080"/>
-          </a:xfrm>
-          <a:prstGeom prst="roundRect">
-            <a:avLst>
-              <a:gd name="adj" fmla="val 3077"/>
-            </a:avLst>
-          </a:prstGeom>
-          <a:solidFill>
-            <a:srgbClr val="EEF2F8"/>
-          </a:solidFill>
-          <a:ln w="12700">
-            <a:solidFill>
-              <a:srgbClr val="D9E0EA"/>
-            </a:solidFill>
-            <a:prstDash val="dash"/>
-          </a:ln>
-        </p:spPr>
-      </p:sp>
-      <p:sp>
-        <p:nvSpPr>
-          <p:cNvPr id="14" name="Text 12"/>
-          <p:cNvSpPr/>
-          <p:nvPr/>
-        </p:nvSpPr>
-        <p:spPr>
-          <a:xfrm>
-            <a:off x="6172200" y="4549140"/>
-            <a:ext cx="5257800" cy="365760"/>
-          </a:xfrm>
-          <a:prstGeom prst="rect">
-            <a:avLst/>
-          </a:prstGeom>
-          <a:noFill/>
-          <a:ln/>
-        </p:spPr>
-        <p:txBody>
-          <a:bodyPr wrap="square" lIns="0" tIns="0" rIns="0" bIns="0" rtlCol="0" anchor="ctr"/>
-          <a:lstStyle/>
-          <a:p>
-            <a:pPr algn="ctr" indent="0" marL="0">
-              <a:buNone/>
-            </a:pPr>
-            <a:r>
-              <a:rPr lang="en-US" sz="1300" i="1" dirty="0">
-                <a:solidFill>
-                  <a:srgbClr val="6B7787"/>
-                </a:solidFill>
-                <a:latin typeface="Calibri" pitchFamily="34" charset="0"/>
-                <a:ea typeface="Calibri" pitchFamily="34" charset="-122"/>
-                <a:cs typeface="Calibri" pitchFamily="34" charset="-120"/>
-              </a:rPr>
-              <a:t>вставить скриншот</a:t>
-            </a:r>
-            <a:endParaRPr lang="en-US" sz="1300" dirty="0"/>
-          </a:p>
-        </p:txBody>
-      </p:sp>
-      <p:sp>
-        <p:nvSpPr>
-          <p:cNvPr id="15" name="Text 13"/>
-          <p:cNvSpPr/>
-          <p:nvPr/>
-        </p:nvSpPr>
-        <p:spPr>
-          <a:xfrm>
-            <a:off x="6172200" y="4914900"/>
-            <a:ext cx="5257800" cy="365760"/>
-          </a:xfrm>
-          <a:prstGeom prst="rect">
-            <a:avLst/>
-          </a:prstGeom>
-          <a:noFill/>
-          <a:ln/>
-        </p:spPr>
-        <p:txBody>
-          <a:bodyPr wrap="square" lIns="0" tIns="0" rIns="0" bIns="0" rtlCol="0" anchor="ctr"/>
-          <a:lstStyle/>
-          <a:p>
-            <a:pPr algn="ctr" indent="0" marL="0">
-              <a:buNone/>
-            </a:pPr>
-            <a:r>
-              <a:rPr lang="en-US" sz="1300" b="1" dirty="0">
-                <a:solidFill>
-                  <a:srgbClr val="16243B"/>
-                </a:solidFill>
-                <a:latin typeface="Calibri" pitchFamily="34" charset="0"/>
-                <a:ea typeface="Calibri" pitchFamily="34" charset="-122"/>
-                <a:cs typeface="Calibri" pitchFamily="34" charset="-120"/>
-              </a:rPr>
-              <a:t>Рекламный кабинет (ДРР)</a:t>
-            </a:r>
-            <a:endParaRPr lang="en-US" sz="1300" dirty="0"/>
-          </a:p>
-        </p:txBody>
-      </p:sp>
-      <p:sp>
-        <p:nvSpPr>
-          <p:cNvPr id="16" name="Text 14"/>
-          <p:cNvSpPr/>
-          <p:nvPr/>
-        </p:nvSpPr>
-        <p:spPr>
-          <a:xfrm>
-            <a:off x="11274552" y="6400800"/>
-            <a:ext cx="548640" cy="274320"/>
-          </a:xfrm>
-          <a:prstGeom prst="rect">
-            <a:avLst/>
-          </a:prstGeom>
-          <a:noFill/>
-          <a:ln/>
-        </p:spPr>
-        <p:txBody>
-          <a:bodyPr wrap="square" rtlCol="0" anchor="ctr"/>
-          <a:lstStyle/>
-          <a:p>
-            <a:pPr algn="r" indent="0" marL="0">
-              <a:buNone/>
-            </a:pPr>
-            <a:r>
-              <a:rPr lang="en-US" sz="1000" dirty="0">
-                <a:solidFill>
-                  <a:srgbClr val="6B7787"/>
-                </a:solidFill>
-                <a:latin typeface="Calibri" pitchFamily="34" charset="0"/>
-                <a:ea typeface="Calibri" pitchFamily="34" charset="-122"/>
-                <a:cs typeface="Calibri" pitchFamily="34" charset="-120"/>
-              </a:rPr>
               <a:t>07</a:t>
             </a:r>
             <a:endParaRPr lang="en-US" sz="1000" dirty="0"/>
@@ -7347,7 +10273,7 @@
       </p:sp>
       <p:sp>
         <p:nvSpPr>
-          <p:cNvPr id="17" name="Text 15"/>
+          <p:cNvPr id="15" name="Text 12"/>
           <p:cNvSpPr/>
           <p:nvPr/>
         </p:nvSpPr>
